--- a/로또_1226회차_분석리포트.pptx
+++ b/로또_1226회차_분석리포트.pptx
@@ -9755,7 +9755,7 @@
                           </a:solidFill>
                           <a:latin typeface="Apple SD Gothic Neo"/>
                         </a:rPr>
-                        <a:t>0.12</a:t>
+                        <a:t>0.06</a:t>
                       </a:r>
                     </a:p>
                   </a:txBody>
@@ -9778,7 +9778,7 @@
                           </a:solidFill>
                           <a:latin typeface="Apple SD Gothic Neo"/>
                         </a:rPr>
-                        <a:t>끝수이월, 장기미출현, 3의배수, 궁합수, 출현주기</a:t>
+                        <a:t>끝수이월, 장기미출현, 3의배수, 출현주기, 합계균형</a:t>
                       </a:r>
                     </a:p>
                   </a:txBody>
@@ -9849,7 +9849,7 @@
                           </a:solidFill>
                           <a:latin typeface="Apple SD Gothic Neo"/>
                         </a:rPr>
-                        <a:t>0.10</a:t>
+                        <a:t>0.05</a:t>
                       </a:r>
                     </a:p>
                   </a:txBody>
@@ -9872,7 +9872,7 @@
                           </a:solidFill>
                           <a:latin typeface="Apple SD Gothic Neo"/>
                         </a:rPr>
-                        <a:t>끝수이월, 미출현, 3의배수, 5의배수, 궁합수, 출현주기</a:t>
+                        <a:t>끝수이월, 미출현, 3의배수, 5의배수, 출현주기, 합계균형</a:t>
                       </a:r>
                     </a:p>
                   </a:txBody>
@@ -9920,7 +9920,7 @@
                           </a:solidFill>
                           <a:latin typeface="Apple SD Gothic Neo"/>
                         </a:rPr>
-                        <a:t>45번</a:t>
+                        <a:t>3번</a:t>
                       </a:r>
                     </a:p>
                   </a:txBody>
@@ -9943,7 +9943,7 @@
                           </a:solidFill>
                           <a:latin typeface="Apple SD Gothic Neo"/>
                         </a:rPr>
-                        <a:t>0.10</a:t>
+                        <a:t>0.04</a:t>
                       </a:r>
                     </a:p>
                   </a:txBody>
@@ -9966,7 +9966,7 @@
                           </a:solidFill>
                           <a:latin typeface="Apple SD Gothic Neo"/>
                         </a:rPr>
-                        <a:t>끝수이월, 3의배수, 5의배수, 궁합수</a:t>
+                        <a:t>미출현, 3의배수, 출현주기</a:t>
                       </a:r>
                     </a:p>
                   </a:txBody>
@@ -10014,7 +10014,7 @@
                           </a:solidFill>
                           <a:latin typeface="Apple SD Gothic Neo"/>
                         </a:rPr>
-                        <a:t>10번</a:t>
+                        <a:t>24번</a:t>
                       </a:r>
                     </a:p>
                   </a:txBody>
@@ -10037,7 +10037,7 @@
                           </a:solidFill>
                           <a:latin typeface="Apple SD Gothic Neo"/>
                         </a:rPr>
-                        <a:t>0.07</a:t>
+                        <a:t>0.04</a:t>
                       </a:r>
                     </a:p>
                   </a:txBody>
@@ -10060,7 +10060,7 @@
                           </a:solidFill>
                           <a:latin typeface="Apple SD Gothic Neo"/>
                         </a:rPr>
-                        <a:t>미출현, 5의배수, 출현주기</a:t>
+                        <a:t>미출현, 3의배수, 출현주기, 합계균형</a:t>
                       </a:r>
                     </a:p>
                   </a:txBody>
@@ -10108,7 +10108,7 @@
                           </a:solidFill>
                           <a:latin typeface="Apple SD Gothic Neo"/>
                         </a:rPr>
-                        <a:t>5번</a:t>
+                        <a:t>31번</a:t>
                       </a:r>
                     </a:p>
                   </a:txBody>
@@ -10131,7 +10131,7 @@
                           </a:solidFill>
                           <a:latin typeface="Apple SD Gothic Neo"/>
                         </a:rPr>
-                        <a:t>0.07</a:t>
+                        <a:t>0.04</a:t>
                       </a:r>
                     </a:p>
                   </a:txBody>
@@ -10154,7 +10154,7 @@
                           </a:solidFill>
                           <a:latin typeface="Apple SD Gothic Neo"/>
                         </a:rPr>
-                        <a:t>끝수이월, 미출현, 5의배수, 출현주기</a:t>
+                        <a:t>끝수이월, 미출현, 출현주기, 합계균형</a:t>
                       </a:r>
                     </a:p>
                   </a:txBody>
@@ -10202,7 +10202,7 @@
                           </a:solidFill>
                           <a:latin typeface="Apple SD Gothic Neo"/>
                         </a:rPr>
-                        <a:t>35번</a:t>
+                        <a:t>10번</a:t>
                       </a:r>
                     </a:p>
                   </a:txBody>
@@ -10225,7 +10225,7 @@
                           </a:solidFill>
                           <a:latin typeface="Apple SD Gothic Neo"/>
                         </a:rPr>
-                        <a:t>0.06</a:t>
+                        <a:t>0.04</a:t>
                       </a:r>
                     </a:p>
                   </a:txBody>
@@ -10248,7 +10248,7 @@
                           </a:solidFill>
                           <a:latin typeface="Apple SD Gothic Neo"/>
                         </a:rPr>
-                        <a:t>끝수이월, 미출현, 5의배수, 출현주기</a:t>
+                        <a:t>미출현, 5의배수, 출현주기, 합계균형</a:t>
                       </a:r>
                     </a:p>
                   </a:txBody>
@@ -10296,7 +10296,7 @@
                           </a:solidFill>
                           <a:latin typeface="Apple SD Gothic Neo"/>
                         </a:rPr>
-                        <a:t>40번</a:t>
+                        <a:t>29번</a:t>
                       </a:r>
                     </a:p>
                   </a:txBody>
@@ -10319,7 +10319,7 @@
                           </a:solidFill>
                           <a:latin typeface="Apple SD Gothic Neo"/>
                         </a:rPr>
-                        <a:t>0.06</a:t>
+                        <a:t>0.04</a:t>
                       </a:r>
                     </a:p>
                   </a:txBody>
@@ -10342,7 +10342,7 @@
                           </a:solidFill>
                           <a:latin typeface="Apple SD Gothic Neo"/>
                         </a:rPr>
-                        <a:t>미출현, 5의배수, 출현주기</a:t>
+                        <a:t>끝수이월, 미출현, 출현주기, 합계균형</a:t>
                       </a:r>
                     </a:p>
                   </a:txBody>
@@ -10390,7 +10390,7 @@
                           </a:solidFill>
                           <a:latin typeface="Apple SD Gothic Neo"/>
                         </a:rPr>
-                        <a:t>34번</a:t>
+                        <a:t>1번</a:t>
                       </a:r>
                     </a:p>
                   </a:txBody>
@@ -10413,7 +10413,7 @@
                           </a:solidFill>
                           <a:latin typeface="Apple SD Gothic Neo"/>
                         </a:rPr>
-                        <a:t>0.06</a:t>
+                        <a:t>0.04</a:t>
                       </a:r>
                     </a:p>
                   </a:txBody>
@@ -10436,7 +10436,7 @@
                           </a:solidFill>
                           <a:latin typeface="Apple SD Gothic Neo"/>
                         </a:rPr>
-                        <a:t>미출현, 궁합수, 출현주기</a:t>
+                        <a:t>끝수이월, 미출현, 출현주기</a:t>
                       </a:r>
                     </a:p>
                   </a:txBody>
@@ -10484,7 +10484,7 @@
                           </a:solidFill>
                           <a:latin typeface="Apple SD Gothic Neo"/>
                         </a:rPr>
-                        <a:t>30번</a:t>
+                        <a:t>5번</a:t>
                       </a:r>
                     </a:p>
                   </a:txBody>
@@ -10507,7 +10507,7 @@
                           </a:solidFill>
                           <a:latin typeface="Apple SD Gothic Neo"/>
                         </a:rPr>
-                        <a:t>0.06</a:t>
+                        <a:t>0.03</a:t>
                       </a:r>
                     </a:p>
                   </a:txBody>
@@ -10530,7 +10530,7 @@
                           </a:solidFill>
                           <a:latin typeface="Apple SD Gothic Neo"/>
                         </a:rPr>
-                        <a:t>3의배수, 5의배수</a:t>
+                        <a:t>끝수이월, 미출현, 5의배수, 출현주기, 합계균형</a:t>
                       </a:r>
                     </a:p>
                   </a:txBody>
@@ -10578,7 +10578,7 @@
                           </a:solidFill>
                           <a:latin typeface="Apple SD Gothic Neo"/>
                         </a:rPr>
-                        <a:t>3번</a:t>
+                        <a:t>35번</a:t>
                       </a:r>
                     </a:p>
                   </a:txBody>
@@ -10601,7 +10601,7 @@
                           </a:solidFill>
                           <a:latin typeface="Apple SD Gothic Neo"/>
                         </a:rPr>
-                        <a:t>0.05</a:t>
+                        <a:t>0.03</a:t>
                       </a:r>
                     </a:p>
                   </a:txBody>
@@ -10624,7 +10624,7 @@
                           </a:solidFill>
                           <a:latin typeface="Apple SD Gothic Neo"/>
                         </a:rPr>
-                        <a:t>미출현, 3의배수, 출현주기</a:t>
+                        <a:t>끝수이월, 미출현, 5의배수, 출현주기, 합계균형</a:t>
                       </a:r>
                     </a:p>
                   </a:txBody>
@@ -10672,7 +10672,7 @@
                           </a:solidFill>
                           <a:latin typeface="Apple SD Gothic Neo"/>
                         </a:rPr>
-                        <a:t>21번</a:t>
+                        <a:t>23번</a:t>
                       </a:r>
                     </a:p>
                   </a:txBody>
@@ -10695,7 +10695,7 @@
                           </a:solidFill>
                           <a:latin typeface="Apple SD Gothic Neo"/>
                         </a:rPr>
-                        <a:t>0.04</a:t>
+                        <a:t>0.03</a:t>
                       </a:r>
                     </a:p>
                   </a:txBody>
@@ -10718,7 +10718,7 @@
                           </a:solidFill>
                           <a:latin typeface="Apple SD Gothic Neo"/>
                         </a:rPr>
-                        <a:t>끝수이월, 3의배수, 궁합수</a:t>
+                        <a:t>미출현, 출현주기, 합계균형</a:t>
                       </a:r>
                     </a:p>
                   </a:txBody>
@@ -10766,7 +10766,7 @@
                           </a:solidFill>
                           <a:latin typeface="Apple SD Gothic Neo"/>
                         </a:rPr>
-                        <a:t>1번</a:t>
+                        <a:t>14번</a:t>
                       </a:r>
                     </a:p>
                   </a:txBody>
@@ -10789,7 +10789,7 @@
                           </a:solidFill>
                           <a:latin typeface="Apple SD Gothic Neo"/>
                         </a:rPr>
-                        <a:t>0.04</a:t>
+                        <a:t>0.03</a:t>
                       </a:r>
                     </a:p>
                   </a:txBody>
@@ -10812,7 +10812,7 @@
                           </a:solidFill>
                           <a:latin typeface="Apple SD Gothic Neo"/>
                         </a:rPr>
-                        <a:t>끝수이월, 미출현, 궁합수, 출현주기</a:t>
+                        <a:t>미출현, 출현주기, 합계균형</a:t>
                       </a:r>
                     </a:p>
                   </a:txBody>
@@ -10860,7 +10860,7 @@
                           </a:solidFill>
                           <a:latin typeface="Apple SD Gothic Neo"/>
                         </a:rPr>
-                        <a:t>25번</a:t>
+                        <a:t>34번</a:t>
                       </a:r>
                     </a:p>
                   </a:txBody>
@@ -10883,7 +10883,7 @@
                           </a:solidFill>
                           <a:latin typeface="Apple SD Gothic Neo"/>
                         </a:rPr>
-                        <a:t>0.04</a:t>
+                        <a:t>0.03</a:t>
                       </a:r>
                     </a:p>
                   </a:txBody>
@@ -10906,7 +10906,7 @@
                           </a:solidFill>
                           <a:latin typeface="Apple SD Gothic Neo"/>
                         </a:rPr>
-                        <a:t>끝수이월, 5의배수</a:t>
+                        <a:t>미출현, 출현주기, 합계균형</a:t>
                       </a:r>
                     </a:p>
                   </a:txBody>
@@ -10954,7 +10954,7 @@
                           </a:solidFill>
                           <a:latin typeface="Apple SD Gothic Neo"/>
                         </a:rPr>
-                        <a:t>24번</a:t>
+                        <a:t>38번</a:t>
                       </a:r>
                     </a:p>
                   </a:txBody>
@@ -10977,7 +10977,7 @@
                           </a:solidFill>
                           <a:latin typeface="Apple SD Gothic Neo"/>
                         </a:rPr>
-                        <a:t>0.04</a:t>
+                        <a:t>0.03</a:t>
                       </a:r>
                     </a:p>
                   </a:txBody>
@@ -11000,7 +11000,7 @@
                           </a:solidFill>
                           <a:latin typeface="Apple SD Gothic Neo"/>
                         </a:rPr>
-                        <a:t>미출현, 3의배수, 출현주기</a:t>
+                        <a:t>끝수이월, 미출현, 출현주기, 합계균형</a:t>
                       </a:r>
                     </a:p>
                   </a:txBody>
@@ -11048,7 +11048,7 @@
                           </a:solidFill>
                           <a:latin typeface="Apple SD Gothic Neo"/>
                         </a:rPr>
-                        <a:t>20번</a:t>
+                        <a:t>40번</a:t>
                       </a:r>
                     </a:p>
                   </a:txBody>
@@ -11071,7 +11071,7 @@
                           </a:solidFill>
                           <a:latin typeface="Apple SD Gothic Neo"/>
                         </a:rPr>
-                        <a:t>0.04</a:t>
+                        <a:t>0.03</a:t>
                       </a:r>
                     </a:p>
                   </a:txBody>
@@ -11094,7 +11094,7 @@
                           </a:solidFill>
                           <a:latin typeface="Apple SD Gothic Neo"/>
                         </a:rPr>
-                        <a:t>5의배수</a:t>
+                        <a:t>미출현, 5의배수, 출현주기</a:t>
                       </a:r>
                     </a:p>
                   </a:txBody>
@@ -11142,7 +11142,7 @@
                           </a:solidFill>
                           <a:latin typeface="Apple SD Gothic Neo"/>
                         </a:rPr>
-                        <a:t>33번</a:t>
+                        <a:t>26번</a:t>
                       </a:r>
                     </a:p>
                   </a:txBody>
@@ -11165,7 +11165,7 @@
                           </a:solidFill>
                           <a:latin typeface="Apple SD Gothic Neo"/>
                         </a:rPr>
-                        <a:t>0.04</a:t>
+                        <a:t>0.02</a:t>
                       </a:r>
                     </a:p>
                   </a:txBody>
@@ -11188,7 +11188,7 @@
                           </a:solidFill>
                           <a:latin typeface="Apple SD Gothic Neo"/>
                         </a:rPr>
-                        <a:t>3의배수, 궁합수</a:t>
+                        <a:t>미출현, 출현주기, 합계균형</a:t>
                       </a:r>
                     </a:p>
                   </a:txBody>
@@ -11236,7 +11236,7 @@
                           </a:solidFill>
                           <a:latin typeface="Apple SD Gothic Neo"/>
                         </a:rPr>
-                        <a:t>27번</a:t>
+                        <a:t>7번</a:t>
                       </a:r>
                     </a:p>
                   </a:txBody>
@@ -11259,7 +11259,7 @@
                           </a:solidFill>
                           <a:latin typeface="Apple SD Gothic Neo"/>
                         </a:rPr>
-                        <a:t>0.04</a:t>
+                        <a:t>0.02</a:t>
                       </a:r>
                     </a:p>
                   </a:txBody>
@@ -11282,7 +11282,7 @@
                           </a:solidFill>
                           <a:latin typeface="Apple SD Gothic Neo"/>
                         </a:rPr>
-                        <a:t>3의배수, 궁합수</a:t>
+                        <a:t>미출현, 출현주기, 합계균형</a:t>
                       </a:r>
                     </a:p>
                   </a:txBody>
@@ -11330,7 +11330,7 @@
                           </a:solidFill>
                           <a:latin typeface="Apple SD Gothic Neo"/>
                         </a:rPr>
-                        <a:t>31번</a:t>
+                        <a:t>45번</a:t>
                       </a:r>
                     </a:p>
                   </a:txBody>
@@ -11353,7 +11353,7 @@
                           </a:solidFill>
                           <a:latin typeface="Apple SD Gothic Neo"/>
                         </a:rPr>
-                        <a:t>0.04</a:t>
+                        <a:t>0.02</a:t>
                       </a:r>
                     </a:p>
                   </a:txBody>
@@ -11376,7 +11376,7 @@
                           </a:solidFill>
                           <a:latin typeface="Apple SD Gothic Neo"/>
                         </a:rPr>
-                        <a:t>끝수이월, 미출현, 출현주기</a:t>
+                        <a:t>끝수이월, 3의배수, 5의배수</a:t>
                       </a:r>
                     </a:p>
                   </a:txBody>
@@ -11424,7 +11424,7 @@
                           </a:solidFill>
                           <a:latin typeface="Apple SD Gothic Neo"/>
                         </a:rPr>
-                        <a:t>19번</a:t>
+                        <a:t>37번</a:t>
                       </a:r>
                     </a:p>
                   </a:txBody>
@@ -11447,7 +11447,7 @@
                           </a:solidFill>
                           <a:latin typeface="Apple SD Gothic Neo"/>
                         </a:rPr>
-                        <a:t>0.04</a:t>
+                        <a:t>0.02</a:t>
                       </a:r>
                     </a:p>
                   </a:txBody>
@@ -11470,7 +11470,7 @@
                           </a:solidFill>
                           <a:latin typeface="Apple SD Gothic Neo"/>
                         </a:rPr>
-                        <a:t>끝수이월, 궁합수</a:t>
+                        <a:t>장기미출현, 출현주기, 합계균형</a:t>
                       </a:r>
                     </a:p>
                   </a:txBody>
@@ -11518,7 +11518,7 @@
                           </a:solidFill>
                           <a:latin typeface="Apple SD Gothic Neo"/>
                         </a:rPr>
-                        <a:t>29번</a:t>
+                        <a:t>21번</a:t>
                       </a:r>
                     </a:p>
                   </a:txBody>
@@ -11541,7 +11541,7 @@
                           </a:solidFill>
                           <a:latin typeface="Apple SD Gothic Neo"/>
                         </a:rPr>
-                        <a:t>0.04</a:t>
+                        <a:t>0.02</a:t>
                       </a:r>
                     </a:p>
                   </a:txBody>
@@ -11564,7 +11564,7 @@
                           </a:solidFill>
                           <a:latin typeface="Apple SD Gothic Neo"/>
                         </a:rPr>
-                        <a:t>끝수이월, 미출현, 출현주기</a:t>
+                        <a:t>끝수이월, 3의배수, 합계균형</a:t>
                       </a:r>
                     </a:p>
                   </a:txBody>
@@ -11612,7 +11612,7 @@
                           </a:solidFill>
                           <a:latin typeface="Apple SD Gothic Neo"/>
                         </a:rPr>
-                        <a:t>37번</a:t>
+                        <a:t>18번</a:t>
                       </a:r>
                     </a:p>
                   </a:txBody>
@@ -11635,7 +11635,7 @@
                           </a:solidFill>
                           <a:latin typeface="Apple SD Gothic Neo"/>
                         </a:rPr>
-                        <a:t>0.03</a:t>
+                        <a:t>0.02</a:t>
                       </a:r>
                     </a:p>
                   </a:txBody>
@@ -11658,7 +11658,7 @@
                           </a:solidFill>
                           <a:latin typeface="Apple SD Gothic Neo"/>
                         </a:rPr>
-                        <a:t>장기미출현, 출현주기</a:t>
+                        <a:t>끝수이월, 3의배수, 합계균형</a:t>
                       </a:r>
                     </a:p>
                   </a:txBody>
@@ -11706,7 +11706,7 @@
                           </a:solidFill>
                           <a:latin typeface="Apple SD Gothic Neo"/>
                         </a:rPr>
-                        <a:t>23번</a:t>
+                        <a:t>30번</a:t>
                       </a:r>
                     </a:p>
                   </a:txBody>
@@ -11729,7 +11729,7 @@
                           </a:solidFill>
                           <a:latin typeface="Apple SD Gothic Neo"/>
                         </a:rPr>
-                        <a:t>0.03</a:t>
+                        <a:t>0.01</a:t>
                       </a:r>
                     </a:p>
                   </a:txBody>
@@ -11752,7 +11752,7 @@
                           </a:solidFill>
                           <a:latin typeface="Apple SD Gothic Neo"/>
                         </a:rPr>
-                        <a:t>미출현, 출현주기</a:t>
+                        <a:t>3의배수, 5의배수, 합계균형</a:t>
                       </a:r>
                     </a:p>
                   </a:txBody>
@@ -11800,7 +11800,7 @@
                           </a:solidFill>
                           <a:latin typeface="Apple SD Gothic Neo"/>
                         </a:rPr>
-                        <a:t>14번</a:t>
+                        <a:t>39번</a:t>
                       </a:r>
                     </a:p>
                   </a:txBody>
@@ -11823,7 +11823,7 @@
                           </a:solidFill>
                           <a:latin typeface="Apple SD Gothic Neo"/>
                         </a:rPr>
-                        <a:t>0.03</a:t>
+                        <a:t>0.01</a:t>
                       </a:r>
                     </a:p>
                   </a:txBody>
@@ -11846,7 +11846,7 @@
                           </a:solidFill>
                           <a:latin typeface="Apple SD Gothic Neo"/>
                         </a:rPr>
-                        <a:t>미출현, 출현주기</a:t>
+                        <a:t>끝수이월, 3의배수, 합계균형</a:t>
                       </a:r>
                     </a:p>
                   </a:txBody>
@@ -12200,7 +12200,7 @@
                           </a:solidFill>
                           <a:latin typeface="Apple SD Gothic Neo"/>
                         </a:rPr>
-                        <a:t>7번</a:t>
+                        <a:t>42번</a:t>
                       </a:r>
                     </a:p>
                   </a:txBody>
@@ -12223,7 +12223,7 @@
                           </a:solidFill>
                           <a:latin typeface="Apple SD Gothic Neo"/>
                         </a:rPr>
-                        <a:t>0.03</a:t>
+                        <a:t>0.01</a:t>
                       </a:r>
                     </a:p>
                   </a:txBody>
@@ -12246,7 +12246,7 @@
                           </a:solidFill>
                           <a:latin typeface="Apple SD Gothic Neo"/>
                         </a:rPr>
-                        <a:t>미출현, 궁합수, 출현주기</a:t>
+                        <a:t>끝수이월, 3의배수</a:t>
                       </a:r>
                     </a:p>
                   </a:txBody>
@@ -12294,7 +12294,7 @@
                           </a:solidFill>
                           <a:latin typeface="Apple SD Gothic Neo"/>
                         </a:rPr>
-                        <a:t>38번</a:t>
+                        <a:t>2번</a:t>
                       </a:r>
                     </a:p>
                   </a:txBody>
@@ -12317,7 +12317,7 @@
                           </a:solidFill>
                           <a:latin typeface="Apple SD Gothic Neo"/>
                         </a:rPr>
-                        <a:t>0.02</a:t>
+                        <a:t>0.01</a:t>
                       </a:r>
                     </a:p>
                   </a:txBody>
@@ -12340,7 +12340,7 @@
                           </a:solidFill>
                           <a:latin typeface="Apple SD Gothic Neo"/>
                         </a:rPr>
-                        <a:t>끝수이월, 미출현, 출현주기</a:t>
+                        <a:t>끝수이월, 미출현</a:t>
                       </a:r>
                     </a:p>
                   </a:txBody>
@@ -12388,7 +12388,7 @@
                           </a:solidFill>
                           <a:latin typeface="Apple SD Gothic Neo"/>
                         </a:rPr>
-                        <a:t>18번</a:t>
+                        <a:t>9번</a:t>
                       </a:r>
                     </a:p>
                   </a:txBody>
@@ -12411,7 +12411,7 @@
                           </a:solidFill>
                           <a:latin typeface="Apple SD Gothic Neo"/>
                         </a:rPr>
-                        <a:t>0.02</a:t>
+                        <a:t>0.01</a:t>
                       </a:r>
                     </a:p>
                   </a:txBody>
@@ -12434,7 +12434,7 @@
                           </a:solidFill>
                           <a:latin typeface="Apple SD Gothic Neo"/>
                         </a:rPr>
-                        <a:t>끝수이월, 3의배수</a:t>
+                        <a:t>끝수이월, 3의배수, 합계균형</a:t>
                       </a:r>
                     </a:p>
                   </a:txBody>
@@ -12482,7 +12482,7 @@
                           </a:solidFill>
                           <a:latin typeface="Apple SD Gothic Neo"/>
                         </a:rPr>
-                        <a:t>39번</a:t>
+                        <a:t>27번</a:t>
                       </a:r>
                     </a:p>
                   </a:txBody>
@@ -12505,7 +12505,7 @@
                           </a:solidFill>
                           <a:latin typeface="Apple SD Gothic Neo"/>
                         </a:rPr>
-                        <a:t>0.02</a:t>
+                        <a:t>0.01</a:t>
                       </a:r>
                     </a:p>
                   </a:txBody>
@@ -12528,7 +12528,7 @@
                           </a:solidFill>
                           <a:latin typeface="Apple SD Gothic Neo"/>
                         </a:rPr>
-                        <a:t>끝수이월, 3의배수</a:t>
+                        <a:t>3의배수, 합계균형</a:t>
                       </a:r>
                     </a:p>
                   </a:txBody>
@@ -12576,7 +12576,7 @@
                           </a:solidFill>
                           <a:latin typeface="Apple SD Gothic Neo"/>
                         </a:rPr>
-                        <a:t>36번</a:t>
+                        <a:t>33번</a:t>
                       </a:r>
                     </a:p>
                   </a:txBody>
@@ -12599,7 +12599,7 @@
                           </a:solidFill>
                           <a:latin typeface="Apple SD Gothic Neo"/>
                         </a:rPr>
-                        <a:t>0.02</a:t>
+                        <a:t>0.01</a:t>
                       </a:r>
                     </a:p>
                   </a:txBody>
@@ -12622,7 +12622,7 @@
                           </a:solidFill>
                           <a:latin typeface="Apple SD Gothic Neo"/>
                         </a:rPr>
-                        <a:t>3의배수, 궁합수</a:t>
+                        <a:t>3의배수, 합계균형</a:t>
                       </a:r>
                     </a:p>
                   </a:txBody>
@@ -12670,7 +12670,7 @@
                           </a:solidFill>
                           <a:latin typeface="Apple SD Gothic Neo"/>
                         </a:rPr>
-                        <a:t>42번</a:t>
+                        <a:t>25번</a:t>
                       </a:r>
                     </a:p>
                   </a:txBody>
@@ -12693,7 +12693,7 @@
                           </a:solidFill>
                           <a:latin typeface="Apple SD Gothic Neo"/>
                         </a:rPr>
-                        <a:t>0.02</a:t>
+                        <a:t>0.01</a:t>
                       </a:r>
                     </a:p>
                   </a:txBody>
@@ -12716,7 +12716,7 @@
                           </a:solidFill>
                           <a:latin typeface="Apple SD Gothic Neo"/>
                         </a:rPr>
-                        <a:t>끝수이월, 3의배수</a:t>
+                        <a:t>끝수이월, 5의배수, 합계균형</a:t>
                       </a:r>
                     </a:p>
                   </a:txBody>
@@ -12764,7 +12764,7 @@
                           </a:solidFill>
                           <a:latin typeface="Apple SD Gothic Neo"/>
                         </a:rPr>
-                        <a:t>9번</a:t>
+                        <a:t>36번</a:t>
                       </a:r>
                     </a:p>
                   </a:txBody>
@@ -12787,7 +12787,7 @@
                           </a:solidFill>
                           <a:latin typeface="Apple SD Gothic Neo"/>
                         </a:rPr>
-                        <a:t>0.02</a:t>
+                        <a:t>0.01</a:t>
                       </a:r>
                     </a:p>
                   </a:txBody>
@@ -12810,7 +12810,7 @@
                           </a:solidFill>
                           <a:latin typeface="Apple SD Gothic Neo"/>
                         </a:rPr>
-                        <a:t>끝수이월, 3의배수</a:t>
+                        <a:t>3의배수, 합계균형</a:t>
                       </a:r>
                     </a:p>
                   </a:txBody>
@@ -12858,7 +12858,7 @@
                           </a:solidFill>
                           <a:latin typeface="Apple SD Gothic Neo"/>
                         </a:rPr>
-                        <a:t>26번</a:t>
+                        <a:t>6번</a:t>
                       </a:r>
                     </a:p>
                   </a:txBody>
@@ -12881,7 +12881,7 @@
                           </a:solidFill>
                           <a:latin typeface="Apple SD Gothic Neo"/>
                         </a:rPr>
-                        <a:t>0.02</a:t>
+                        <a:t>0.01</a:t>
                       </a:r>
                     </a:p>
                   </a:txBody>
@@ -12904,7 +12904,7 @@
                           </a:solidFill>
                           <a:latin typeface="Apple SD Gothic Neo"/>
                         </a:rPr>
-                        <a:t>미출현, 출현주기</a:t>
+                        <a:t>3의배수, 합계균형</a:t>
                       </a:r>
                     </a:p>
                   </a:txBody>
@@ -12952,7 +12952,7 @@
                           </a:solidFill>
                           <a:latin typeface="Apple SD Gothic Neo"/>
                         </a:rPr>
-                        <a:t>6번</a:t>
+                        <a:t>43번</a:t>
                       </a:r>
                     </a:p>
                   </a:txBody>
@@ -12975,7 +12975,7 @@
                           </a:solidFill>
                           <a:latin typeface="Apple SD Gothic Neo"/>
                         </a:rPr>
-                        <a:t>0.02</a:t>
+                        <a:t>0.01</a:t>
                       </a:r>
                     </a:p>
                   </a:txBody>
@@ -12998,7 +12998,7 @@
                           </a:solidFill>
                           <a:latin typeface="Apple SD Gothic Neo"/>
                         </a:rPr>
-                        <a:t>3의배수</a:t>
+                        <a:t>미출현</a:t>
                       </a:r>
                     </a:p>
                   </a:txBody>
@@ -13046,7 +13046,7 @@
                           </a:solidFill>
                           <a:latin typeface="Apple SD Gothic Neo"/>
                         </a:rPr>
-                        <a:t>16번</a:t>
+                        <a:t>22번</a:t>
                       </a:r>
                     </a:p>
                   </a:txBody>
@@ -13092,7 +13092,7 @@
                           </a:solidFill>
                           <a:latin typeface="Apple SD Gothic Neo"/>
                         </a:rPr>
-                        <a:t>궁합수</a:t>
+                        <a:t>끝수이월, 합계균형</a:t>
                       </a:r>
                     </a:p>
                   </a:txBody>
@@ -13140,7 +13140,7 @@
                           </a:solidFill>
                           <a:latin typeface="Apple SD Gothic Neo"/>
                         </a:rPr>
-                        <a:t>2번</a:t>
+                        <a:t>20번</a:t>
                       </a:r>
                     </a:p>
                   </a:txBody>
@@ -13186,7 +13186,7 @@
                           </a:solidFill>
                           <a:latin typeface="Apple SD Gothic Neo"/>
                         </a:rPr>
-                        <a:t>끝수이월, 미출현</a:t>
+                        <a:t>5의배수, 합계균형</a:t>
                       </a:r>
                     </a:p>
                   </a:txBody>
@@ -13234,7 +13234,7 @@
                           </a:solidFill>
                           <a:latin typeface="Apple SD Gothic Neo"/>
                         </a:rPr>
-                        <a:t>43번</a:t>
+                        <a:t>32번</a:t>
                       </a:r>
                     </a:p>
                   </a:txBody>
@@ -13280,7 +13280,7 @@
                           </a:solidFill>
                           <a:latin typeface="Apple SD Gothic Neo"/>
                         </a:rPr>
-                        <a:t>미출현, 궁합수</a:t>
+                        <a:t>끝수이월, 합계균형</a:t>
                       </a:r>
                     </a:p>
                   </a:txBody>
@@ -13328,7 +13328,7 @@
                           </a:solidFill>
                           <a:latin typeface="Apple SD Gothic Neo"/>
                         </a:rPr>
-                        <a:t>11번</a:t>
+                        <a:t>19번</a:t>
                       </a:r>
                     </a:p>
                   </a:txBody>
@@ -13374,7 +13374,7 @@
                           </a:solidFill>
                           <a:latin typeface="Apple SD Gothic Neo"/>
                         </a:rPr>
-                        <a:t>끝수이월</a:t>
+                        <a:t>끝수이월, 합계균형</a:t>
                       </a:r>
                     </a:p>
                   </a:txBody>
@@ -13422,7 +13422,7 @@
                           </a:solidFill>
                           <a:latin typeface="Apple SD Gothic Neo"/>
                         </a:rPr>
-                        <a:t>41번</a:t>
+                        <a:t>11번</a:t>
                       </a:r>
                     </a:p>
                   </a:txBody>
@@ -13468,7 +13468,7 @@
                           </a:solidFill>
                           <a:latin typeface="Apple SD Gothic Neo"/>
                         </a:rPr>
-                        <a:t>끝수이월</a:t>
+                        <a:t>끝수이월, 합계균형</a:t>
                       </a:r>
                     </a:p>
                   </a:txBody>
@@ -13516,7 +13516,7 @@
                           </a:solidFill>
                           <a:latin typeface="Apple SD Gothic Neo"/>
                         </a:rPr>
-                        <a:t>22번</a:t>
+                        <a:t>28번</a:t>
                       </a:r>
                     </a:p>
                   </a:txBody>
@@ -13562,7 +13562,7 @@
                           </a:solidFill>
                           <a:latin typeface="Apple SD Gothic Neo"/>
                         </a:rPr>
-                        <a:t>끝수이월</a:t>
+                        <a:t>끝수이월, 합계균형</a:t>
                       </a:r>
                     </a:p>
                   </a:txBody>
@@ -13610,7 +13610,7 @@
                           </a:solidFill>
                           <a:latin typeface="Apple SD Gothic Neo"/>
                         </a:rPr>
-                        <a:t>32번</a:t>
+                        <a:t>41번</a:t>
                       </a:r>
                     </a:p>
                   </a:txBody>
@@ -13633,7 +13633,7 @@
                           </a:solidFill>
                           <a:latin typeface="Apple SD Gothic Neo"/>
                         </a:rPr>
-                        <a:t>0.01</a:t>
+                        <a:t>0.00</a:t>
                       </a:r>
                     </a:p>
                   </a:txBody>
@@ -13704,7 +13704,7 @@
                           </a:solidFill>
                           <a:latin typeface="Apple SD Gothic Neo"/>
                         </a:rPr>
-                        <a:t>28번</a:t>
+                        <a:t>8번</a:t>
                       </a:r>
                     </a:p>
                   </a:txBody>
@@ -13727,7 +13727,7 @@
                           </a:solidFill>
                           <a:latin typeface="Apple SD Gothic Neo"/>
                         </a:rPr>
-                        <a:t>0.01</a:t>
+                        <a:t>0.00</a:t>
                       </a:r>
                     </a:p>
                   </a:txBody>
@@ -13750,7 +13750,7 @@
                           </a:solidFill>
                           <a:latin typeface="Apple SD Gothic Neo"/>
                         </a:rPr>
-                        <a:t>끝수이월, 궁합수</a:t>
+                        <a:t>끝수이월, 합계균형</a:t>
                       </a:r>
                     </a:p>
                   </a:txBody>
@@ -13798,7 +13798,7 @@
                           </a:solidFill>
                           <a:latin typeface="Apple SD Gothic Neo"/>
                         </a:rPr>
-                        <a:t>8번</a:t>
+                        <a:t>17번</a:t>
                       </a:r>
                     </a:p>
                   </a:txBody>
@@ -13844,7 +13844,7 @@
                           </a:solidFill>
                           <a:latin typeface="Apple SD Gothic Neo"/>
                         </a:rPr>
-                        <a:t>끝수이월</a:t>
+                        <a:t>합계균형</a:t>
                       </a:r>
                     </a:p>
                   </a:txBody>
@@ -13892,7 +13892,7 @@
                           </a:solidFill>
                           <a:latin typeface="Apple SD Gothic Neo"/>
                         </a:rPr>
-                        <a:t>4번</a:t>
+                        <a:t>16번</a:t>
                       </a:r>
                     </a:p>
                   </a:txBody>
@@ -13931,6 +13931,15 @@
                     <a:lstStyle/>
                     <a:p>
                       <a:pPr algn="l"/>
+                      <a:r>
+                        <a:rPr sz="850" b="0">
+                          <a:solidFill>
+                            <a:srgbClr val="555555"/>
+                          </a:solidFill>
+                          <a:latin typeface="Apple SD Gothic Neo"/>
+                        </a:rPr>
+                        <a:t>합계균형</a:t>
+                      </a:r>
                     </a:p>
                   </a:txBody>
                   <a:tcPr anchor="ctr" marT="12700" marB="12700" marL="50800" marR="50800">
@@ -14016,6 +14025,15 @@
                     <a:lstStyle/>
                     <a:p>
                       <a:pPr algn="l"/>
+                      <a:r>
+                        <a:rPr sz="850" b="0">
+                          <a:solidFill>
+                            <a:srgbClr val="555555"/>
+                          </a:solidFill>
+                          <a:latin typeface="Apple SD Gothic Neo"/>
+                        </a:rPr>
+                        <a:t>합계균형</a:t>
+                      </a:r>
                     </a:p>
                   </a:txBody>
                   <a:tcPr anchor="ctr" marT="12700" marB="12700" marL="50800" marR="50800">
@@ -14062,7 +14080,7 @@
                           </a:solidFill>
                           <a:latin typeface="Apple SD Gothic Neo"/>
                         </a:rPr>
-                        <a:t>17번</a:t>
+                        <a:t>4번</a:t>
                       </a:r>
                     </a:p>
                   </a:txBody>
@@ -14442,7 +14460,7 @@
             <a:avLst/>
           </a:prstGeom>
           <a:solidFill>
-            <a:srgbClr val="4F9EE3"/>
+            <a:srgbClr val="F6C343"/>
           </a:solidFill>
           <a:ln>
             <a:noFill/>
@@ -14475,7 +14493,7 @@
                 </a:solidFill>
                 <a:latin typeface="Apple SD Gothic Neo"/>
               </a:rPr>
-              <a:t>12</a:t>
+              <a:t>1</a:t>
             </a:r>
           </a:p>
         </p:txBody>
@@ -14495,7 +14513,7 @@
             <a:avLst/>
           </a:prstGeom>
           <a:solidFill>
-            <a:srgbClr val="4F9EE3"/>
+            <a:srgbClr val="F6C343"/>
           </a:solidFill>
           <a:ln>
             <a:noFill/>
@@ -14528,7 +14546,7 @@
                 </a:solidFill>
                 <a:latin typeface="Apple SD Gothic Neo"/>
               </a:rPr>
-              <a:t>15</a:t>
+              <a:t>10</a:t>
             </a:r>
           </a:p>
         </p:txBody>
@@ -14581,7 +14599,7 @@
                 </a:solidFill>
                 <a:latin typeface="Apple SD Gothic Neo"/>
               </a:rPr>
-              <a:t>19</a:t>
+              <a:t>14</a:t>
             </a:r>
           </a:p>
         </p:txBody>
@@ -14595,6 +14613,112 @@
         <p:spPr>
           <a:xfrm>
             <a:off x="4215384" y="1325880"/>
+            <a:ext cx="676656" cy="676656"/>
+          </a:xfrm>
+          <a:prstGeom prst="ellipse">
+            <a:avLst/>
+          </a:prstGeom>
+          <a:solidFill>
+            <a:srgbClr val="E86A5C"/>
+          </a:solidFill>
+          <a:ln>
+            <a:noFill/>
+          </a:ln>
+          <a:effectLst/>
+        </p:spPr>
+        <p:style>
+          <a:lnRef idx="1">
+            <a:schemeClr val="accent1"/>
+          </a:lnRef>
+          <a:fillRef idx="3">
+            <a:schemeClr val="accent1"/>
+          </a:fillRef>
+          <a:effectRef idx="2">
+            <a:schemeClr val="accent1"/>
+          </a:effectRef>
+          <a:fontRef idx="minor">
+            <a:schemeClr val="lt1"/>
+          </a:fontRef>
+        </p:style>
+        <p:txBody>
+          <a:bodyPr rtlCol="0" anchor="ctr" wrap="none"/>
+          <a:lstStyle/>
+          <a:p>
+            <a:pPr algn="ctr"/>
+            <a:r>
+              <a:rPr sz="2000" b="1">
+                <a:solidFill>
+                  <a:srgbClr val="FFFFFF"/>
+                </a:solidFill>
+                <a:latin typeface="Apple SD Gothic Neo"/>
+              </a:rPr>
+              <a:t>23</a:t>
+            </a:r>
+          </a:p>
+        </p:txBody>
+      </p:sp>
+      <p:sp>
+        <p:nvSpPr>
+          <p:cNvPr id="11" name="Oval 10"/>
+          <p:cNvSpPr/>
+          <p:nvPr/>
+        </p:nvSpPr>
+        <p:spPr>
+          <a:xfrm>
+            <a:off x="5056632" y="1325880"/>
+            <a:ext cx="676656" cy="676656"/>
+          </a:xfrm>
+          <a:prstGeom prst="ellipse">
+            <a:avLst/>
+          </a:prstGeom>
+          <a:solidFill>
+            <a:srgbClr val="E86A5C"/>
+          </a:solidFill>
+          <a:ln>
+            <a:noFill/>
+          </a:ln>
+          <a:effectLst/>
+        </p:spPr>
+        <p:style>
+          <a:lnRef idx="1">
+            <a:schemeClr val="accent1"/>
+          </a:lnRef>
+          <a:fillRef idx="3">
+            <a:schemeClr val="accent1"/>
+          </a:fillRef>
+          <a:effectRef idx="2">
+            <a:schemeClr val="accent1"/>
+          </a:effectRef>
+          <a:fontRef idx="minor">
+            <a:schemeClr val="lt1"/>
+          </a:fontRef>
+        </p:style>
+        <p:txBody>
+          <a:bodyPr rtlCol="0" anchor="ctr" wrap="none"/>
+          <a:lstStyle/>
+          <a:p>
+            <a:pPr algn="ctr"/>
+            <a:r>
+              <a:rPr sz="2000" b="1">
+                <a:solidFill>
+                  <a:srgbClr val="FFFFFF"/>
+                </a:solidFill>
+                <a:latin typeface="Apple SD Gothic Neo"/>
+              </a:rPr>
+              <a:t>30</a:t>
+            </a:r>
+          </a:p>
+        </p:txBody>
+      </p:sp>
+      <p:sp>
+        <p:nvSpPr>
+          <p:cNvPr id="12" name="Oval 11"/>
+          <p:cNvSpPr/>
+          <p:nvPr/>
+        </p:nvSpPr>
+        <p:spPr>
+          <a:xfrm>
+            <a:off x="5897880" y="1325880"/>
             <a:ext cx="676656" cy="676656"/>
           </a:xfrm>
           <a:prstGeom prst="ellipse">
@@ -14634,113 +14758,7 @@
                 </a:solidFill>
                 <a:latin typeface="Apple SD Gothic Neo"/>
               </a:rPr>
-              <a:t>38</a:t>
-            </a:r>
-          </a:p>
-        </p:txBody>
-      </p:sp>
-      <p:sp>
-        <p:nvSpPr>
-          <p:cNvPr id="11" name="Oval 10"/>
-          <p:cNvSpPr/>
-          <p:nvPr/>
-        </p:nvSpPr>
-        <p:spPr>
-          <a:xfrm>
-            <a:off x="5056632" y="1325880"/>
-            <a:ext cx="676656" cy="676656"/>
-          </a:xfrm>
-          <a:prstGeom prst="ellipse">
-            <a:avLst/>
-          </a:prstGeom>
-          <a:solidFill>
-            <a:srgbClr val="8A8F9A"/>
-          </a:solidFill>
-          <a:ln>
-            <a:noFill/>
-          </a:ln>
-          <a:effectLst/>
-        </p:spPr>
-        <p:style>
-          <a:lnRef idx="1">
-            <a:schemeClr val="accent1"/>
-          </a:lnRef>
-          <a:fillRef idx="3">
-            <a:schemeClr val="accent1"/>
-          </a:fillRef>
-          <a:effectRef idx="2">
-            <a:schemeClr val="accent1"/>
-          </a:effectRef>
-          <a:fontRef idx="minor">
-            <a:schemeClr val="lt1"/>
-          </a:fontRef>
-        </p:style>
-        <p:txBody>
-          <a:bodyPr rtlCol="0" anchor="ctr" wrap="none"/>
-          <a:lstStyle/>
-          <a:p>
-            <a:pPr algn="ctr"/>
-            <a:r>
-              <a:rPr sz="2000" b="1">
-                <a:solidFill>
-                  <a:srgbClr val="FFFFFF"/>
-                </a:solidFill>
-                <a:latin typeface="Apple SD Gothic Neo"/>
-              </a:rPr>
-              <a:t>40</a:t>
-            </a:r>
-          </a:p>
-        </p:txBody>
-      </p:sp>
-      <p:sp>
-        <p:nvSpPr>
-          <p:cNvPr id="12" name="Oval 11"/>
-          <p:cNvSpPr/>
-          <p:nvPr/>
-        </p:nvSpPr>
-        <p:spPr>
-          <a:xfrm>
-            <a:off x="5897880" y="1325880"/>
-            <a:ext cx="676656" cy="676656"/>
-          </a:xfrm>
-          <a:prstGeom prst="ellipse">
-            <a:avLst/>
-          </a:prstGeom>
-          <a:solidFill>
-            <a:srgbClr val="6FB86A"/>
-          </a:solidFill>
-          <a:ln>
-            <a:noFill/>
-          </a:ln>
-          <a:effectLst/>
-        </p:spPr>
-        <p:style>
-          <a:lnRef idx="1">
-            <a:schemeClr val="accent1"/>
-          </a:lnRef>
-          <a:fillRef idx="3">
-            <a:schemeClr val="accent1"/>
-          </a:fillRef>
-          <a:effectRef idx="2">
-            <a:schemeClr val="accent1"/>
-          </a:effectRef>
-          <a:fontRef idx="minor">
-            <a:schemeClr val="lt1"/>
-          </a:fontRef>
-        </p:style>
-        <p:txBody>
-          <a:bodyPr rtlCol="0" anchor="ctr" wrap="none"/>
-          <a:lstStyle/>
-          <a:p>
-            <a:pPr algn="ctr"/>
-            <a:r>
-              <a:rPr sz="2000" b="1">
-                <a:solidFill>
-                  <a:srgbClr val="FFFFFF"/>
-                </a:solidFill>
-                <a:latin typeface="Apple SD Gothic Neo"/>
-              </a:rPr>
-              <a:t>45</a:t>
+              <a:t>39</a:t>
             </a:r>
           </a:p>
         </p:txBody>
@@ -14775,7 +14793,7 @@
                 </a:solidFill>
                 <a:latin typeface="Apple SD Gothic Neo"/>
               </a:rPr>
-              <a:t>합:169 / 홀짝 3:3</a:t>
+              <a:t>합:117 / 홀짝 3:3</a:t>
             </a:r>
           </a:p>
         </p:txBody>
@@ -14907,7 +14925,7 @@
                 </a:solidFill>
                 <a:latin typeface="Apple SD Gothic Neo"/>
               </a:rPr>
-              <a:t>7</a:t>
+              <a:t>2</a:t>
             </a:r>
           </a:p>
         </p:txBody>
@@ -14927,7 +14945,7 @@
             <a:avLst/>
           </a:prstGeom>
           <a:solidFill>
-            <a:srgbClr val="4F9EE3"/>
+            <a:srgbClr val="F6C343"/>
           </a:solidFill>
           <a:ln>
             <a:noFill/>
@@ -14960,7 +14978,7 @@
                 </a:solidFill>
                 <a:latin typeface="Apple SD Gothic Neo"/>
               </a:rPr>
-              <a:t>14</a:t>
+              <a:t>5</a:t>
             </a:r>
           </a:p>
         </p:txBody>
@@ -15013,7 +15031,7 @@
                 </a:solidFill>
                 <a:latin typeface="Apple SD Gothic Neo"/>
               </a:rPr>
-              <a:t>20</a:t>
+              <a:t>14</a:t>
             </a:r>
           </a:p>
         </p:txBody>
@@ -15066,7 +15084,7 @@
                 </a:solidFill>
                 <a:latin typeface="Apple SD Gothic Neo"/>
               </a:rPr>
-              <a:t>24</a:t>
+              <a:t>21</a:t>
             </a:r>
           </a:p>
         </p:txBody>
@@ -15119,7 +15137,7 @@
                 </a:solidFill>
                 <a:latin typeface="Apple SD Gothic Neo"/>
               </a:rPr>
-              <a:t>25</a:t>
+              <a:t>23</a:t>
             </a:r>
           </a:p>
         </p:txBody>
@@ -15139,7 +15157,7 @@
             <a:avLst/>
           </a:prstGeom>
           <a:solidFill>
-            <a:srgbClr val="E86A5C"/>
+            <a:srgbClr val="8A8F9A"/>
           </a:solidFill>
           <a:ln>
             <a:noFill/>
@@ -15172,7 +15190,7 @@
                 </a:solidFill>
                 <a:latin typeface="Apple SD Gothic Neo"/>
               </a:rPr>
-              <a:t>29</a:t>
+              <a:t>35</a:t>
             </a:r>
           </a:p>
         </p:txBody>
@@ -15207,7 +15225,7 @@
                 </a:solidFill>
                 <a:latin typeface="Apple SD Gothic Neo"/>
               </a:rPr>
-              <a:t>합:119 / 홀짝 3:3</a:t>
+              <a:t>합:100 / 홀짝 4:2</a:t>
             </a:r>
           </a:p>
         </p:txBody>
@@ -15339,7 +15357,7 @@
                 </a:solidFill>
                 <a:latin typeface="Apple SD Gothic Neo"/>
               </a:rPr>
-              <a:t>3</a:t>
+              <a:t>1</a:t>
             </a:r>
           </a:p>
         </p:txBody>
@@ -15359,7 +15377,7 @@
             <a:avLst/>
           </a:prstGeom>
           <a:solidFill>
-            <a:srgbClr val="4F9EE3"/>
+            <a:srgbClr val="F6C343"/>
           </a:solidFill>
           <a:ln>
             <a:noFill/>
@@ -15392,7 +15410,7 @@
                 </a:solidFill>
                 <a:latin typeface="Apple SD Gothic Neo"/>
               </a:rPr>
-              <a:t>15</a:t>
+              <a:t>2</a:t>
             </a:r>
           </a:p>
         </p:txBody>
@@ -15406,112 +15424,6 @@
         <p:spPr>
           <a:xfrm>
             <a:off x="3374136" y="3191256"/>
-            <a:ext cx="676656" cy="676656"/>
-          </a:xfrm>
-          <a:prstGeom prst="ellipse">
-            <a:avLst/>
-          </a:prstGeom>
-          <a:solidFill>
-            <a:srgbClr val="4F9EE3"/>
-          </a:solidFill>
-          <a:ln>
-            <a:noFill/>
-          </a:ln>
-          <a:effectLst/>
-        </p:spPr>
-        <p:style>
-          <a:lnRef idx="1">
-            <a:schemeClr val="accent1"/>
-          </a:lnRef>
-          <a:fillRef idx="3">
-            <a:schemeClr val="accent1"/>
-          </a:fillRef>
-          <a:effectRef idx="2">
-            <a:schemeClr val="accent1"/>
-          </a:effectRef>
-          <a:fontRef idx="minor">
-            <a:schemeClr val="lt1"/>
-          </a:fontRef>
-        </p:style>
-        <p:txBody>
-          <a:bodyPr rtlCol="0" anchor="ctr" wrap="none"/>
-          <a:lstStyle/>
-          <a:p>
-            <a:pPr algn="ctr"/>
-            <a:r>
-              <a:rPr sz="2000" b="1">
-                <a:solidFill>
-                  <a:srgbClr val="FFFFFF"/>
-                </a:solidFill>
-                <a:latin typeface="Apple SD Gothic Neo"/>
-              </a:rPr>
-              <a:t>19</a:t>
-            </a:r>
-          </a:p>
-        </p:txBody>
-      </p:sp>
-      <p:sp>
-        <p:nvSpPr>
-          <p:cNvPr id="28" name="Oval 27"/>
-          <p:cNvSpPr/>
-          <p:nvPr/>
-        </p:nvSpPr>
-        <p:spPr>
-          <a:xfrm>
-            <a:off x="4215384" y="3191256"/>
-            <a:ext cx="676656" cy="676656"/>
-          </a:xfrm>
-          <a:prstGeom prst="ellipse">
-            <a:avLst/>
-          </a:prstGeom>
-          <a:solidFill>
-            <a:srgbClr val="4F9EE3"/>
-          </a:solidFill>
-          <a:ln>
-            <a:noFill/>
-          </a:ln>
-          <a:effectLst/>
-        </p:spPr>
-        <p:style>
-          <a:lnRef idx="1">
-            <a:schemeClr val="accent1"/>
-          </a:lnRef>
-          <a:fillRef idx="3">
-            <a:schemeClr val="accent1"/>
-          </a:fillRef>
-          <a:effectRef idx="2">
-            <a:schemeClr val="accent1"/>
-          </a:effectRef>
-          <a:fontRef idx="minor">
-            <a:schemeClr val="lt1"/>
-          </a:fontRef>
-        </p:style>
-        <p:txBody>
-          <a:bodyPr rtlCol="0" anchor="ctr" wrap="none"/>
-          <a:lstStyle/>
-          <a:p>
-            <a:pPr algn="ctr"/>
-            <a:r>
-              <a:rPr sz="2000" b="1">
-                <a:solidFill>
-                  <a:srgbClr val="FFFFFF"/>
-                </a:solidFill>
-                <a:latin typeface="Apple SD Gothic Neo"/>
-              </a:rPr>
-              <a:t>20</a:t>
-            </a:r>
-          </a:p>
-        </p:txBody>
-      </p:sp>
-      <p:sp>
-        <p:nvSpPr>
-          <p:cNvPr id="29" name="Oval 28"/>
-          <p:cNvSpPr/>
-          <p:nvPr/>
-        </p:nvSpPr>
-        <p:spPr>
-          <a:xfrm>
-            <a:off x="5056632" y="3191256"/>
             <a:ext cx="676656" cy="676656"/>
           </a:xfrm>
           <a:prstGeom prst="ellipse">
@@ -15551,20 +15463,73 @@
                 </a:solidFill>
                 <a:latin typeface="Apple SD Gothic Neo"/>
               </a:rPr>
-              <a:t>25</a:t>
+              <a:t>29</a:t>
             </a:r>
           </a:p>
         </p:txBody>
       </p:sp>
       <p:sp>
         <p:nvSpPr>
-          <p:cNvPr id="30" name="Oval 29"/>
+          <p:cNvPr id="28" name="Oval 27"/>
           <p:cNvSpPr/>
           <p:nvPr/>
         </p:nvSpPr>
         <p:spPr>
           <a:xfrm>
-            <a:off x="5897880" y="3191256"/>
+            <a:off x="4215384" y="3191256"/>
+            <a:ext cx="676656" cy="676656"/>
+          </a:xfrm>
+          <a:prstGeom prst="ellipse">
+            <a:avLst/>
+          </a:prstGeom>
+          <a:solidFill>
+            <a:srgbClr val="E86A5C"/>
+          </a:solidFill>
+          <a:ln>
+            <a:noFill/>
+          </a:ln>
+          <a:effectLst/>
+        </p:spPr>
+        <p:style>
+          <a:lnRef idx="1">
+            <a:schemeClr val="accent1"/>
+          </a:lnRef>
+          <a:fillRef idx="3">
+            <a:schemeClr val="accent1"/>
+          </a:fillRef>
+          <a:effectRef idx="2">
+            <a:schemeClr val="accent1"/>
+          </a:effectRef>
+          <a:fontRef idx="minor">
+            <a:schemeClr val="lt1"/>
+          </a:fontRef>
+        </p:style>
+        <p:txBody>
+          <a:bodyPr rtlCol="0" anchor="ctr" wrap="none"/>
+          <a:lstStyle/>
+          <a:p>
+            <a:pPr algn="ctr"/>
+            <a:r>
+              <a:rPr sz="2000" b="1">
+                <a:solidFill>
+                  <a:srgbClr val="FFFFFF"/>
+                </a:solidFill>
+                <a:latin typeface="Apple SD Gothic Neo"/>
+              </a:rPr>
+              <a:t>30</a:t>
+            </a:r>
+          </a:p>
+        </p:txBody>
+      </p:sp>
+      <p:sp>
+        <p:nvSpPr>
+          <p:cNvPr id="29" name="Oval 28"/>
+          <p:cNvSpPr/>
+          <p:nvPr/>
+        </p:nvSpPr>
+        <p:spPr>
+          <a:xfrm>
+            <a:off x="5056632" y="3191256"/>
             <a:ext cx="676656" cy="676656"/>
           </a:xfrm>
           <a:prstGeom prst="ellipse">
@@ -15604,7 +15569,60 @@
                 </a:solidFill>
                 <a:latin typeface="Apple SD Gothic Neo"/>
               </a:rPr>
-              <a:t>34</a:t>
+              <a:t>35</a:t>
+            </a:r>
+          </a:p>
+        </p:txBody>
+      </p:sp>
+      <p:sp>
+        <p:nvSpPr>
+          <p:cNvPr id="30" name="Oval 29"/>
+          <p:cNvSpPr/>
+          <p:nvPr/>
+        </p:nvSpPr>
+        <p:spPr>
+          <a:xfrm>
+            <a:off x="5897880" y="3191256"/>
+            <a:ext cx="676656" cy="676656"/>
+          </a:xfrm>
+          <a:prstGeom prst="ellipse">
+            <a:avLst/>
+          </a:prstGeom>
+          <a:solidFill>
+            <a:srgbClr val="6FB86A"/>
+          </a:solidFill>
+          <a:ln>
+            <a:noFill/>
+          </a:ln>
+          <a:effectLst/>
+        </p:spPr>
+        <p:style>
+          <a:lnRef idx="1">
+            <a:schemeClr val="accent1"/>
+          </a:lnRef>
+          <a:fillRef idx="3">
+            <a:schemeClr val="accent1"/>
+          </a:fillRef>
+          <a:effectRef idx="2">
+            <a:schemeClr val="accent1"/>
+          </a:effectRef>
+          <a:fontRef idx="minor">
+            <a:schemeClr val="lt1"/>
+          </a:fontRef>
+        </p:style>
+        <p:txBody>
+          <a:bodyPr rtlCol="0" anchor="ctr" wrap="none"/>
+          <a:lstStyle/>
+          <a:p>
+            <a:pPr algn="ctr"/>
+            <a:r>
+              <a:rPr sz="2000" b="1">
+                <a:solidFill>
+                  <a:srgbClr val="FFFFFF"/>
+                </a:solidFill>
+                <a:latin typeface="Apple SD Gothic Neo"/>
+              </a:rPr>
+              <a:t>42</a:t>
             </a:r>
           </a:p>
         </p:txBody>
@@ -15639,7 +15657,7 @@
                 </a:solidFill>
                 <a:latin typeface="Apple SD Gothic Neo"/>
               </a:rPr>
-              <a:t>합:116 / 홀짝 4:2</a:t>
+              <a:t>합:139 / 홀짝 3:3</a:t>
             </a:r>
           </a:p>
         </p:txBody>
@@ -15771,7 +15789,7 @@
                 </a:solidFill>
                 <a:latin typeface="Apple SD Gothic Neo"/>
               </a:rPr>
-              <a:t>3</a:t>
+              <a:t>7</a:t>
             </a:r>
           </a:p>
         </p:txBody>
@@ -15791,7 +15809,7 @@
             <a:avLst/>
           </a:prstGeom>
           <a:solidFill>
-            <a:srgbClr val="4F9EE3"/>
+            <a:srgbClr val="E86A5C"/>
           </a:solidFill>
           <a:ln>
             <a:noFill/>
@@ -15824,7 +15842,7 @@
                 </a:solidFill>
                 <a:latin typeface="Apple SD Gothic Neo"/>
               </a:rPr>
-              <a:t>12</a:t>
+              <a:t>21</a:t>
             </a:r>
           </a:p>
         </p:txBody>
@@ -15844,7 +15862,7 @@
             <a:avLst/>
           </a:prstGeom>
           <a:solidFill>
-            <a:srgbClr val="4F9EE3"/>
+            <a:srgbClr val="E86A5C"/>
           </a:solidFill>
           <a:ln>
             <a:noFill/>
@@ -15877,7 +15895,7 @@
                 </a:solidFill>
                 <a:latin typeface="Apple SD Gothic Neo"/>
               </a:rPr>
-              <a:t>15</a:t>
+              <a:t>26</a:t>
             </a:r>
           </a:p>
         </p:txBody>
@@ -15897,7 +15915,7 @@
             <a:avLst/>
           </a:prstGeom>
           <a:solidFill>
-            <a:srgbClr val="4F9EE3"/>
+            <a:srgbClr val="E86A5C"/>
           </a:solidFill>
           <a:ln>
             <a:noFill/>
@@ -15930,7 +15948,7 @@
                 </a:solidFill>
                 <a:latin typeface="Apple SD Gothic Neo"/>
               </a:rPr>
-              <a:t>19</a:t>
+              <a:t>29</a:t>
             </a:r>
           </a:p>
         </p:txBody>
@@ -15983,7 +16001,7 @@
                 </a:solidFill>
                 <a:latin typeface="Apple SD Gothic Neo"/>
               </a:rPr>
-              <a:t>31</a:t>
+              <a:t>34</a:t>
             </a:r>
           </a:p>
         </p:txBody>
@@ -16003,7 +16021,7 @@
             <a:avLst/>
           </a:prstGeom>
           <a:solidFill>
-            <a:srgbClr val="8A8F9A"/>
+            <a:srgbClr val="6FB86A"/>
           </a:solidFill>
           <a:ln>
             <a:noFill/>
@@ -16036,7 +16054,7 @@
                 </a:solidFill>
                 <a:latin typeface="Apple SD Gothic Neo"/>
               </a:rPr>
-              <a:t>38</a:t>
+              <a:t>42</a:t>
             </a:r>
           </a:p>
         </p:txBody>
@@ -16071,7 +16089,7 @@
                 </a:solidFill>
                 <a:latin typeface="Apple SD Gothic Neo"/>
               </a:rPr>
-              <a:t>합:118 / 홀짝 4:2</a:t>
+              <a:t>합:159 / 홀짝 3:3</a:t>
             </a:r>
           </a:p>
         </p:txBody>
@@ -16170,7 +16188,7 @@
             <a:avLst/>
           </a:prstGeom>
           <a:solidFill>
-            <a:srgbClr val="4F9EE3"/>
+            <a:srgbClr val="F6C343"/>
           </a:solidFill>
           <a:ln>
             <a:noFill/>
@@ -16203,7 +16221,7 @@
                 </a:solidFill>
                 <a:latin typeface="Apple SD Gothic Neo"/>
               </a:rPr>
-              <a:t>14</a:t>
+              <a:t>3</a:t>
             </a:r>
           </a:p>
         </p:txBody>
@@ -16223,7 +16241,7 @@
             <a:avLst/>
           </a:prstGeom>
           <a:solidFill>
-            <a:srgbClr val="4F9EE3"/>
+            <a:srgbClr val="F6C343"/>
           </a:solidFill>
           <a:ln>
             <a:noFill/>
@@ -16256,7 +16274,7 @@
                 </a:solidFill>
                 <a:latin typeface="Apple SD Gothic Neo"/>
               </a:rPr>
-              <a:t>20</a:t>
+              <a:t>10</a:t>
             </a:r>
           </a:p>
         </p:txBody>
@@ -16309,7 +16327,7 @@
                 </a:solidFill>
                 <a:latin typeface="Apple SD Gothic Neo"/>
               </a:rPr>
-              <a:t>23</a:t>
+              <a:t>21</a:t>
             </a:r>
           </a:p>
         </p:txBody>
@@ -16362,7 +16380,7 @@
                 </a:solidFill>
                 <a:latin typeface="Apple SD Gothic Neo"/>
               </a:rPr>
-              <a:t>24</a:t>
+              <a:t>29</a:t>
             </a:r>
           </a:p>
         </p:txBody>
@@ -16415,7 +16433,7 @@
                 </a:solidFill>
                 <a:latin typeface="Apple SD Gothic Neo"/>
               </a:rPr>
-              <a:t>37</a:t>
+              <a:t>34</a:t>
             </a:r>
           </a:p>
         </p:txBody>
@@ -16435,7 +16453,7 @@
             <a:avLst/>
           </a:prstGeom>
           <a:solidFill>
-            <a:srgbClr val="8A8F9A"/>
+            <a:srgbClr val="6FB86A"/>
           </a:solidFill>
           <a:ln>
             <a:noFill/>
@@ -16468,7 +16486,7 @@
                 </a:solidFill>
                 <a:latin typeface="Apple SD Gothic Neo"/>
               </a:rPr>
-              <a:t>40</a:t>
+              <a:t>42</a:t>
             </a:r>
           </a:p>
         </p:txBody>
@@ -16503,7 +16521,7 @@
                 </a:solidFill>
                 <a:latin typeface="Apple SD Gothic Neo"/>
               </a:rPr>
-              <a:t>합:158 / 홀짝 2:4</a:t>
+              <a:t>합:139 / 홀짝 3:3</a:t>
             </a:r>
           </a:p>
         </p:txBody>

--- a/로또_1226회차_분석리포트.pptx
+++ b/로또_1226회차_분석리포트.pptx
@@ -14493,7 +14493,7 @@
                 </a:solidFill>
                 <a:latin typeface="Apple SD Gothic Neo"/>
               </a:rPr>
-              <a:t>1</a:t>
+              <a:t>3</a:t>
             </a:r>
           </a:p>
         </p:txBody>
@@ -14507,59 +14507,6 @@
         <p:spPr>
           <a:xfrm>
             <a:off x="2532888" y="1325880"/>
-            <a:ext cx="676656" cy="676656"/>
-          </a:xfrm>
-          <a:prstGeom prst="ellipse">
-            <a:avLst/>
-          </a:prstGeom>
-          <a:solidFill>
-            <a:srgbClr val="F6C343"/>
-          </a:solidFill>
-          <a:ln>
-            <a:noFill/>
-          </a:ln>
-          <a:effectLst/>
-        </p:spPr>
-        <p:style>
-          <a:lnRef idx="1">
-            <a:schemeClr val="accent1"/>
-          </a:lnRef>
-          <a:fillRef idx="3">
-            <a:schemeClr val="accent1"/>
-          </a:fillRef>
-          <a:effectRef idx="2">
-            <a:schemeClr val="accent1"/>
-          </a:effectRef>
-          <a:fontRef idx="minor">
-            <a:schemeClr val="lt1"/>
-          </a:fontRef>
-        </p:style>
-        <p:txBody>
-          <a:bodyPr rtlCol="0" anchor="ctr" wrap="none"/>
-          <a:lstStyle/>
-          <a:p>
-            <a:pPr algn="ctr"/>
-            <a:r>
-              <a:rPr sz="2000" b="1">
-                <a:solidFill>
-                  <a:srgbClr val="FFFFFF"/>
-                </a:solidFill>
-                <a:latin typeface="Apple SD Gothic Neo"/>
-              </a:rPr>
-              <a:t>10</a:t>
-            </a:r>
-          </a:p>
-        </p:txBody>
-      </p:sp>
-      <p:sp>
-        <p:nvSpPr>
-          <p:cNvPr id="9" name="Oval 8"/>
-          <p:cNvSpPr/>
-          <p:nvPr/>
-        </p:nvSpPr>
-        <p:spPr>
-          <a:xfrm>
-            <a:off x="3374136" y="1325880"/>
             <a:ext cx="676656" cy="676656"/>
           </a:xfrm>
           <a:prstGeom prst="ellipse">
@@ -14600,6 +14547,59 @@
                 <a:latin typeface="Apple SD Gothic Neo"/>
               </a:rPr>
               <a:t>14</a:t>
+            </a:r>
+          </a:p>
+        </p:txBody>
+      </p:sp>
+      <p:sp>
+        <p:nvSpPr>
+          <p:cNvPr id="9" name="Oval 8"/>
+          <p:cNvSpPr/>
+          <p:nvPr/>
+        </p:nvSpPr>
+        <p:spPr>
+          <a:xfrm>
+            <a:off x="3374136" y="1325880"/>
+            <a:ext cx="676656" cy="676656"/>
+          </a:xfrm>
+          <a:prstGeom prst="ellipse">
+            <a:avLst/>
+          </a:prstGeom>
+          <a:solidFill>
+            <a:srgbClr val="E86A5C"/>
+          </a:solidFill>
+          <a:ln>
+            <a:noFill/>
+          </a:ln>
+          <a:effectLst/>
+        </p:spPr>
+        <p:style>
+          <a:lnRef idx="1">
+            <a:schemeClr val="accent1"/>
+          </a:lnRef>
+          <a:fillRef idx="3">
+            <a:schemeClr val="accent1"/>
+          </a:fillRef>
+          <a:effectRef idx="2">
+            <a:schemeClr val="accent1"/>
+          </a:effectRef>
+          <a:fontRef idx="minor">
+            <a:schemeClr val="lt1"/>
+          </a:fontRef>
+        </p:style>
+        <p:txBody>
+          <a:bodyPr rtlCol="0" anchor="ctr" wrap="none"/>
+          <a:lstStyle/>
+          <a:p>
+            <a:pPr algn="ctr"/>
+            <a:r>
+              <a:rPr sz="2000" b="1">
+                <a:solidFill>
+                  <a:srgbClr val="FFFFFF"/>
+                </a:solidFill>
+                <a:latin typeface="Apple SD Gothic Neo"/>
+              </a:rPr>
+              <a:t>24</a:t>
             </a:r>
           </a:p>
         </p:txBody>
@@ -14652,7 +14652,7 @@
                 </a:solidFill>
                 <a:latin typeface="Apple SD Gothic Neo"/>
               </a:rPr>
-              <a:t>23</a:t>
+              <a:t>30</a:t>
             </a:r>
           </a:p>
         </p:txBody>
@@ -14672,7 +14672,7 @@
             <a:avLst/>
           </a:prstGeom>
           <a:solidFill>
-            <a:srgbClr val="E86A5C"/>
+            <a:srgbClr val="8A8F9A"/>
           </a:solidFill>
           <a:ln>
             <a:noFill/>
@@ -14705,7 +14705,7 @@
                 </a:solidFill>
                 <a:latin typeface="Apple SD Gothic Neo"/>
               </a:rPr>
-              <a:t>30</a:t>
+              <a:t>31</a:t>
             </a:r>
           </a:p>
         </p:txBody>
@@ -14793,7 +14793,7 @@
                 </a:solidFill>
                 <a:latin typeface="Apple SD Gothic Neo"/>
               </a:rPr>
-              <a:t>합:117 / 홀짝 3:3</a:t>
+              <a:t>합:141 / 홀짝 3:3</a:t>
             </a:r>
           </a:p>
         </p:txBody>
@@ -14925,7 +14925,7 @@
                 </a:solidFill>
                 <a:latin typeface="Apple SD Gothic Neo"/>
               </a:rPr>
-              <a:t>2</a:t>
+              <a:t>7</a:t>
             </a:r>
           </a:p>
         </p:txBody>
@@ -14978,7 +14978,7 @@
                 </a:solidFill>
                 <a:latin typeface="Apple SD Gothic Neo"/>
               </a:rPr>
-              <a:t>5</a:t>
+              <a:t>10</a:t>
             </a:r>
           </a:p>
         </p:txBody>
@@ -14992,165 +14992,6 @@
         <p:spPr>
           <a:xfrm>
             <a:off x="3374136" y="2258568"/>
-            <a:ext cx="676656" cy="676656"/>
-          </a:xfrm>
-          <a:prstGeom prst="ellipse">
-            <a:avLst/>
-          </a:prstGeom>
-          <a:solidFill>
-            <a:srgbClr val="4F9EE3"/>
-          </a:solidFill>
-          <a:ln>
-            <a:noFill/>
-          </a:ln>
-          <a:effectLst/>
-        </p:spPr>
-        <p:style>
-          <a:lnRef idx="1">
-            <a:schemeClr val="accent1"/>
-          </a:lnRef>
-          <a:fillRef idx="3">
-            <a:schemeClr val="accent1"/>
-          </a:fillRef>
-          <a:effectRef idx="2">
-            <a:schemeClr val="accent1"/>
-          </a:effectRef>
-          <a:fontRef idx="minor">
-            <a:schemeClr val="lt1"/>
-          </a:fontRef>
-        </p:style>
-        <p:txBody>
-          <a:bodyPr rtlCol="0" anchor="ctr" wrap="none"/>
-          <a:lstStyle/>
-          <a:p>
-            <a:pPr algn="ctr"/>
-            <a:r>
-              <a:rPr sz="2000" b="1">
-                <a:solidFill>
-                  <a:srgbClr val="FFFFFF"/>
-                </a:solidFill>
-                <a:latin typeface="Apple SD Gothic Neo"/>
-              </a:rPr>
-              <a:t>14</a:t>
-            </a:r>
-          </a:p>
-        </p:txBody>
-      </p:sp>
-      <p:sp>
-        <p:nvSpPr>
-          <p:cNvPr id="19" name="Oval 18"/>
-          <p:cNvSpPr/>
-          <p:nvPr/>
-        </p:nvSpPr>
-        <p:spPr>
-          <a:xfrm>
-            <a:off x="4215384" y="2258568"/>
-            <a:ext cx="676656" cy="676656"/>
-          </a:xfrm>
-          <a:prstGeom prst="ellipse">
-            <a:avLst/>
-          </a:prstGeom>
-          <a:solidFill>
-            <a:srgbClr val="E86A5C"/>
-          </a:solidFill>
-          <a:ln>
-            <a:noFill/>
-          </a:ln>
-          <a:effectLst/>
-        </p:spPr>
-        <p:style>
-          <a:lnRef idx="1">
-            <a:schemeClr val="accent1"/>
-          </a:lnRef>
-          <a:fillRef idx="3">
-            <a:schemeClr val="accent1"/>
-          </a:fillRef>
-          <a:effectRef idx="2">
-            <a:schemeClr val="accent1"/>
-          </a:effectRef>
-          <a:fontRef idx="minor">
-            <a:schemeClr val="lt1"/>
-          </a:fontRef>
-        </p:style>
-        <p:txBody>
-          <a:bodyPr rtlCol="0" anchor="ctr" wrap="none"/>
-          <a:lstStyle/>
-          <a:p>
-            <a:pPr algn="ctr"/>
-            <a:r>
-              <a:rPr sz="2000" b="1">
-                <a:solidFill>
-                  <a:srgbClr val="FFFFFF"/>
-                </a:solidFill>
-                <a:latin typeface="Apple SD Gothic Neo"/>
-              </a:rPr>
-              <a:t>21</a:t>
-            </a:r>
-          </a:p>
-        </p:txBody>
-      </p:sp>
-      <p:sp>
-        <p:nvSpPr>
-          <p:cNvPr id="20" name="Oval 19"/>
-          <p:cNvSpPr/>
-          <p:nvPr/>
-        </p:nvSpPr>
-        <p:spPr>
-          <a:xfrm>
-            <a:off x="5056632" y="2258568"/>
-            <a:ext cx="676656" cy="676656"/>
-          </a:xfrm>
-          <a:prstGeom prst="ellipse">
-            <a:avLst/>
-          </a:prstGeom>
-          <a:solidFill>
-            <a:srgbClr val="E86A5C"/>
-          </a:solidFill>
-          <a:ln>
-            <a:noFill/>
-          </a:ln>
-          <a:effectLst/>
-        </p:spPr>
-        <p:style>
-          <a:lnRef idx="1">
-            <a:schemeClr val="accent1"/>
-          </a:lnRef>
-          <a:fillRef idx="3">
-            <a:schemeClr val="accent1"/>
-          </a:fillRef>
-          <a:effectRef idx="2">
-            <a:schemeClr val="accent1"/>
-          </a:effectRef>
-          <a:fontRef idx="minor">
-            <a:schemeClr val="lt1"/>
-          </a:fontRef>
-        </p:style>
-        <p:txBody>
-          <a:bodyPr rtlCol="0" anchor="ctr" wrap="none"/>
-          <a:lstStyle/>
-          <a:p>
-            <a:pPr algn="ctr"/>
-            <a:r>
-              <a:rPr sz="2000" b="1">
-                <a:solidFill>
-                  <a:srgbClr val="FFFFFF"/>
-                </a:solidFill>
-                <a:latin typeface="Apple SD Gothic Neo"/>
-              </a:rPr>
-              <a:t>23</a:t>
-            </a:r>
-          </a:p>
-        </p:txBody>
-      </p:sp>
-      <p:sp>
-        <p:nvSpPr>
-          <p:cNvPr id="21" name="Oval 20"/>
-          <p:cNvSpPr/>
-          <p:nvPr/>
-        </p:nvSpPr>
-        <p:spPr>
-          <a:xfrm>
-            <a:off x="5897880" y="2258568"/>
             <a:ext cx="676656" cy="676656"/>
           </a:xfrm>
           <a:prstGeom prst="ellipse">
@@ -15190,7 +15031,166 @@
                 </a:solidFill>
                 <a:latin typeface="Apple SD Gothic Neo"/>
               </a:rPr>
-              <a:t>35</a:t>
+              <a:t>31</a:t>
+            </a:r>
+          </a:p>
+        </p:txBody>
+      </p:sp>
+      <p:sp>
+        <p:nvSpPr>
+          <p:cNvPr id="19" name="Oval 18"/>
+          <p:cNvSpPr/>
+          <p:nvPr/>
+        </p:nvSpPr>
+        <p:spPr>
+          <a:xfrm>
+            <a:off x="4215384" y="2258568"/>
+            <a:ext cx="676656" cy="676656"/>
+          </a:xfrm>
+          <a:prstGeom prst="ellipse">
+            <a:avLst/>
+          </a:prstGeom>
+          <a:solidFill>
+            <a:srgbClr val="8A8F9A"/>
+          </a:solidFill>
+          <a:ln>
+            <a:noFill/>
+          </a:ln>
+          <a:effectLst/>
+        </p:spPr>
+        <p:style>
+          <a:lnRef idx="1">
+            <a:schemeClr val="accent1"/>
+          </a:lnRef>
+          <a:fillRef idx="3">
+            <a:schemeClr val="accent1"/>
+          </a:fillRef>
+          <a:effectRef idx="2">
+            <a:schemeClr val="accent1"/>
+          </a:effectRef>
+          <a:fontRef idx="minor">
+            <a:schemeClr val="lt1"/>
+          </a:fontRef>
+        </p:style>
+        <p:txBody>
+          <a:bodyPr rtlCol="0" anchor="ctr" wrap="none"/>
+          <a:lstStyle/>
+          <a:p>
+            <a:pPr algn="ctr"/>
+            <a:r>
+              <a:rPr sz="2000" b="1">
+                <a:solidFill>
+                  <a:srgbClr val="FFFFFF"/>
+                </a:solidFill>
+                <a:latin typeface="Apple SD Gothic Neo"/>
+              </a:rPr>
+              <a:t>38</a:t>
+            </a:r>
+          </a:p>
+        </p:txBody>
+      </p:sp>
+      <p:sp>
+        <p:nvSpPr>
+          <p:cNvPr id="20" name="Oval 19"/>
+          <p:cNvSpPr/>
+          <p:nvPr/>
+        </p:nvSpPr>
+        <p:spPr>
+          <a:xfrm>
+            <a:off x="5056632" y="2258568"/>
+            <a:ext cx="676656" cy="676656"/>
+          </a:xfrm>
+          <a:prstGeom prst="ellipse">
+            <a:avLst/>
+          </a:prstGeom>
+          <a:solidFill>
+            <a:srgbClr val="8A8F9A"/>
+          </a:solidFill>
+          <a:ln>
+            <a:noFill/>
+          </a:ln>
+          <a:effectLst/>
+        </p:spPr>
+        <p:style>
+          <a:lnRef idx="1">
+            <a:schemeClr val="accent1"/>
+          </a:lnRef>
+          <a:fillRef idx="3">
+            <a:schemeClr val="accent1"/>
+          </a:fillRef>
+          <a:effectRef idx="2">
+            <a:schemeClr val="accent1"/>
+          </a:effectRef>
+          <a:fontRef idx="minor">
+            <a:schemeClr val="lt1"/>
+          </a:fontRef>
+        </p:style>
+        <p:txBody>
+          <a:bodyPr rtlCol="0" anchor="ctr" wrap="none"/>
+          <a:lstStyle/>
+          <a:p>
+            <a:pPr algn="ctr"/>
+            <a:r>
+              <a:rPr sz="2000" b="1">
+                <a:solidFill>
+                  <a:srgbClr val="FFFFFF"/>
+                </a:solidFill>
+                <a:latin typeface="Apple SD Gothic Neo"/>
+              </a:rPr>
+              <a:t>39</a:t>
+            </a:r>
+          </a:p>
+        </p:txBody>
+      </p:sp>
+      <p:sp>
+        <p:nvSpPr>
+          <p:cNvPr id="21" name="Oval 20"/>
+          <p:cNvSpPr/>
+          <p:nvPr/>
+        </p:nvSpPr>
+        <p:spPr>
+          <a:xfrm>
+            <a:off x="5897880" y="2258568"/>
+            <a:ext cx="676656" cy="676656"/>
+          </a:xfrm>
+          <a:prstGeom prst="ellipse">
+            <a:avLst/>
+          </a:prstGeom>
+          <a:solidFill>
+            <a:srgbClr val="6FB86A"/>
+          </a:solidFill>
+          <a:ln>
+            <a:noFill/>
+          </a:ln>
+          <a:effectLst/>
+        </p:spPr>
+        <p:style>
+          <a:lnRef idx="1">
+            <a:schemeClr val="accent1"/>
+          </a:lnRef>
+          <a:fillRef idx="3">
+            <a:schemeClr val="accent1"/>
+          </a:fillRef>
+          <a:effectRef idx="2">
+            <a:schemeClr val="accent1"/>
+          </a:effectRef>
+          <a:fontRef idx="minor">
+            <a:schemeClr val="lt1"/>
+          </a:fontRef>
+        </p:style>
+        <p:txBody>
+          <a:bodyPr rtlCol="0" anchor="ctr" wrap="none"/>
+          <a:lstStyle/>
+          <a:p>
+            <a:pPr algn="ctr"/>
+            <a:r>
+              <a:rPr sz="2000" b="1">
+                <a:solidFill>
+                  <a:srgbClr val="FFFFFF"/>
+                </a:solidFill>
+                <a:latin typeface="Apple SD Gothic Neo"/>
+              </a:rPr>
+              <a:t>45</a:t>
             </a:r>
           </a:p>
         </p:txBody>
@@ -15225,7 +15225,7 @@
                 </a:solidFill>
                 <a:latin typeface="Apple SD Gothic Neo"/>
               </a:rPr>
-              <a:t>합:100 / 홀짝 4:2</a:t>
+              <a:t>합:170 / 홀짝 4:2</a:t>
             </a:r>
           </a:p>
         </p:txBody>
@@ -15410,7 +15410,7 @@
                 </a:solidFill>
                 <a:latin typeface="Apple SD Gothic Neo"/>
               </a:rPr>
-              <a:t>2</a:t>
+              <a:t>7</a:t>
             </a:r>
           </a:p>
         </p:txBody>
@@ -15430,7 +15430,7 @@
             <a:avLst/>
           </a:prstGeom>
           <a:solidFill>
-            <a:srgbClr val="E86A5C"/>
+            <a:srgbClr val="4F9EE3"/>
           </a:solidFill>
           <a:ln>
             <a:noFill/>
@@ -15463,7 +15463,7 @@
                 </a:solidFill>
                 <a:latin typeface="Apple SD Gothic Neo"/>
               </a:rPr>
-              <a:t>29</a:t>
+              <a:t>14</a:t>
             </a:r>
           </a:p>
         </p:txBody>
@@ -15516,7 +15516,7 @@
                 </a:solidFill>
                 <a:latin typeface="Apple SD Gothic Neo"/>
               </a:rPr>
-              <a:t>30</a:t>
+              <a:t>23</a:t>
             </a:r>
           </a:p>
         </p:txBody>
@@ -15569,7 +15569,7 @@
                 </a:solidFill>
                 <a:latin typeface="Apple SD Gothic Neo"/>
               </a:rPr>
-              <a:t>35</a:t>
+              <a:t>37</a:t>
             </a:r>
           </a:p>
         </p:txBody>
@@ -15657,7 +15657,7 @@
                 </a:solidFill>
                 <a:latin typeface="Apple SD Gothic Neo"/>
               </a:rPr>
-              <a:t>합:139 / 홀짝 3:3</a:t>
+              <a:t>합:124 / 홀짝 4:2</a:t>
             </a:r>
           </a:p>
         </p:txBody>
@@ -15809,7 +15809,7 @@
             <a:avLst/>
           </a:prstGeom>
           <a:solidFill>
-            <a:srgbClr val="E86A5C"/>
+            <a:srgbClr val="F6C343"/>
           </a:solidFill>
           <a:ln>
             <a:noFill/>
@@ -15842,7 +15842,7 @@
                 </a:solidFill>
                 <a:latin typeface="Apple SD Gothic Neo"/>
               </a:rPr>
-              <a:t>21</a:t>
+              <a:t>10</a:t>
             </a:r>
           </a:p>
         </p:txBody>
@@ -15862,7 +15862,7 @@
             <a:avLst/>
           </a:prstGeom>
           <a:solidFill>
-            <a:srgbClr val="E86A5C"/>
+            <a:srgbClr val="4F9EE3"/>
           </a:solidFill>
           <a:ln>
             <a:noFill/>
@@ -15895,7 +15895,7 @@
                 </a:solidFill>
                 <a:latin typeface="Apple SD Gothic Neo"/>
               </a:rPr>
-              <a:t>26</a:t>
+              <a:t>12</a:t>
             </a:r>
           </a:p>
         </p:txBody>
@@ -15915,7 +15915,7 @@
             <a:avLst/>
           </a:prstGeom>
           <a:solidFill>
-            <a:srgbClr val="E86A5C"/>
+            <a:srgbClr val="4F9EE3"/>
           </a:solidFill>
           <a:ln>
             <a:noFill/>
@@ -15948,7 +15948,7 @@
                 </a:solidFill>
                 <a:latin typeface="Apple SD Gothic Neo"/>
               </a:rPr>
-              <a:t>29</a:t>
+              <a:t>18</a:t>
             </a:r>
           </a:p>
         </p:txBody>
@@ -16001,7 +16001,7 @@
                 </a:solidFill>
                 <a:latin typeface="Apple SD Gothic Neo"/>
               </a:rPr>
-              <a:t>34</a:t>
+              <a:t>37</a:t>
             </a:r>
           </a:p>
         </p:txBody>
@@ -16054,7 +16054,7 @@
                 </a:solidFill>
                 <a:latin typeface="Apple SD Gothic Neo"/>
               </a:rPr>
-              <a:t>42</a:t>
+              <a:t>45</a:t>
             </a:r>
           </a:p>
         </p:txBody>
@@ -16089,7 +16089,7 @@
                 </a:solidFill>
                 <a:latin typeface="Apple SD Gothic Neo"/>
               </a:rPr>
-              <a:t>합:159 / 홀짝 3:3</a:t>
+              <a:t>합:129 / 홀짝 3:3</a:t>
             </a:r>
           </a:p>
         </p:txBody>
@@ -16241,7 +16241,7 @@
             <a:avLst/>
           </a:prstGeom>
           <a:solidFill>
-            <a:srgbClr val="F6C343"/>
+            <a:srgbClr val="4F9EE3"/>
           </a:solidFill>
           <a:ln>
             <a:noFill/>
@@ -16274,7 +16274,7 @@
                 </a:solidFill>
                 <a:latin typeface="Apple SD Gothic Neo"/>
               </a:rPr>
-              <a:t>10</a:t>
+              <a:t>14</a:t>
             </a:r>
           </a:p>
         </p:txBody>
@@ -16327,7 +16327,7 @@
                 </a:solidFill>
                 <a:latin typeface="Apple SD Gothic Neo"/>
               </a:rPr>
-              <a:t>21</a:t>
+              <a:t>23</a:t>
             </a:r>
           </a:p>
         </p:txBody>
@@ -16347,7 +16347,7 @@
             <a:avLst/>
           </a:prstGeom>
           <a:solidFill>
-            <a:srgbClr val="E86A5C"/>
+            <a:srgbClr val="8A8F9A"/>
           </a:solidFill>
           <a:ln>
             <a:noFill/>
@@ -16380,7 +16380,7 @@
                 </a:solidFill>
                 <a:latin typeface="Apple SD Gothic Neo"/>
               </a:rPr>
-              <a:t>29</a:t>
+              <a:t>37</a:t>
             </a:r>
           </a:p>
         </p:txBody>
@@ -16433,7 +16433,7 @@
                 </a:solidFill>
                 <a:latin typeface="Apple SD Gothic Neo"/>
               </a:rPr>
-              <a:t>34</a:t>
+              <a:t>39</a:t>
             </a:r>
           </a:p>
         </p:txBody>
@@ -16521,7 +16521,7 @@
                 </a:solidFill>
                 <a:latin typeface="Apple SD Gothic Neo"/>
               </a:rPr>
-              <a:t>합:139 / 홀짝 3:3</a:t>
+              <a:t>합:158 / 홀짝 4:2</a:t>
             </a:r>
           </a:p>
         </p:txBody>

--- a/로또_1226회차_분석리포트.pptx
+++ b/로또_1226회차_분석리포트.pptx
@@ -3284,7 +3284,7 @@
                 </a:solidFill>
                 <a:latin typeface="Apple SD Gothic Neo"/>
               </a:rPr>
-              <a:t>2026-05-29 생성</a:t>
+              <a:t>2026-05-30 생성</a:t>
             </a:r>
           </a:p>
         </p:txBody>
@@ -3819,7 +3819,7 @@
                           </a:solidFill>
                           <a:latin typeface="Apple SD Gothic Neo"/>
                         </a:rPr>
-                        <a:t>신규+순위그룹보정</a:t>
+                        <a:t>walk-forward+순위보정</a:t>
                       </a:r>
                     </a:p>
                   </a:txBody>
@@ -3842,7 +3842,7 @@
                           </a:solidFill>
                           <a:latin typeface="Apple SD Gothic Neo"/>
                         </a:rPr>
-                        <a:t>1.27개</a:t>
+                        <a:t>0.87개</a:t>
                       </a:r>
                     </a:p>
                   </a:txBody>
@@ -3865,7 +3865,7 @@
                           </a:solidFill>
                           <a:latin typeface="Apple SD Gothic Neo"/>
                         </a:rPr>
-                        <a:t>1.93개</a:t>
+                        <a:t>1.73개</a:t>
                       </a:r>
                     </a:p>
                   </a:txBody>
@@ -6627,7 +6627,7 @@
                 </a:solidFill>
                 <a:latin typeface="Apple SD Gothic Neo"/>
               </a:rPr>
-              <a:t>추천 순위 그룹별 당첨 번호 분포 (최근 15주 · 총 90개)</a:t>
+              <a:t>추천 순위 그룹별 당첨 번호 분포 (최근 50주 · 총 300개)</a:t>
             </a:r>
           </a:p>
         </p:txBody>
@@ -6676,918 +6676,6 @@
         <p:spPr>
           <a:xfrm>
             <a:off x="2377440" y="1389888"/>
-            <a:ext cx="3657600" cy="384048"/>
-          </a:xfrm>
-          <a:prstGeom prst="rect">
-            <a:avLst/>
-          </a:prstGeom>
-          <a:solidFill>
-            <a:srgbClr val="2E5CB8"/>
-          </a:solidFill>
-          <a:ln>
-            <a:noFill/>
-          </a:ln>
-          <a:effectLst/>
-        </p:spPr>
-        <p:style>
-          <a:lnRef idx="1">
-            <a:schemeClr val="accent1"/>
-          </a:lnRef>
-          <a:fillRef idx="3">
-            <a:schemeClr val="accent1"/>
-          </a:fillRef>
-          <a:effectRef idx="2">
-            <a:schemeClr val="accent1"/>
-          </a:effectRef>
-          <a:fontRef idx="minor">
-            <a:schemeClr val="lt1"/>
-          </a:fontRef>
-        </p:style>
-        <p:txBody>
-          <a:bodyPr rtlCol="0" anchor="ctr"/>
-          <a:lstStyle/>
-          <a:p>
-            <a:pPr algn="ctr"/>
-          </a:p>
-        </p:txBody>
-      </p:sp>
-      <p:sp>
-        <p:nvSpPr>
-          <p:cNvPr id="7" name="TextBox 6"/>
-          <p:cNvSpPr txBox="1"/>
-          <p:nvPr/>
-        </p:nvSpPr>
-        <p:spPr>
-          <a:xfrm>
-            <a:off x="6126480" y="1325880"/>
-            <a:ext cx="2194560" cy="530352"/>
-          </a:xfrm>
-          <a:prstGeom prst="rect">
-            <a:avLst/>
-          </a:prstGeom>
-          <a:noFill/>
-        </p:spPr>
-        <p:txBody>
-          <a:bodyPr wrap="square" anchor="ctr">
-            <a:spAutoFit/>
-          </a:bodyPr>
-          <a:lstStyle/>
-          <a:p>
-            <a:pPr algn="l"/>
-            <a:r>
-              <a:rPr sz="1300" b="1">
-                <a:solidFill>
-                  <a:srgbClr val="555555"/>
-                </a:solidFill>
-                <a:latin typeface="Apple SD Gothic Neo"/>
-              </a:rPr>
-              <a:t>10.00%  (9개)</a:t>
-            </a:r>
-          </a:p>
-        </p:txBody>
-      </p:sp>
-      <p:sp>
-        <p:nvSpPr>
-          <p:cNvPr id="8" name="TextBox 7"/>
-          <p:cNvSpPr txBox="1"/>
-          <p:nvPr/>
-        </p:nvSpPr>
-        <p:spPr>
-          <a:xfrm>
-            <a:off x="548640" y="1856232"/>
-            <a:ext cx="1737360" cy="530352"/>
-          </a:xfrm>
-          <a:prstGeom prst="rect">
-            <a:avLst/>
-          </a:prstGeom>
-          <a:noFill/>
-        </p:spPr>
-        <p:txBody>
-          <a:bodyPr wrap="square" anchor="ctr">
-            <a:spAutoFit/>
-          </a:bodyPr>
-          <a:lstStyle/>
-          <a:p>
-            <a:pPr algn="l"/>
-            <a:r>
-              <a:rPr sz="1500" b="1">
-                <a:solidFill>
-                  <a:srgbClr val="1F294E"/>
-                </a:solidFill>
-                <a:latin typeface="Apple SD Gothic Neo"/>
-              </a:rPr>
-              <a:t>6-10위</a:t>
-            </a:r>
-          </a:p>
-        </p:txBody>
-      </p:sp>
-      <p:sp>
-        <p:nvSpPr>
-          <p:cNvPr id="9" name="Rectangle 8"/>
-          <p:cNvSpPr/>
-          <p:nvPr/>
-        </p:nvSpPr>
-        <p:spPr>
-          <a:xfrm>
-            <a:off x="2377440" y="1920240"/>
-            <a:ext cx="4469587" cy="384048"/>
-          </a:xfrm>
-          <a:prstGeom prst="rect">
-            <a:avLst/>
-          </a:prstGeom>
-          <a:solidFill>
-            <a:srgbClr val="2E5CB8"/>
-          </a:solidFill>
-          <a:ln>
-            <a:noFill/>
-          </a:ln>
-          <a:effectLst/>
-        </p:spPr>
-        <p:style>
-          <a:lnRef idx="1">
-            <a:schemeClr val="accent1"/>
-          </a:lnRef>
-          <a:fillRef idx="3">
-            <a:schemeClr val="accent1"/>
-          </a:fillRef>
-          <a:effectRef idx="2">
-            <a:schemeClr val="accent1"/>
-          </a:effectRef>
-          <a:fontRef idx="minor">
-            <a:schemeClr val="lt1"/>
-          </a:fontRef>
-        </p:style>
-        <p:txBody>
-          <a:bodyPr rtlCol="0" anchor="ctr"/>
-          <a:lstStyle/>
-          <a:p>
-            <a:pPr algn="ctr"/>
-          </a:p>
-        </p:txBody>
-      </p:sp>
-      <p:sp>
-        <p:nvSpPr>
-          <p:cNvPr id="10" name="TextBox 9"/>
-          <p:cNvSpPr txBox="1"/>
-          <p:nvPr/>
-        </p:nvSpPr>
-        <p:spPr>
-          <a:xfrm>
-            <a:off x="6938467" y="1856232"/>
-            <a:ext cx="2194560" cy="530352"/>
-          </a:xfrm>
-          <a:prstGeom prst="rect">
-            <a:avLst/>
-          </a:prstGeom>
-          <a:noFill/>
-        </p:spPr>
-        <p:txBody>
-          <a:bodyPr wrap="square" anchor="ctr">
-            <a:spAutoFit/>
-          </a:bodyPr>
-          <a:lstStyle/>
-          <a:p>
-            <a:pPr algn="l"/>
-            <a:r>
-              <a:rPr sz="1300" b="1">
-                <a:solidFill>
-                  <a:srgbClr val="555555"/>
-                </a:solidFill>
-                <a:latin typeface="Apple SD Gothic Neo"/>
-              </a:rPr>
-              <a:t>12.22%  (11개)</a:t>
-            </a:r>
-          </a:p>
-        </p:txBody>
-      </p:sp>
-      <p:sp>
-        <p:nvSpPr>
-          <p:cNvPr id="11" name="TextBox 10"/>
-          <p:cNvSpPr txBox="1"/>
-          <p:nvPr/>
-        </p:nvSpPr>
-        <p:spPr>
-          <a:xfrm>
-            <a:off x="548640" y="2386584"/>
-            <a:ext cx="1737360" cy="530352"/>
-          </a:xfrm>
-          <a:prstGeom prst="rect">
-            <a:avLst/>
-          </a:prstGeom>
-          <a:noFill/>
-        </p:spPr>
-        <p:txBody>
-          <a:bodyPr wrap="square" anchor="ctr">
-            <a:spAutoFit/>
-          </a:bodyPr>
-          <a:lstStyle/>
-          <a:p>
-            <a:pPr algn="l"/>
-            <a:r>
-              <a:rPr sz="1500" b="1">
-                <a:solidFill>
-                  <a:srgbClr val="1F294E"/>
-                </a:solidFill>
-                <a:latin typeface="Apple SD Gothic Neo"/>
-              </a:rPr>
-              <a:t>11-15위</a:t>
-            </a:r>
-          </a:p>
-        </p:txBody>
-      </p:sp>
-      <p:sp>
-        <p:nvSpPr>
-          <p:cNvPr id="12" name="Rectangle 11"/>
-          <p:cNvSpPr/>
-          <p:nvPr/>
-        </p:nvSpPr>
-        <p:spPr>
-          <a:xfrm>
-            <a:off x="2377440" y="2450592"/>
-            <a:ext cx="6097219" cy="384048"/>
-          </a:xfrm>
-          <a:prstGeom prst="rect">
-            <a:avLst/>
-          </a:prstGeom>
-          <a:solidFill>
-            <a:srgbClr val="2E5CB8"/>
-          </a:solidFill>
-          <a:ln>
-            <a:noFill/>
-          </a:ln>
-          <a:effectLst/>
-        </p:spPr>
-        <p:style>
-          <a:lnRef idx="1">
-            <a:schemeClr val="accent1"/>
-          </a:lnRef>
-          <a:fillRef idx="3">
-            <a:schemeClr val="accent1"/>
-          </a:fillRef>
-          <a:effectRef idx="2">
-            <a:schemeClr val="accent1"/>
-          </a:effectRef>
-          <a:fontRef idx="minor">
-            <a:schemeClr val="lt1"/>
-          </a:fontRef>
-        </p:style>
-        <p:txBody>
-          <a:bodyPr rtlCol="0" anchor="ctr"/>
-          <a:lstStyle/>
-          <a:p>
-            <a:pPr algn="ctr"/>
-          </a:p>
-        </p:txBody>
-      </p:sp>
-      <p:sp>
-        <p:nvSpPr>
-          <p:cNvPr id="13" name="TextBox 12"/>
-          <p:cNvSpPr txBox="1"/>
-          <p:nvPr/>
-        </p:nvSpPr>
-        <p:spPr>
-          <a:xfrm>
-            <a:off x="8566099" y="2386584"/>
-            <a:ext cx="2194560" cy="530352"/>
-          </a:xfrm>
-          <a:prstGeom prst="rect">
-            <a:avLst/>
-          </a:prstGeom>
-          <a:noFill/>
-        </p:spPr>
-        <p:txBody>
-          <a:bodyPr wrap="square" anchor="ctr">
-            <a:spAutoFit/>
-          </a:bodyPr>
-          <a:lstStyle/>
-          <a:p>
-            <a:pPr algn="l"/>
-            <a:r>
-              <a:rPr sz="1300" b="1">
-                <a:solidFill>
-                  <a:srgbClr val="555555"/>
-                </a:solidFill>
-                <a:latin typeface="Apple SD Gothic Neo"/>
-              </a:rPr>
-              <a:t>16.67%  (15개)</a:t>
-            </a:r>
-          </a:p>
-        </p:txBody>
-      </p:sp>
-      <p:sp>
-        <p:nvSpPr>
-          <p:cNvPr id="14" name="TextBox 13"/>
-          <p:cNvSpPr txBox="1"/>
-          <p:nvPr/>
-        </p:nvSpPr>
-        <p:spPr>
-          <a:xfrm>
-            <a:off x="548640" y="2916936"/>
-            <a:ext cx="1737360" cy="530352"/>
-          </a:xfrm>
-          <a:prstGeom prst="rect">
-            <a:avLst/>
-          </a:prstGeom>
-          <a:noFill/>
-        </p:spPr>
-        <p:txBody>
-          <a:bodyPr wrap="square" anchor="ctr">
-            <a:spAutoFit/>
-          </a:bodyPr>
-          <a:lstStyle/>
-          <a:p>
-            <a:pPr algn="l"/>
-            <a:r>
-              <a:rPr sz="1500" b="1">
-                <a:solidFill>
-                  <a:srgbClr val="1F294E"/>
-                </a:solidFill>
-                <a:latin typeface="Apple SD Gothic Neo"/>
-              </a:rPr>
-              <a:t>16-20위</a:t>
-            </a:r>
-          </a:p>
-        </p:txBody>
-      </p:sp>
-      <p:sp>
-        <p:nvSpPr>
-          <p:cNvPr id="15" name="Rectangle 14"/>
-          <p:cNvSpPr/>
-          <p:nvPr/>
-        </p:nvSpPr>
-        <p:spPr>
-          <a:xfrm>
-            <a:off x="2377440" y="2980944"/>
-            <a:ext cx="3657600" cy="384048"/>
-          </a:xfrm>
-          <a:prstGeom prst="rect">
-            <a:avLst/>
-          </a:prstGeom>
-          <a:solidFill>
-            <a:srgbClr val="2E5CB8"/>
-          </a:solidFill>
-          <a:ln>
-            <a:noFill/>
-          </a:ln>
-          <a:effectLst/>
-        </p:spPr>
-        <p:style>
-          <a:lnRef idx="1">
-            <a:schemeClr val="accent1"/>
-          </a:lnRef>
-          <a:fillRef idx="3">
-            <a:schemeClr val="accent1"/>
-          </a:fillRef>
-          <a:effectRef idx="2">
-            <a:schemeClr val="accent1"/>
-          </a:effectRef>
-          <a:fontRef idx="minor">
-            <a:schemeClr val="lt1"/>
-          </a:fontRef>
-        </p:style>
-        <p:txBody>
-          <a:bodyPr rtlCol="0" anchor="ctr"/>
-          <a:lstStyle/>
-          <a:p>
-            <a:pPr algn="ctr"/>
-          </a:p>
-        </p:txBody>
-      </p:sp>
-      <p:sp>
-        <p:nvSpPr>
-          <p:cNvPr id="16" name="TextBox 15"/>
-          <p:cNvSpPr txBox="1"/>
-          <p:nvPr/>
-        </p:nvSpPr>
-        <p:spPr>
-          <a:xfrm>
-            <a:off x="6126480" y="2916936"/>
-            <a:ext cx="2194560" cy="530352"/>
-          </a:xfrm>
-          <a:prstGeom prst="rect">
-            <a:avLst/>
-          </a:prstGeom>
-          <a:noFill/>
-        </p:spPr>
-        <p:txBody>
-          <a:bodyPr wrap="square" anchor="ctr">
-            <a:spAutoFit/>
-          </a:bodyPr>
-          <a:lstStyle/>
-          <a:p>
-            <a:pPr algn="l"/>
-            <a:r>
-              <a:rPr sz="1300" b="1">
-                <a:solidFill>
-                  <a:srgbClr val="555555"/>
-                </a:solidFill>
-                <a:latin typeface="Apple SD Gothic Neo"/>
-              </a:rPr>
-              <a:t>10.00%  (9개)</a:t>
-            </a:r>
-          </a:p>
-        </p:txBody>
-      </p:sp>
-      <p:sp>
-        <p:nvSpPr>
-          <p:cNvPr id="17" name="TextBox 16"/>
-          <p:cNvSpPr txBox="1"/>
-          <p:nvPr/>
-        </p:nvSpPr>
-        <p:spPr>
-          <a:xfrm>
-            <a:off x="548640" y="3447288"/>
-            <a:ext cx="1737360" cy="530352"/>
-          </a:xfrm>
-          <a:prstGeom prst="rect">
-            <a:avLst/>
-          </a:prstGeom>
-          <a:noFill/>
-        </p:spPr>
-        <p:txBody>
-          <a:bodyPr wrap="square" anchor="ctr">
-            <a:spAutoFit/>
-          </a:bodyPr>
-          <a:lstStyle/>
-          <a:p>
-            <a:pPr algn="l"/>
-            <a:r>
-              <a:rPr sz="1500" b="1">
-                <a:solidFill>
-                  <a:srgbClr val="1F294E"/>
-                </a:solidFill>
-                <a:latin typeface="Apple SD Gothic Neo"/>
-              </a:rPr>
-              <a:t>21-25위</a:t>
-            </a:r>
-          </a:p>
-        </p:txBody>
-      </p:sp>
-      <p:sp>
-        <p:nvSpPr>
-          <p:cNvPr id="18" name="Rectangle 17"/>
-          <p:cNvSpPr/>
-          <p:nvPr/>
-        </p:nvSpPr>
-        <p:spPr>
-          <a:xfrm>
-            <a:off x="2377440" y="3511296"/>
-            <a:ext cx="2033625" cy="384048"/>
-          </a:xfrm>
-          <a:prstGeom prst="rect">
-            <a:avLst/>
-          </a:prstGeom>
-          <a:solidFill>
-            <a:srgbClr val="B0B8C9"/>
-          </a:solidFill>
-          <a:ln>
-            <a:noFill/>
-          </a:ln>
-          <a:effectLst/>
-        </p:spPr>
-        <p:style>
-          <a:lnRef idx="1">
-            <a:schemeClr val="accent1"/>
-          </a:lnRef>
-          <a:fillRef idx="3">
-            <a:schemeClr val="accent1"/>
-          </a:fillRef>
-          <a:effectRef idx="2">
-            <a:schemeClr val="accent1"/>
-          </a:effectRef>
-          <a:fontRef idx="minor">
-            <a:schemeClr val="lt1"/>
-          </a:fontRef>
-        </p:style>
-        <p:txBody>
-          <a:bodyPr rtlCol="0" anchor="ctr"/>
-          <a:lstStyle/>
-          <a:p>
-            <a:pPr algn="ctr"/>
-          </a:p>
-        </p:txBody>
-      </p:sp>
-      <p:sp>
-        <p:nvSpPr>
-          <p:cNvPr id="19" name="TextBox 18"/>
-          <p:cNvSpPr txBox="1"/>
-          <p:nvPr/>
-        </p:nvSpPr>
-        <p:spPr>
-          <a:xfrm>
-            <a:off x="4502505" y="3447288"/>
-            <a:ext cx="2194560" cy="530352"/>
-          </a:xfrm>
-          <a:prstGeom prst="rect">
-            <a:avLst/>
-          </a:prstGeom>
-          <a:noFill/>
-        </p:spPr>
-        <p:txBody>
-          <a:bodyPr wrap="square" anchor="ctr">
-            <a:spAutoFit/>
-          </a:bodyPr>
-          <a:lstStyle/>
-          <a:p>
-            <a:pPr algn="l"/>
-            <a:r>
-              <a:rPr sz="1300" b="1">
-                <a:solidFill>
-                  <a:srgbClr val="555555"/>
-                </a:solidFill>
-                <a:latin typeface="Apple SD Gothic Neo"/>
-              </a:rPr>
-              <a:t>5.56%  (5개)</a:t>
-            </a:r>
-          </a:p>
-        </p:txBody>
-      </p:sp>
-      <p:sp>
-        <p:nvSpPr>
-          <p:cNvPr id="20" name="TextBox 19"/>
-          <p:cNvSpPr txBox="1"/>
-          <p:nvPr/>
-        </p:nvSpPr>
-        <p:spPr>
-          <a:xfrm>
-            <a:off x="548640" y="3977640"/>
-            <a:ext cx="1737360" cy="530352"/>
-          </a:xfrm>
-          <a:prstGeom prst="rect">
-            <a:avLst/>
-          </a:prstGeom>
-          <a:noFill/>
-        </p:spPr>
-        <p:txBody>
-          <a:bodyPr wrap="square" anchor="ctr">
-            <a:spAutoFit/>
-          </a:bodyPr>
-          <a:lstStyle/>
-          <a:p>
-            <a:pPr algn="l"/>
-            <a:r>
-              <a:rPr sz="1500" b="1">
-                <a:solidFill>
-                  <a:srgbClr val="1F294E"/>
-                </a:solidFill>
-                <a:latin typeface="Apple SD Gothic Neo"/>
-              </a:rPr>
-              <a:t>26-30위</a:t>
-            </a:r>
-          </a:p>
-        </p:txBody>
-      </p:sp>
-      <p:sp>
-        <p:nvSpPr>
-          <p:cNvPr id="21" name="Rectangle 20"/>
-          <p:cNvSpPr/>
-          <p:nvPr/>
-        </p:nvSpPr>
-        <p:spPr>
-          <a:xfrm>
-            <a:off x="2377440" y="4041648"/>
-            <a:ext cx="2845612" cy="384048"/>
-          </a:xfrm>
-          <a:prstGeom prst="rect">
-            <a:avLst/>
-          </a:prstGeom>
-          <a:solidFill>
-            <a:srgbClr val="2E5CB8"/>
-          </a:solidFill>
-          <a:ln>
-            <a:noFill/>
-          </a:ln>
-          <a:effectLst/>
-        </p:spPr>
-        <p:style>
-          <a:lnRef idx="1">
-            <a:schemeClr val="accent1"/>
-          </a:lnRef>
-          <a:fillRef idx="3">
-            <a:schemeClr val="accent1"/>
-          </a:fillRef>
-          <a:effectRef idx="2">
-            <a:schemeClr val="accent1"/>
-          </a:effectRef>
-          <a:fontRef idx="minor">
-            <a:schemeClr val="lt1"/>
-          </a:fontRef>
-        </p:style>
-        <p:txBody>
-          <a:bodyPr rtlCol="0" anchor="ctr"/>
-          <a:lstStyle/>
-          <a:p>
-            <a:pPr algn="ctr"/>
-          </a:p>
-        </p:txBody>
-      </p:sp>
-      <p:sp>
-        <p:nvSpPr>
-          <p:cNvPr id="22" name="TextBox 21"/>
-          <p:cNvSpPr txBox="1"/>
-          <p:nvPr/>
-        </p:nvSpPr>
-        <p:spPr>
-          <a:xfrm>
-            <a:off x="5314492" y="3977640"/>
-            <a:ext cx="2194560" cy="530352"/>
-          </a:xfrm>
-          <a:prstGeom prst="rect">
-            <a:avLst/>
-          </a:prstGeom>
-          <a:noFill/>
-        </p:spPr>
-        <p:txBody>
-          <a:bodyPr wrap="square" anchor="ctr">
-            <a:spAutoFit/>
-          </a:bodyPr>
-          <a:lstStyle/>
-          <a:p>
-            <a:pPr algn="l"/>
-            <a:r>
-              <a:rPr sz="1300" b="1">
-                <a:solidFill>
-                  <a:srgbClr val="555555"/>
-                </a:solidFill>
-                <a:latin typeface="Apple SD Gothic Neo"/>
-              </a:rPr>
-              <a:t>7.78%  (7개)</a:t>
-            </a:r>
-          </a:p>
-        </p:txBody>
-      </p:sp>
-      <p:sp>
-        <p:nvSpPr>
-          <p:cNvPr id="23" name="TextBox 22"/>
-          <p:cNvSpPr txBox="1"/>
-          <p:nvPr/>
-        </p:nvSpPr>
-        <p:spPr>
-          <a:xfrm>
-            <a:off x="548640" y="4507992"/>
-            <a:ext cx="1737360" cy="530352"/>
-          </a:xfrm>
-          <a:prstGeom prst="rect">
-            <a:avLst/>
-          </a:prstGeom>
-          <a:noFill/>
-        </p:spPr>
-        <p:txBody>
-          <a:bodyPr wrap="square" anchor="ctr">
-            <a:spAutoFit/>
-          </a:bodyPr>
-          <a:lstStyle/>
-          <a:p>
-            <a:pPr algn="l"/>
-            <a:r>
-              <a:rPr sz="1500" b="1">
-                <a:solidFill>
-                  <a:srgbClr val="1F294E"/>
-                </a:solidFill>
-                <a:latin typeface="Apple SD Gothic Neo"/>
-              </a:rPr>
-              <a:t>31-35위</a:t>
-            </a:r>
-          </a:p>
-        </p:txBody>
-      </p:sp>
-      <p:sp>
-        <p:nvSpPr>
-          <p:cNvPr id="24" name="Rectangle 23"/>
-          <p:cNvSpPr/>
-          <p:nvPr/>
-        </p:nvSpPr>
-        <p:spPr>
-          <a:xfrm>
-            <a:off x="2377440" y="4572000"/>
-            <a:ext cx="2845612" cy="384048"/>
-          </a:xfrm>
-          <a:prstGeom prst="rect">
-            <a:avLst/>
-          </a:prstGeom>
-          <a:solidFill>
-            <a:srgbClr val="2E5CB8"/>
-          </a:solidFill>
-          <a:ln>
-            <a:noFill/>
-          </a:ln>
-          <a:effectLst/>
-        </p:spPr>
-        <p:style>
-          <a:lnRef idx="1">
-            <a:schemeClr val="accent1"/>
-          </a:lnRef>
-          <a:fillRef idx="3">
-            <a:schemeClr val="accent1"/>
-          </a:fillRef>
-          <a:effectRef idx="2">
-            <a:schemeClr val="accent1"/>
-          </a:effectRef>
-          <a:fontRef idx="minor">
-            <a:schemeClr val="lt1"/>
-          </a:fontRef>
-        </p:style>
-        <p:txBody>
-          <a:bodyPr rtlCol="0" anchor="ctr"/>
-          <a:lstStyle/>
-          <a:p>
-            <a:pPr algn="ctr"/>
-          </a:p>
-        </p:txBody>
-      </p:sp>
-      <p:sp>
-        <p:nvSpPr>
-          <p:cNvPr id="25" name="TextBox 24"/>
-          <p:cNvSpPr txBox="1"/>
-          <p:nvPr/>
-        </p:nvSpPr>
-        <p:spPr>
-          <a:xfrm>
-            <a:off x="5314492" y="4507992"/>
-            <a:ext cx="2194560" cy="530352"/>
-          </a:xfrm>
-          <a:prstGeom prst="rect">
-            <a:avLst/>
-          </a:prstGeom>
-          <a:noFill/>
-        </p:spPr>
-        <p:txBody>
-          <a:bodyPr wrap="square" anchor="ctr">
-            <a:spAutoFit/>
-          </a:bodyPr>
-          <a:lstStyle/>
-          <a:p>
-            <a:pPr algn="l"/>
-            <a:r>
-              <a:rPr sz="1300" b="1">
-                <a:solidFill>
-                  <a:srgbClr val="555555"/>
-                </a:solidFill>
-                <a:latin typeface="Apple SD Gothic Neo"/>
-              </a:rPr>
-              <a:t>7.78%  (7개)</a:t>
-            </a:r>
-          </a:p>
-        </p:txBody>
-      </p:sp>
-      <p:sp>
-        <p:nvSpPr>
-          <p:cNvPr id="26" name="TextBox 25"/>
-          <p:cNvSpPr txBox="1"/>
-          <p:nvPr/>
-        </p:nvSpPr>
-        <p:spPr>
-          <a:xfrm>
-            <a:off x="548640" y="5038344"/>
-            <a:ext cx="1737360" cy="530352"/>
-          </a:xfrm>
-          <a:prstGeom prst="rect">
-            <a:avLst/>
-          </a:prstGeom>
-          <a:noFill/>
-        </p:spPr>
-        <p:txBody>
-          <a:bodyPr wrap="square" anchor="ctr">
-            <a:spAutoFit/>
-          </a:bodyPr>
-          <a:lstStyle/>
-          <a:p>
-            <a:pPr algn="l"/>
-            <a:r>
-              <a:rPr sz="1500" b="1">
-                <a:solidFill>
-                  <a:srgbClr val="1F294E"/>
-                </a:solidFill>
-                <a:latin typeface="Apple SD Gothic Neo"/>
-              </a:rPr>
-              <a:t>36-40위</a:t>
-            </a:r>
-          </a:p>
-        </p:txBody>
-      </p:sp>
-      <p:sp>
-        <p:nvSpPr>
-          <p:cNvPr id="27" name="Rectangle 26"/>
-          <p:cNvSpPr/>
-          <p:nvPr/>
-        </p:nvSpPr>
-        <p:spPr>
-          <a:xfrm>
-            <a:off x="2377440" y="5102352"/>
-            <a:ext cx="3657600" cy="384048"/>
-          </a:xfrm>
-          <a:prstGeom prst="rect">
-            <a:avLst/>
-          </a:prstGeom>
-          <a:solidFill>
-            <a:srgbClr val="2E5CB8"/>
-          </a:solidFill>
-          <a:ln>
-            <a:noFill/>
-          </a:ln>
-          <a:effectLst/>
-        </p:spPr>
-        <p:style>
-          <a:lnRef idx="1">
-            <a:schemeClr val="accent1"/>
-          </a:lnRef>
-          <a:fillRef idx="3">
-            <a:schemeClr val="accent1"/>
-          </a:fillRef>
-          <a:effectRef idx="2">
-            <a:schemeClr val="accent1"/>
-          </a:effectRef>
-          <a:fontRef idx="minor">
-            <a:schemeClr val="lt1"/>
-          </a:fontRef>
-        </p:style>
-        <p:txBody>
-          <a:bodyPr rtlCol="0" anchor="ctr"/>
-          <a:lstStyle/>
-          <a:p>
-            <a:pPr algn="ctr"/>
-          </a:p>
-        </p:txBody>
-      </p:sp>
-      <p:sp>
-        <p:nvSpPr>
-          <p:cNvPr id="28" name="TextBox 27"/>
-          <p:cNvSpPr txBox="1"/>
-          <p:nvPr/>
-        </p:nvSpPr>
-        <p:spPr>
-          <a:xfrm>
-            <a:off x="6126480" y="5038344"/>
-            <a:ext cx="2194560" cy="530352"/>
-          </a:xfrm>
-          <a:prstGeom prst="rect">
-            <a:avLst/>
-          </a:prstGeom>
-          <a:noFill/>
-        </p:spPr>
-        <p:txBody>
-          <a:bodyPr wrap="square" anchor="ctr">
-            <a:spAutoFit/>
-          </a:bodyPr>
-          <a:lstStyle/>
-          <a:p>
-            <a:pPr algn="l"/>
-            <a:r>
-              <a:rPr sz="1300" b="1">
-                <a:solidFill>
-                  <a:srgbClr val="555555"/>
-                </a:solidFill>
-                <a:latin typeface="Apple SD Gothic Neo"/>
-              </a:rPr>
-              <a:t>10.00%  (9개)</a:t>
-            </a:r>
-          </a:p>
-        </p:txBody>
-      </p:sp>
-      <p:sp>
-        <p:nvSpPr>
-          <p:cNvPr id="29" name="TextBox 28"/>
-          <p:cNvSpPr txBox="1"/>
-          <p:nvPr/>
-        </p:nvSpPr>
-        <p:spPr>
-          <a:xfrm>
-            <a:off x="548640" y="5568696"/>
-            <a:ext cx="1737360" cy="530352"/>
-          </a:xfrm>
-          <a:prstGeom prst="rect">
-            <a:avLst/>
-          </a:prstGeom>
-          <a:noFill/>
-        </p:spPr>
-        <p:txBody>
-          <a:bodyPr wrap="square" anchor="ctr">
-            <a:spAutoFit/>
-          </a:bodyPr>
-          <a:lstStyle/>
-          <a:p>
-            <a:pPr algn="l"/>
-            <a:r>
-              <a:rPr sz="1500" b="1">
-                <a:solidFill>
-                  <a:srgbClr val="1F294E"/>
-                </a:solidFill>
-                <a:latin typeface="Apple SD Gothic Neo"/>
-              </a:rPr>
-              <a:t>41-45위</a:t>
-            </a:r>
-          </a:p>
-        </p:txBody>
-      </p:sp>
-      <p:sp>
-        <p:nvSpPr>
-          <p:cNvPr id="30" name="Rectangle 29"/>
-          <p:cNvSpPr/>
-          <p:nvPr/>
-        </p:nvSpPr>
-        <p:spPr>
-          <a:xfrm>
-            <a:off x="2377440" y="5632704"/>
             <a:ext cx="7315200" cy="384048"/>
           </a:xfrm>
           <a:prstGeom prst="rect">
@@ -7625,13 +6713,13 @@
       </p:sp>
       <p:sp>
         <p:nvSpPr>
-          <p:cNvPr id="31" name="TextBox 30"/>
+          <p:cNvPr id="7" name="TextBox 6"/>
           <p:cNvSpPr txBox="1"/>
           <p:nvPr/>
         </p:nvSpPr>
         <p:spPr>
           <a:xfrm>
-            <a:off x="9784080" y="5568696"/>
+            <a:off x="9784080" y="1325880"/>
             <a:ext cx="2194560" cy="530352"/>
           </a:xfrm>
           <a:prstGeom prst="rect">
@@ -7653,7 +6741,919 @@
                 </a:solidFill>
                 <a:latin typeface="Apple SD Gothic Neo"/>
               </a:rPr>
-              <a:t>20.00%  (18개)</a:t>
+              <a:t>15.00%  (45개)</a:t>
+            </a:r>
+          </a:p>
+        </p:txBody>
+      </p:sp>
+      <p:sp>
+        <p:nvSpPr>
+          <p:cNvPr id="8" name="TextBox 7"/>
+          <p:cNvSpPr txBox="1"/>
+          <p:nvPr/>
+        </p:nvSpPr>
+        <p:spPr>
+          <a:xfrm>
+            <a:off x="548640" y="1856232"/>
+            <a:ext cx="1737360" cy="530352"/>
+          </a:xfrm>
+          <a:prstGeom prst="rect">
+            <a:avLst/>
+          </a:prstGeom>
+          <a:noFill/>
+        </p:spPr>
+        <p:txBody>
+          <a:bodyPr wrap="square" anchor="ctr">
+            <a:spAutoFit/>
+          </a:bodyPr>
+          <a:lstStyle/>
+          <a:p>
+            <a:pPr algn="l"/>
+            <a:r>
+              <a:rPr sz="1500" b="1">
+                <a:solidFill>
+                  <a:srgbClr val="1F294E"/>
+                </a:solidFill>
+                <a:latin typeface="Apple SD Gothic Neo"/>
+              </a:rPr>
+              <a:t>6-10위</a:t>
+            </a:r>
+          </a:p>
+        </p:txBody>
+      </p:sp>
+      <p:sp>
+        <p:nvSpPr>
+          <p:cNvPr id="9" name="Rectangle 8"/>
+          <p:cNvSpPr/>
+          <p:nvPr/>
+        </p:nvSpPr>
+        <p:spPr>
+          <a:xfrm>
+            <a:off x="2377440" y="1920240"/>
+            <a:ext cx="7154265" cy="384048"/>
+          </a:xfrm>
+          <a:prstGeom prst="rect">
+            <a:avLst/>
+          </a:prstGeom>
+          <a:solidFill>
+            <a:srgbClr val="2E5CB8"/>
+          </a:solidFill>
+          <a:ln>
+            <a:noFill/>
+          </a:ln>
+          <a:effectLst/>
+        </p:spPr>
+        <p:style>
+          <a:lnRef idx="1">
+            <a:schemeClr val="accent1"/>
+          </a:lnRef>
+          <a:fillRef idx="3">
+            <a:schemeClr val="accent1"/>
+          </a:fillRef>
+          <a:effectRef idx="2">
+            <a:schemeClr val="accent1"/>
+          </a:effectRef>
+          <a:fontRef idx="minor">
+            <a:schemeClr val="lt1"/>
+          </a:fontRef>
+        </p:style>
+        <p:txBody>
+          <a:bodyPr rtlCol="0" anchor="ctr"/>
+          <a:lstStyle/>
+          <a:p>
+            <a:pPr algn="ctr"/>
+          </a:p>
+        </p:txBody>
+      </p:sp>
+      <p:sp>
+        <p:nvSpPr>
+          <p:cNvPr id="10" name="TextBox 9"/>
+          <p:cNvSpPr txBox="1"/>
+          <p:nvPr/>
+        </p:nvSpPr>
+        <p:spPr>
+          <a:xfrm>
+            <a:off x="9623145" y="1856232"/>
+            <a:ext cx="2194560" cy="530352"/>
+          </a:xfrm>
+          <a:prstGeom prst="rect">
+            <a:avLst/>
+          </a:prstGeom>
+          <a:noFill/>
+        </p:spPr>
+        <p:txBody>
+          <a:bodyPr wrap="square" anchor="ctr">
+            <a:spAutoFit/>
+          </a:bodyPr>
+          <a:lstStyle/>
+          <a:p>
+            <a:pPr algn="l"/>
+            <a:r>
+              <a:rPr sz="1300" b="1">
+                <a:solidFill>
+                  <a:srgbClr val="555555"/>
+                </a:solidFill>
+                <a:latin typeface="Apple SD Gothic Neo"/>
+              </a:rPr>
+              <a:t>14.67%  (44개)</a:t>
+            </a:r>
+          </a:p>
+        </p:txBody>
+      </p:sp>
+      <p:sp>
+        <p:nvSpPr>
+          <p:cNvPr id="11" name="TextBox 10"/>
+          <p:cNvSpPr txBox="1"/>
+          <p:nvPr/>
+        </p:nvSpPr>
+        <p:spPr>
+          <a:xfrm>
+            <a:off x="548640" y="2386584"/>
+            <a:ext cx="1737360" cy="530352"/>
+          </a:xfrm>
+          <a:prstGeom prst="rect">
+            <a:avLst/>
+          </a:prstGeom>
+          <a:noFill/>
+        </p:spPr>
+        <p:txBody>
+          <a:bodyPr wrap="square" anchor="ctr">
+            <a:spAutoFit/>
+          </a:bodyPr>
+          <a:lstStyle/>
+          <a:p>
+            <a:pPr algn="l"/>
+            <a:r>
+              <a:rPr sz="1500" b="1">
+                <a:solidFill>
+                  <a:srgbClr val="1F294E"/>
+                </a:solidFill>
+                <a:latin typeface="Apple SD Gothic Neo"/>
+              </a:rPr>
+              <a:t>11-15위</a:t>
+            </a:r>
+          </a:p>
+        </p:txBody>
+      </p:sp>
+      <p:sp>
+        <p:nvSpPr>
+          <p:cNvPr id="12" name="Rectangle 11"/>
+          <p:cNvSpPr/>
+          <p:nvPr/>
+        </p:nvSpPr>
+        <p:spPr>
+          <a:xfrm>
+            <a:off x="2377440" y="2450592"/>
+            <a:ext cx="6178905" cy="384048"/>
+          </a:xfrm>
+          <a:prstGeom prst="rect">
+            <a:avLst/>
+          </a:prstGeom>
+          <a:solidFill>
+            <a:srgbClr val="2E5CB8"/>
+          </a:solidFill>
+          <a:ln>
+            <a:noFill/>
+          </a:ln>
+          <a:effectLst/>
+        </p:spPr>
+        <p:style>
+          <a:lnRef idx="1">
+            <a:schemeClr val="accent1"/>
+          </a:lnRef>
+          <a:fillRef idx="3">
+            <a:schemeClr val="accent1"/>
+          </a:fillRef>
+          <a:effectRef idx="2">
+            <a:schemeClr val="accent1"/>
+          </a:effectRef>
+          <a:fontRef idx="minor">
+            <a:schemeClr val="lt1"/>
+          </a:fontRef>
+        </p:style>
+        <p:txBody>
+          <a:bodyPr rtlCol="0" anchor="ctr"/>
+          <a:lstStyle/>
+          <a:p>
+            <a:pPr algn="ctr"/>
+          </a:p>
+        </p:txBody>
+      </p:sp>
+      <p:sp>
+        <p:nvSpPr>
+          <p:cNvPr id="13" name="TextBox 12"/>
+          <p:cNvSpPr txBox="1"/>
+          <p:nvPr/>
+        </p:nvSpPr>
+        <p:spPr>
+          <a:xfrm>
+            <a:off x="8647785" y="2386584"/>
+            <a:ext cx="2194560" cy="530352"/>
+          </a:xfrm>
+          <a:prstGeom prst="rect">
+            <a:avLst/>
+          </a:prstGeom>
+          <a:noFill/>
+        </p:spPr>
+        <p:txBody>
+          <a:bodyPr wrap="square" anchor="ctr">
+            <a:spAutoFit/>
+          </a:bodyPr>
+          <a:lstStyle/>
+          <a:p>
+            <a:pPr algn="l"/>
+            <a:r>
+              <a:rPr sz="1300" b="1">
+                <a:solidFill>
+                  <a:srgbClr val="555555"/>
+                </a:solidFill>
+                <a:latin typeface="Apple SD Gothic Neo"/>
+              </a:rPr>
+              <a:t>12.67%  (38개)</a:t>
+            </a:r>
+          </a:p>
+        </p:txBody>
+      </p:sp>
+      <p:sp>
+        <p:nvSpPr>
+          <p:cNvPr id="14" name="TextBox 13"/>
+          <p:cNvSpPr txBox="1"/>
+          <p:nvPr/>
+        </p:nvSpPr>
+        <p:spPr>
+          <a:xfrm>
+            <a:off x="548640" y="2916936"/>
+            <a:ext cx="1737360" cy="530352"/>
+          </a:xfrm>
+          <a:prstGeom prst="rect">
+            <a:avLst/>
+          </a:prstGeom>
+          <a:noFill/>
+        </p:spPr>
+        <p:txBody>
+          <a:bodyPr wrap="square" anchor="ctr">
+            <a:spAutoFit/>
+          </a:bodyPr>
+          <a:lstStyle/>
+          <a:p>
+            <a:pPr algn="l"/>
+            <a:r>
+              <a:rPr sz="1500" b="1">
+                <a:solidFill>
+                  <a:srgbClr val="1F294E"/>
+                </a:solidFill>
+                <a:latin typeface="Apple SD Gothic Neo"/>
+              </a:rPr>
+              <a:t>16-20위</a:t>
+            </a:r>
+          </a:p>
+        </p:txBody>
+      </p:sp>
+      <p:sp>
+        <p:nvSpPr>
+          <p:cNvPr id="15" name="Rectangle 14"/>
+          <p:cNvSpPr/>
+          <p:nvPr/>
+        </p:nvSpPr>
+        <p:spPr>
+          <a:xfrm>
+            <a:off x="2377440" y="2980944"/>
+            <a:ext cx="6013094" cy="384048"/>
+          </a:xfrm>
+          <a:prstGeom prst="rect">
+            <a:avLst/>
+          </a:prstGeom>
+          <a:solidFill>
+            <a:srgbClr val="2E5CB8"/>
+          </a:solidFill>
+          <a:ln>
+            <a:noFill/>
+          </a:ln>
+          <a:effectLst/>
+        </p:spPr>
+        <p:style>
+          <a:lnRef idx="1">
+            <a:schemeClr val="accent1"/>
+          </a:lnRef>
+          <a:fillRef idx="3">
+            <a:schemeClr val="accent1"/>
+          </a:fillRef>
+          <a:effectRef idx="2">
+            <a:schemeClr val="accent1"/>
+          </a:effectRef>
+          <a:fontRef idx="minor">
+            <a:schemeClr val="lt1"/>
+          </a:fontRef>
+        </p:style>
+        <p:txBody>
+          <a:bodyPr rtlCol="0" anchor="ctr"/>
+          <a:lstStyle/>
+          <a:p>
+            <a:pPr algn="ctr"/>
+          </a:p>
+        </p:txBody>
+      </p:sp>
+      <p:sp>
+        <p:nvSpPr>
+          <p:cNvPr id="16" name="TextBox 15"/>
+          <p:cNvSpPr txBox="1"/>
+          <p:nvPr/>
+        </p:nvSpPr>
+        <p:spPr>
+          <a:xfrm>
+            <a:off x="8481974" y="2916936"/>
+            <a:ext cx="2194560" cy="530352"/>
+          </a:xfrm>
+          <a:prstGeom prst="rect">
+            <a:avLst/>
+          </a:prstGeom>
+          <a:noFill/>
+        </p:spPr>
+        <p:txBody>
+          <a:bodyPr wrap="square" anchor="ctr">
+            <a:spAutoFit/>
+          </a:bodyPr>
+          <a:lstStyle/>
+          <a:p>
+            <a:pPr algn="l"/>
+            <a:r>
+              <a:rPr sz="1300" b="1">
+                <a:solidFill>
+                  <a:srgbClr val="555555"/>
+                </a:solidFill>
+                <a:latin typeface="Apple SD Gothic Neo"/>
+              </a:rPr>
+              <a:t>12.33%  (37개)</a:t>
+            </a:r>
+          </a:p>
+        </p:txBody>
+      </p:sp>
+      <p:sp>
+        <p:nvSpPr>
+          <p:cNvPr id="17" name="TextBox 16"/>
+          <p:cNvSpPr txBox="1"/>
+          <p:nvPr/>
+        </p:nvSpPr>
+        <p:spPr>
+          <a:xfrm>
+            <a:off x="548640" y="3447288"/>
+            <a:ext cx="1737360" cy="530352"/>
+          </a:xfrm>
+          <a:prstGeom prst="rect">
+            <a:avLst/>
+          </a:prstGeom>
+          <a:noFill/>
+        </p:spPr>
+        <p:txBody>
+          <a:bodyPr wrap="square" anchor="ctr">
+            <a:spAutoFit/>
+          </a:bodyPr>
+          <a:lstStyle/>
+          <a:p>
+            <a:pPr algn="l"/>
+            <a:r>
+              <a:rPr sz="1500" b="1">
+                <a:solidFill>
+                  <a:srgbClr val="1F294E"/>
+                </a:solidFill>
+                <a:latin typeface="Apple SD Gothic Neo"/>
+              </a:rPr>
+              <a:t>21-25위</a:t>
+            </a:r>
+          </a:p>
+        </p:txBody>
+      </p:sp>
+      <p:sp>
+        <p:nvSpPr>
+          <p:cNvPr id="18" name="Rectangle 17"/>
+          <p:cNvSpPr/>
+          <p:nvPr/>
+        </p:nvSpPr>
+        <p:spPr>
+          <a:xfrm>
+            <a:off x="2377440" y="3511296"/>
+            <a:ext cx="4715865" cy="384048"/>
+          </a:xfrm>
+          <a:prstGeom prst="rect">
+            <a:avLst/>
+          </a:prstGeom>
+          <a:solidFill>
+            <a:srgbClr val="2E5CB8"/>
+          </a:solidFill>
+          <a:ln>
+            <a:noFill/>
+          </a:ln>
+          <a:effectLst/>
+        </p:spPr>
+        <p:style>
+          <a:lnRef idx="1">
+            <a:schemeClr val="accent1"/>
+          </a:lnRef>
+          <a:fillRef idx="3">
+            <a:schemeClr val="accent1"/>
+          </a:fillRef>
+          <a:effectRef idx="2">
+            <a:schemeClr val="accent1"/>
+          </a:effectRef>
+          <a:fontRef idx="minor">
+            <a:schemeClr val="lt1"/>
+          </a:fontRef>
+        </p:style>
+        <p:txBody>
+          <a:bodyPr rtlCol="0" anchor="ctr"/>
+          <a:lstStyle/>
+          <a:p>
+            <a:pPr algn="ctr"/>
+          </a:p>
+        </p:txBody>
+      </p:sp>
+      <p:sp>
+        <p:nvSpPr>
+          <p:cNvPr id="19" name="TextBox 18"/>
+          <p:cNvSpPr txBox="1"/>
+          <p:nvPr/>
+        </p:nvSpPr>
+        <p:spPr>
+          <a:xfrm>
+            <a:off x="7184745" y="3447288"/>
+            <a:ext cx="2194560" cy="530352"/>
+          </a:xfrm>
+          <a:prstGeom prst="rect">
+            <a:avLst/>
+          </a:prstGeom>
+          <a:noFill/>
+        </p:spPr>
+        <p:txBody>
+          <a:bodyPr wrap="square" anchor="ctr">
+            <a:spAutoFit/>
+          </a:bodyPr>
+          <a:lstStyle/>
+          <a:p>
+            <a:pPr algn="l"/>
+            <a:r>
+              <a:rPr sz="1300" b="1">
+                <a:solidFill>
+                  <a:srgbClr val="555555"/>
+                </a:solidFill>
+                <a:latin typeface="Apple SD Gothic Neo"/>
+              </a:rPr>
+              <a:t>9.67%  (29개)</a:t>
+            </a:r>
+          </a:p>
+        </p:txBody>
+      </p:sp>
+      <p:sp>
+        <p:nvSpPr>
+          <p:cNvPr id="20" name="TextBox 19"/>
+          <p:cNvSpPr txBox="1"/>
+          <p:nvPr/>
+        </p:nvSpPr>
+        <p:spPr>
+          <a:xfrm>
+            <a:off x="548640" y="3977640"/>
+            <a:ext cx="1737360" cy="530352"/>
+          </a:xfrm>
+          <a:prstGeom prst="rect">
+            <a:avLst/>
+          </a:prstGeom>
+          <a:noFill/>
+        </p:spPr>
+        <p:txBody>
+          <a:bodyPr wrap="square" anchor="ctr">
+            <a:spAutoFit/>
+          </a:bodyPr>
+          <a:lstStyle/>
+          <a:p>
+            <a:pPr algn="l"/>
+            <a:r>
+              <a:rPr sz="1500" b="1">
+                <a:solidFill>
+                  <a:srgbClr val="1F294E"/>
+                </a:solidFill>
+                <a:latin typeface="Apple SD Gothic Neo"/>
+              </a:rPr>
+              <a:t>26-30위</a:t>
+            </a:r>
+          </a:p>
+        </p:txBody>
+      </p:sp>
+      <p:sp>
+        <p:nvSpPr>
+          <p:cNvPr id="21" name="Rectangle 20"/>
+          <p:cNvSpPr/>
+          <p:nvPr/>
+        </p:nvSpPr>
+        <p:spPr>
+          <a:xfrm>
+            <a:off x="2377440" y="4041648"/>
+            <a:ext cx="4715865" cy="384048"/>
+          </a:xfrm>
+          <a:prstGeom prst="rect">
+            <a:avLst/>
+          </a:prstGeom>
+          <a:solidFill>
+            <a:srgbClr val="2E5CB8"/>
+          </a:solidFill>
+          <a:ln>
+            <a:noFill/>
+          </a:ln>
+          <a:effectLst/>
+        </p:spPr>
+        <p:style>
+          <a:lnRef idx="1">
+            <a:schemeClr val="accent1"/>
+          </a:lnRef>
+          <a:fillRef idx="3">
+            <a:schemeClr val="accent1"/>
+          </a:fillRef>
+          <a:effectRef idx="2">
+            <a:schemeClr val="accent1"/>
+          </a:effectRef>
+          <a:fontRef idx="minor">
+            <a:schemeClr val="lt1"/>
+          </a:fontRef>
+        </p:style>
+        <p:txBody>
+          <a:bodyPr rtlCol="0" anchor="ctr"/>
+          <a:lstStyle/>
+          <a:p>
+            <a:pPr algn="ctr"/>
+          </a:p>
+        </p:txBody>
+      </p:sp>
+      <p:sp>
+        <p:nvSpPr>
+          <p:cNvPr id="22" name="TextBox 21"/>
+          <p:cNvSpPr txBox="1"/>
+          <p:nvPr/>
+        </p:nvSpPr>
+        <p:spPr>
+          <a:xfrm>
+            <a:off x="7184745" y="3977640"/>
+            <a:ext cx="2194560" cy="530352"/>
+          </a:xfrm>
+          <a:prstGeom prst="rect">
+            <a:avLst/>
+          </a:prstGeom>
+          <a:noFill/>
+        </p:spPr>
+        <p:txBody>
+          <a:bodyPr wrap="square" anchor="ctr">
+            <a:spAutoFit/>
+          </a:bodyPr>
+          <a:lstStyle/>
+          <a:p>
+            <a:pPr algn="l"/>
+            <a:r>
+              <a:rPr sz="1300" b="1">
+                <a:solidFill>
+                  <a:srgbClr val="555555"/>
+                </a:solidFill>
+                <a:latin typeface="Apple SD Gothic Neo"/>
+              </a:rPr>
+              <a:t>9.67%  (29개)</a:t>
+            </a:r>
+          </a:p>
+        </p:txBody>
+      </p:sp>
+      <p:sp>
+        <p:nvSpPr>
+          <p:cNvPr id="23" name="TextBox 22"/>
+          <p:cNvSpPr txBox="1"/>
+          <p:nvPr/>
+        </p:nvSpPr>
+        <p:spPr>
+          <a:xfrm>
+            <a:off x="548640" y="4507992"/>
+            <a:ext cx="1737360" cy="530352"/>
+          </a:xfrm>
+          <a:prstGeom prst="rect">
+            <a:avLst/>
+          </a:prstGeom>
+          <a:noFill/>
+        </p:spPr>
+        <p:txBody>
+          <a:bodyPr wrap="square" anchor="ctr">
+            <a:spAutoFit/>
+          </a:bodyPr>
+          <a:lstStyle/>
+          <a:p>
+            <a:pPr algn="l"/>
+            <a:r>
+              <a:rPr sz="1500" b="1">
+                <a:solidFill>
+                  <a:srgbClr val="1F294E"/>
+                </a:solidFill>
+                <a:latin typeface="Apple SD Gothic Neo"/>
+              </a:rPr>
+              <a:t>31-35위</a:t>
+            </a:r>
+          </a:p>
+        </p:txBody>
+      </p:sp>
+      <p:sp>
+        <p:nvSpPr>
+          <p:cNvPr id="24" name="Rectangle 23"/>
+          <p:cNvSpPr/>
+          <p:nvPr/>
+        </p:nvSpPr>
+        <p:spPr>
+          <a:xfrm>
+            <a:off x="2377440" y="4572000"/>
+            <a:ext cx="4228185" cy="384048"/>
+          </a:xfrm>
+          <a:prstGeom prst="rect">
+            <a:avLst/>
+          </a:prstGeom>
+          <a:solidFill>
+            <a:srgbClr val="2E5CB8"/>
+          </a:solidFill>
+          <a:ln>
+            <a:noFill/>
+          </a:ln>
+          <a:effectLst/>
+        </p:spPr>
+        <p:style>
+          <a:lnRef idx="1">
+            <a:schemeClr val="accent1"/>
+          </a:lnRef>
+          <a:fillRef idx="3">
+            <a:schemeClr val="accent1"/>
+          </a:fillRef>
+          <a:effectRef idx="2">
+            <a:schemeClr val="accent1"/>
+          </a:effectRef>
+          <a:fontRef idx="minor">
+            <a:schemeClr val="lt1"/>
+          </a:fontRef>
+        </p:style>
+        <p:txBody>
+          <a:bodyPr rtlCol="0" anchor="ctr"/>
+          <a:lstStyle/>
+          <a:p>
+            <a:pPr algn="ctr"/>
+          </a:p>
+        </p:txBody>
+      </p:sp>
+      <p:sp>
+        <p:nvSpPr>
+          <p:cNvPr id="25" name="TextBox 24"/>
+          <p:cNvSpPr txBox="1"/>
+          <p:nvPr/>
+        </p:nvSpPr>
+        <p:spPr>
+          <a:xfrm>
+            <a:off x="6697065" y="4507992"/>
+            <a:ext cx="2194560" cy="530352"/>
+          </a:xfrm>
+          <a:prstGeom prst="rect">
+            <a:avLst/>
+          </a:prstGeom>
+          <a:noFill/>
+        </p:spPr>
+        <p:txBody>
+          <a:bodyPr wrap="square" anchor="ctr">
+            <a:spAutoFit/>
+          </a:bodyPr>
+          <a:lstStyle/>
+          <a:p>
+            <a:pPr algn="l"/>
+            <a:r>
+              <a:rPr sz="1300" b="1">
+                <a:solidFill>
+                  <a:srgbClr val="555555"/>
+                </a:solidFill>
+                <a:latin typeface="Apple SD Gothic Neo"/>
+              </a:rPr>
+              <a:t>8.67%  (26개)</a:t>
+            </a:r>
+          </a:p>
+        </p:txBody>
+      </p:sp>
+      <p:sp>
+        <p:nvSpPr>
+          <p:cNvPr id="26" name="TextBox 25"/>
+          <p:cNvSpPr txBox="1"/>
+          <p:nvPr/>
+        </p:nvSpPr>
+        <p:spPr>
+          <a:xfrm>
+            <a:off x="548640" y="5038344"/>
+            <a:ext cx="1737360" cy="530352"/>
+          </a:xfrm>
+          <a:prstGeom prst="rect">
+            <a:avLst/>
+          </a:prstGeom>
+          <a:noFill/>
+        </p:spPr>
+        <p:txBody>
+          <a:bodyPr wrap="square" anchor="ctr">
+            <a:spAutoFit/>
+          </a:bodyPr>
+          <a:lstStyle/>
+          <a:p>
+            <a:pPr algn="l"/>
+            <a:r>
+              <a:rPr sz="1500" b="1">
+                <a:solidFill>
+                  <a:srgbClr val="1F294E"/>
+                </a:solidFill>
+                <a:latin typeface="Apple SD Gothic Neo"/>
+              </a:rPr>
+              <a:t>36-40위</a:t>
+            </a:r>
+          </a:p>
+        </p:txBody>
+      </p:sp>
+      <p:sp>
+        <p:nvSpPr>
+          <p:cNvPr id="27" name="Rectangle 26"/>
+          <p:cNvSpPr/>
+          <p:nvPr/>
+        </p:nvSpPr>
+        <p:spPr>
+          <a:xfrm>
+            <a:off x="2377440" y="5102352"/>
+            <a:ext cx="5203545" cy="384048"/>
+          </a:xfrm>
+          <a:prstGeom prst="rect">
+            <a:avLst/>
+          </a:prstGeom>
+          <a:solidFill>
+            <a:srgbClr val="2E5CB8"/>
+          </a:solidFill>
+          <a:ln>
+            <a:noFill/>
+          </a:ln>
+          <a:effectLst/>
+        </p:spPr>
+        <p:style>
+          <a:lnRef idx="1">
+            <a:schemeClr val="accent1"/>
+          </a:lnRef>
+          <a:fillRef idx="3">
+            <a:schemeClr val="accent1"/>
+          </a:fillRef>
+          <a:effectRef idx="2">
+            <a:schemeClr val="accent1"/>
+          </a:effectRef>
+          <a:fontRef idx="minor">
+            <a:schemeClr val="lt1"/>
+          </a:fontRef>
+        </p:style>
+        <p:txBody>
+          <a:bodyPr rtlCol="0" anchor="ctr"/>
+          <a:lstStyle/>
+          <a:p>
+            <a:pPr algn="ctr"/>
+          </a:p>
+        </p:txBody>
+      </p:sp>
+      <p:sp>
+        <p:nvSpPr>
+          <p:cNvPr id="28" name="TextBox 27"/>
+          <p:cNvSpPr txBox="1"/>
+          <p:nvPr/>
+        </p:nvSpPr>
+        <p:spPr>
+          <a:xfrm>
+            <a:off x="7672425" y="5038344"/>
+            <a:ext cx="2194560" cy="530352"/>
+          </a:xfrm>
+          <a:prstGeom prst="rect">
+            <a:avLst/>
+          </a:prstGeom>
+          <a:noFill/>
+        </p:spPr>
+        <p:txBody>
+          <a:bodyPr wrap="square" anchor="ctr">
+            <a:spAutoFit/>
+          </a:bodyPr>
+          <a:lstStyle/>
+          <a:p>
+            <a:pPr algn="l"/>
+            <a:r>
+              <a:rPr sz="1300" b="1">
+                <a:solidFill>
+                  <a:srgbClr val="555555"/>
+                </a:solidFill>
+                <a:latin typeface="Apple SD Gothic Neo"/>
+              </a:rPr>
+              <a:t>10.67%  (32개)</a:t>
+            </a:r>
+          </a:p>
+        </p:txBody>
+      </p:sp>
+      <p:sp>
+        <p:nvSpPr>
+          <p:cNvPr id="29" name="TextBox 28"/>
+          <p:cNvSpPr txBox="1"/>
+          <p:nvPr/>
+        </p:nvSpPr>
+        <p:spPr>
+          <a:xfrm>
+            <a:off x="548640" y="5568696"/>
+            <a:ext cx="1737360" cy="530352"/>
+          </a:xfrm>
+          <a:prstGeom prst="rect">
+            <a:avLst/>
+          </a:prstGeom>
+          <a:noFill/>
+        </p:spPr>
+        <p:txBody>
+          <a:bodyPr wrap="square" anchor="ctr">
+            <a:spAutoFit/>
+          </a:bodyPr>
+          <a:lstStyle/>
+          <a:p>
+            <a:pPr algn="l"/>
+            <a:r>
+              <a:rPr sz="1500" b="1">
+                <a:solidFill>
+                  <a:srgbClr val="1F294E"/>
+                </a:solidFill>
+                <a:latin typeface="Apple SD Gothic Neo"/>
+              </a:rPr>
+              <a:t>41-45위</a:t>
+            </a:r>
+          </a:p>
+        </p:txBody>
+      </p:sp>
+      <p:sp>
+        <p:nvSpPr>
+          <p:cNvPr id="30" name="Rectangle 29"/>
+          <p:cNvSpPr/>
+          <p:nvPr/>
+        </p:nvSpPr>
+        <p:spPr>
+          <a:xfrm>
+            <a:off x="2377440" y="5632704"/>
+            <a:ext cx="3252825" cy="384048"/>
+          </a:xfrm>
+          <a:prstGeom prst="rect">
+            <a:avLst/>
+          </a:prstGeom>
+          <a:solidFill>
+            <a:srgbClr val="B0B8C9"/>
+          </a:solidFill>
+          <a:ln>
+            <a:noFill/>
+          </a:ln>
+          <a:effectLst/>
+        </p:spPr>
+        <p:style>
+          <a:lnRef idx="1">
+            <a:schemeClr val="accent1"/>
+          </a:lnRef>
+          <a:fillRef idx="3">
+            <a:schemeClr val="accent1"/>
+          </a:fillRef>
+          <a:effectRef idx="2">
+            <a:schemeClr val="accent1"/>
+          </a:effectRef>
+          <a:fontRef idx="minor">
+            <a:schemeClr val="lt1"/>
+          </a:fontRef>
+        </p:style>
+        <p:txBody>
+          <a:bodyPr rtlCol="0" anchor="ctr"/>
+          <a:lstStyle/>
+          <a:p>
+            <a:pPr algn="ctr"/>
+          </a:p>
+        </p:txBody>
+      </p:sp>
+      <p:sp>
+        <p:nvSpPr>
+          <p:cNvPr id="31" name="TextBox 30"/>
+          <p:cNvSpPr txBox="1"/>
+          <p:nvPr/>
+        </p:nvSpPr>
+        <p:spPr>
+          <a:xfrm>
+            <a:off x="5721705" y="5568696"/>
+            <a:ext cx="2194560" cy="530352"/>
+          </a:xfrm>
+          <a:prstGeom prst="rect">
+            <a:avLst/>
+          </a:prstGeom>
+          <a:noFill/>
+        </p:spPr>
+        <p:txBody>
+          <a:bodyPr wrap="square" anchor="ctr">
+            <a:spAutoFit/>
+          </a:bodyPr>
+          <a:lstStyle/>
+          <a:p>
+            <a:pPr algn="l"/>
+            <a:r>
+              <a:rPr sz="1300" b="1">
+                <a:solidFill>
+                  <a:srgbClr val="555555"/>
+                </a:solidFill>
+                <a:latin typeface="Apple SD Gothic Neo"/>
+              </a:rPr>
+              <a:t>6.67%  (20개)</a:t>
             </a:r>
           </a:p>
         </p:txBody>
@@ -7688,7 +7688,7 @@
                 </a:solidFill>
                 <a:latin typeface="Apple SD Gothic Neo"/>
               </a:rPr>
-              <a:t>▶ '41-45위' 그룹이 20.00%로 가장 높음 (역설적 강세) · '21-25위' 그룹이 5.56%로 최저</a:t>
+              <a:t>▶ '1-5위' 그룹이 15.00%로 가장 높고 순위가 낮을수록 적중률 감소 (정상 분포) · '41-45위' 최저 6.67%</a:t>
             </a:r>
           </a:p>
         </p:txBody>
@@ -7837,7 +7837,7 @@
                 </a:solidFill>
                 <a:latin typeface="Apple SD Gothic Neo"/>
               </a:rPr>
-              <a:t>순위 그룹별 회차 당첨 내역 (최근 15주)</a:t>
+              <a:t>순위 그룹별 회차 당첨 내역 (최근 50주)</a:t>
             </a:r>
           </a:p>
         </p:txBody>
@@ -7980,6 +7980,29 @@
                   </a:txBody>
                   <a:tcPr anchor="ctr" marT="12700" marB="12700" marL="50800" marR="50800">
                     <a:solidFill>
+                      <a:srgbClr val="D4A017"/>
+                    </a:solidFill>
+                  </a:tcPr>
+                </a:tc>
+                <a:tc>
+                  <a:txBody>
+                    <a:bodyPr/>
+                    <a:lstStyle/>
+                    <a:p>
+                      <a:pPr algn="ctr"/>
+                      <a:r>
+                        <a:rPr sz="1100" b="1">
+                          <a:solidFill>
+                            <a:srgbClr val="1F294E"/>
+                          </a:solidFill>
+                          <a:latin typeface="Apple SD Gothic Neo"/>
+                        </a:rPr>
+                        <a:t>45개</a:t>
+                      </a:r>
+                    </a:p>
+                  </a:txBody>
+                  <a:tcPr anchor="ctr" marT="12700" marB="12700" marL="50800" marR="50800">
+                    <a:solidFill>
                       <a:srgbClr val="FFFFFF"/>
                     </a:solidFill>
                   </a:tcPr>
@@ -7993,11 +8016,11 @@
                       <a:r>
                         <a:rPr sz="1100" b="1">
                           <a:solidFill>
-                            <a:srgbClr val="1F294E"/>
-                          </a:solidFill>
-                          <a:latin typeface="Apple SD Gothic Neo"/>
-                        </a:rPr>
-                        <a:t>9개</a:t>
+                            <a:srgbClr val="C0392B"/>
+                          </a:solidFill>
+                          <a:latin typeface="Apple SD Gothic Neo"/>
+                        </a:rPr>
+                        <a:t>15.00%</a:t>
                       </a:r>
                     </a:p>
                   </a:txBody>
@@ -8012,38 +8035,15 @@
                     <a:bodyPr/>
                     <a:lstStyle/>
                     <a:p>
-                      <a:pPr algn="ctr"/>
-                      <a:r>
-                        <a:rPr sz="1100" b="1">
+                      <a:pPr algn="l"/>
+                      <a:r>
+                        <a:rPr sz="800" b="0">
                           <a:solidFill>
                             <a:srgbClr val="555555"/>
                           </a:solidFill>
                           <a:latin typeface="Apple SD Gothic Neo"/>
                         </a:rPr>
-                        <a:t>10.00%</a:t>
-                      </a:r>
-                    </a:p>
-                  </a:txBody>
-                  <a:tcPr anchor="ctr" marT="12700" marB="12700" marL="50800" marR="50800">
-                    <a:solidFill>
-                      <a:srgbClr val="FFFFFF"/>
-                    </a:solidFill>
-                  </a:tcPr>
-                </a:tc>
-                <a:tc>
-                  <a:txBody>
-                    <a:bodyPr/>
-                    <a:lstStyle/>
-                    <a:p>
-                      <a:pPr algn="l"/>
-                      <a:r>
-                        <a:rPr sz="800" b="0">
-                          <a:solidFill>
-                            <a:srgbClr val="555555"/>
-                          </a:solidFill>
-                          <a:latin typeface="Apple SD Gothic Neo"/>
-                        </a:rPr>
-                        <a:t>1211,38(4위), 1211,27(3위), 1213,25(1위), 1213,27(4위), 1216,14(3위), 1219,15(1위), 1221,13(2위), 1222,17(1위), 1223,32(2위)</a:t>
+                        <a:t>1178,27(4위), 1179,24(5위), 1180,41(4위), 1180,12(3위), 1181,33(1위), 1183,36(3위), 1186,2(4위), 1188,3(2위), 1188,12(3위), 1190,45(2위), 1192,10(1위), 1193,6(2위), 1194,15(2위), 1195,34(1위), 1195,27(2위), 1196,29(4위), 1197,5(5위), 1197,7(4위), 1198,30(4위), 1201,27(3위), 1202,21(3위), 1203,3(4위), 1203,6(5위), 1204,8(5위), 1206,26(4위), 1206,42(1위), 1207,24(2위), 1207,27(3위), 1213,25(5위), 1213,27(4위), 1214,10(3위), 1215,19(5위), 1215,45(4위), 1215,15(3위), 1216,24(2위), 1216,14(1위), 1217,20(5위), 1218,42(3위), 1219,28(4위), 1220,34(1위), 1221,18(2위), 1223,33(4위), 1224,21(3위), 1224,27(5위), 1225,42(5위)</a:t>
                       </a:r>
                     </a:p>
                   </a:txBody>
@@ -8091,7 +8091,7 @@
                           </a:solidFill>
                           <a:latin typeface="Apple SD Gothic Neo"/>
                         </a:rPr>
-                        <a:t>11개</a:t>
+                        <a:t>44개</a:t>
                       </a:r>
                     </a:p>
                   </a:txBody>
@@ -8114,7 +8114,7 @@
                           </a:solidFill>
                           <a:latin typeface="Apple SD Gothic Neo"/>
                         </a:rPr>
-                        <a:t>12.22%</a:t>
+                        <a:t>14.67%</a:t>
                       </a:r>
                     </a:p>
                   </a:txBody>
@@ -8137,7 +8137,7 @@
                           </a:solidFill>
                           <a:latin typeface="Apple SD Gothic Neo"/>
                         </a:rPr>
-                        <a:t>1213,11(8위), 1214,27(7위), 1215,19(9위), 1215,15(7위), 1216,3(8위), 1218,31(7위), 1219,2(10위), 1221,18(8위), 1224,18(10위), 1224,9(7위), 1225,19(8위)</a:t>
+                        <a:t>1176,21(9위), 1177,19(6위), 1177,15(8위), 1179,18(7위), 1181,20(8위), 1181,10(6위), 1182,1(8위), 1182,28(7위), 1183,17(9위), 1183,4(10위), 1185,22(6위), 1186,23(8위), 1189,9(8위), 1191,20(6위), 1192,36(7위), 1194,33(6위), 1196,45(6위), 1198,26(7위), 1199,32(9위), 1199,25(6위), 1199,31(7위), 1200,16(6위), 1200,4(10위), 1200,20(8위), 1201,35(10위), 1202,37(10위), 1203,18(6위), 1204,28(9위), 1205,41(9위), 1207,22(9위), 1207,45(8위), 1208,36(7위), 1210,9(10위), 1211,40(9위), 1216,3(8위), 1220,25(8위), 1220,43(7위), 1221,36(7위), 1221,6(10위), 1221,30(8위), 1222,17(7위), 1224,9(6위), 1225,19(7위), 1225,8(10위)</a:t>
                       </a:r>
                     </a:p>
                   </a:txBody>
@@ -8185,7 +8185,7 @@
                           </a:solidFill>
                           <a:latin typeface="Apple SD Gothic Neo"/>
                         </a:rPr>
-                        <a:t>15개</a:t>
+                        <a:t>38개</a:t>
                       </a:r>
                     </a:p>
                   </a:txBody>
@@ -8208,7 +8208,7 @@
                           </a:solidFill>
                           <a:latin typeface="Apple SD Gothic Neo"/>
                         </a:rPr>
-                        <a:t>16.67%</a:t>
+                        <a:t>12.67%</a:t>
                       </a:r>
                     </a:p>
                   </a:txBody>
@@ -8231,7 +8231,7 @@
                           </a:solidFill>
                           <a:latin typeface="Apple SD Gothic Neo"/>
                         </a:rPr>
-                        <a:t>1212,5(11위), 1212,8(15위), 1213,5(14위), 1213,38(13위), 1214,10(14위), 1216,15(12위), 1218,28(14위), 1219,1(11위), 1219,28(15위), 1219,45(14위), 1220,2(11위), 1220,25(14위), 1220,28(12위), 1222,41(15위), 1225,8(13위)</a:t>
+                        <a:t>1179,40(13위), 1181,14(13위), 1182,25(15위), 1182,31(13위), 1183,23(13위), 1183,15(11위), 1187,5(15위), 1187,40(12위), 1188,19(11위), 1189,35(14위), 1190,26(14위), 1193,24(14위), 1196,8(14위), 1198,38(12위), 1198,41(14위), 1201,9(11위), 1202,12(12위), 1204,44(11위), 1205,23(13위), 1206,17(14위), 1207,38(14위), 1209,20(12위), 1209,37(11위), 1210,7(15위), 1212,5(11위), 1212,8(13위), 1212,25(14위), 1214,33(14위), 1214,15(13위), 1215,21(12위), 1218,32(14위), 1218,28(13위), 1219,1(11위), 1219,2(13위), 1219,39(12위), 1221,13(11위), 1222,41(15위), 1224,44(15위)</a:t>
                       </a:r>
                     </a:p>
                   </a:txBody>
@@ -8279,7 +8279,7 @@
                           </a:solidFill>
                           <a:latin typeface="Apple SD Gothic Neo"/>
                         </a:rPr>
-                        <a:t>9개</a:t>
+                        <a:t>37개</a:t>
                       </a:r>
                     </a:p>
                   </a:txBody>
@@ -8302,7 +8302,7 @@
                           </a:solidFill>
                           <a:latin typeface="Apple SD Gothic Neo"/>
                         </a:rPr>
-                        <a:t>10.00%</a:t>
+                        <a:t>12.33%</a:t>
                       </a:r>
                     </a:p>
                   </a:txBody>
@@ -8325,7 +8325,7 @@
                           </a:solidFill>
                           <a:latin typeface="Apple SD Gothic Neo"/>
                         </a:rPr>
-                        <a:t>1215,13(20위), 1215,45(17위), 1216,24(16위), 1217,10(16위), 1217,31(20위), 1218,45(18위), 1220,22(16위), 1223,33(19위), 1225,41(18위)</a:t>
+                        <a:t>1177,16(20위), 1177,43(19위), 1178,44(20위), 1180,37(17위), 1182,13(19위), 1185,32(18위), 1185,29(19위), 1187,26(16위), 1189,38(19위), 1190,7(19위), 1191,1(18위), 1191,41(17위), 1192,39(19위), 1193,28(17위), 1194,24(20위), 1194,13(17위), 1195,15(19위), 1197,26(16위), 1197,43(20위), 1200,2(18위), 1201,36(18위), 1202,40(19위), 1203,29(16위), 1206,3(20위), 1207,10(16위), 1209,2(16위), 1212,44(19위), 1212,31(18위), 1213,11(16위), 1214,19(17위), 1214,30(20위), 1215,13(19위), 1217,29(19위), 1220,22(16위), 1222,4(19위), 1222,11(16위), 1223,16(18위)</a:t>
                       </a:r>
                     </a:p>
                   </a:txBody>
@@ -8373,7 +8373,7 @@
                           </a:solidFill>
                           <a:latin typeface="Apple SD Gothic Neo"/>
                         </a:rPr>
-                        <a:t>5개</a:t>
+                        <a:t>29개</a:t>
                       </a:r>
                     </a:p>
                   </a:txBody>
@@ -8392,11 +8392,11 @@
                       <a:r>
                         <a:rPr sz="1100" b="1">
                           <a:solidFill>
-                            <a:srgbClr val="2E5CB8"/>
-                          </a:solidFill>
-                          <a:latin typeface="Apple SD Gothic Neo"/>
-                        </a:rPr>
-                        <a:t>5.56%</a:t>
+                            <a:srgbClr val="555555"/>
+                          </a:solidFill>
+                          <a:latin typeface="Apple SD Gothic Neo"/>
+                        </a:rPr>
+                        <a:t>9.67%</a:t>
                       </a:r>
                     </a:p>
                   </a:txBody>
@@ -8419,7 +8419,7 @@
                           </a:solidFill>
                           <a:latin typeface="Apple SD Gothic Neo"/>
                         </a:rPr>
-                        <a:t>1212,25(21위), 1214,15(22위), 1217,20(21위), 1220,34(23위), 1224,44(24위)</a:t>
+                        <a:t>1176,9(23위), 1176,30(25위), 1178,6(22위), 1180,18(25위), 1182,21(21위), 1183,27(24위), 1188,27(25위), 1191,11(23위), 1193,9(22위), 1194,3(21위), 1195,33(22위), 1195,3(23위), 1196,15(21위), 1197,28(25위), 1198,39(24위), 1201,24(21위), 1204,30(22위), 1206,27(25위), 1208,27(25위), 1208,30(23위), 1209,35(24위), 1209,39(21위), 1210,27(23위), 1211,27(22위), 1212,41(21위), 1216,15(24위), 1218,45(22위), 1223,20(22위), 1224,18(24위)</a:t>
                       </a:r>
                     </a:p>
                   </a:txBody>
@@ -8467,7 +8467,7 @@
                           </a:solidFill>
                           <a:latin typeface="Apple SD Gothic Neo"/>
                         </a:rPr>
-                        <a:t>7개</a:t>
+                        <a:t>29개</a:t>
                       </a:r>
                     </a:p>
                   </a:txBody>
@@ -8490,7 +8490,7 @@
                           </a:solidFill>
                           <a:latin typeface="Apple SD Gothic Neo"/>
                         </a:rPr>
-                        <a:t>7.78%</a:t>
+                        <a:t>9.67%</a:t>
                       </a:r>
                     </a:p>
                   </a:txBody>
@@ -8513,7 +8513,7 @@
                           </a:solidFill>
                           <a:latin typeface="Apple SD Gothic Neo"/>
                         </a:rPr>
-                        <a:t>1211,35(30위), 1221,30(30위), 1222,11(28위), 1223,16(27위), 1223,18(26위), 1224,45(28위), 1225,25(28위)</a:t>
+                        <a:t>1179,3(26위), 1180,6(28위), 1181,8(30위), 1184,23(30위), 1184,25(29위), 1185,6(26위), 1189,29(30위), 1190,9(26위), 1191,12(29위), 1192,16(29위), 1192,40(28위), 1195,36(26위), 1196,12(26위), 1198,33(26위), 1199,16(26위), 1199,30(27위), 1203,39(29위), 1208,6(27위), 1208,42(28위), 1211,23(29위), 1213,36(30위), 1213,5(27위), 1214,27(27위), 1219,15(26위), 1223,18(28위), 1223,39(26위), 1224,45(26위), 1225,9(27위), 1225,25(30위)</a:t>
                       </a:r>
                     </a:p>
                   </a:txBody>
@@ -8561,7 +8561,7 @@
                           </a:solidFill>
                           <a:latin typeface="Apple SD Gothic Neo"/>
                         </a:rPr>
-                        <a:t>7개</a:t>
+                        <a:t>26개</a:t>
                       </a:r>
                     </a:p>
                   </a:txBody>
@@ -8584,7 +8584,7 @@
                           </a:solidFill>
                           <a:latin typeface="Apple SD Gothic Neo"/>
                         </a:rPr>
-                        <a:t>7.78%</a:t>
+                        <a:t>8.67%</a:t>
                       </a:r>
                     </a:p>
                   </a:txBody>
@@ -8607,7 +8607,7 @@
                           </a:solidFill>
                           <a:latin typeface="Apple SD Gothic Neo"/>
                         </a:rPr>
-                        <a:t>1212,31(31위), 1214,33(32위), 1217,29(32위), 1218,32(31위), 1221,36(31위), 1224,21(33위), 1225,9(33위)</a:t>
+                        <a:t>1176,7(35위), 1177,3(33위), 1180,40(34위), 1184,14(31위), 1185,17(35위), 1186,28(33위), 1187,13(35위), 1188,22(35위), 1189,37(32위), 1190,19(34위), 1192,23(35위), 1193,16(32위), 1193,19(31위), 1197,1(33위), 1200,1(33위), 1202,33(35위), 1202,5(33위), 1203,35(31위), 1205,16(32위), 1205,1(33위), 1205,4(31위), 1216,23(33위), 1218,3(32위), 1218,31(31위), 1219,45(32위), 1223,32(34위)</a:t>
                       </a:r>
                     </a:p>
                   </a:txBody>
@@ -8655,7 +8655,7 @@
                           </a:solidFill>
                           <a:latin typeface="Apple SD Gothic Neo"/>
                         </a:rPr>
-                        <a:t>9개</a:t>
+                        <a:t>32개</a:t>
                       </a:r>
                     </a:p>
                   </a:txBody>
@@ -8678,7 +8678,7 @@
                           </a:solidFill>
                           <a:latin typeface="Apple SD Gothic Neo"/>
                         </a:rPr>
-                        <a:t>10.00%</a:t>
+                        <a:t>10.67%</a:t>
                       </a:r>
                     </a:p>
                   </a:txBody>
@@ -8701,7 +8701,7 @@
                           </a:solidFill>
                           <a:latin typeface="Apple SD Gothic Neo"/>
                         </a:rPr>
-                        <a:t>1211,40(36위), 1211,26(39위), 1212,41(39위), 1214,19(40위), 1216,23(36위), 1218,3(39위), 1218,42(37위), 1219,39(39위), 1222,32(38위)</a:t>
+                        <a:t>1176,35(38위), 1178,5(40위), 1178,43(39위), 1179,16(40위), 1179,44(39위), 1181,41(38위), 1184,16(37위), 1184,37(40위), 1186,16(36위), 1186,8(39위), 1187,37(39위), 1187,29(36위), 1189,19(39위), 1194,37(39위), 1199,24(36위), 1200,32(37위), 1204,16(37위), 1204,31(39위), 1205,31(37위), 1206,1(36위), 1208,38(40위), 1209,17(37위), 1210,17(36위), 1211,35(37위), 1211,38(38위), 1211,26(39위), 1217,10(36위), 1217,31(38위), 1220,2(39위), 1220,28(36위), 1222,22(40위), 1225,41(39위)</a:t>
                       </a:r>
                     </a:p>
                   </a:txBody>
@@ -8732,7 +8732,7 @@
                   </a:txBody>
                   <a:tcPr anchor="ctr" marT="12700" marB="12700" marL="50800" marR="50800">
                     <a:solidFill>
-                      <a:srgbClr val="D4A017"/>
+                      <a:srgbClr val="FFFFFF"/>
                     </a:solidFill>
                   </a:tcPr>
                 </a:tc>
@@ -8749,7 +8749,7 @@
                           </a:solidFill>
                           <a:latin typeface="Apple SD Gothic Neo"/>
                         </a:rPr>
-                        <a:t>18개</a:t>
+                        <a:t>20개</a:t>
                       </a:r>
                     </a:p>
                   </a:txBody>
@@ -8768,11 +8768,11 @@
                       <a:r>
                         <a:rPr sz="1100" b="1">
                           <a:solidFill>
-                            <a:srgbClr val="C0392B"/>
-                          </a:solidFill>
-                          <a:latin typeface="Apple SD Gothic Neo"/>
-                        </a:rPr>
-                        <a:t>20.00%</a:t>
+                            <a:srgbClr val="2E5CB8"/>
+                          </a:solidFill>
+                          <a:latin typeface="Apple SD Gothic Neo"/>
+                        </a:rPr>
+                        <a:t>6.67%</a:t>
                       </a:r>
                     </a:p>
                   </a:txBody>
@@ -8795,7 +8795,7 @@
                           </a:solidFill>
                           <a:latin typeface="Apple SD Gothic Neo"/>
                         </a:rPr>
-                        <a:t>1211,23(44위), 1212,44(43위), 1213,36(43위), 1214,30(41위), 1215,21(41위), 1215,44(44위), 1216,10(42위), 1217,8(43위), 1217,15(45위), 1220,43(45위), 1221,6(42위), 1221,28(45위), 1222,4(44위), 1222,22(41위), 1223,20(42위), 1223,39(43위), 1224,27(44위), 1225,42(41위)</a:t>
+                        <a:t>1176,11(44위), 1177,7(42위), 1178,11(44위), 1184,31(42위), 1185,28(45위), 1186,13(41위), 1188,4(41위), 1190,23(44위), 1191,4(44위), 1196,40(43위), 1201,7(45위), 1210,1(43위), 1210,38(42위), 1213,38(43위), 1215,44(45위), 1216,10(44위), 1217,8(44위), 1217,15(45위), 1221,28(45위), 1222,32(41위)</a:t>
                       </a:r>
                     </a:p>
                   </a:txBody>
@@ -9112,7 +9112,7 @@
                 </a:solidFill>
                 <a:latin typeface="Apple SD Gothic Neo"/>
               </a:rPr>
-              <a:t>'41-45위' 그룹</a:t>
+              <a:t>'1-5위' 그룹</a:t>
             </a:r>
           </a:p>
         </p:txBody>
@@ -9147,7 +9147,7 @@
                 </a:solidFill>
                 <a:latin typeface="Apple SD Gothic Neo"/>
               </a:rPr>
-              <a:t>최근 15주 당첨 확률 20.00%</a:t>
+              <a:t>최근 50주 당첨 확률 15.00%</a:t>
             </a:r>
           </a:p>
           <a:p>
@@ -9159,7 +9159,7 @@
                 </a:solidFill>
                 <a:latin typeface="Apple SD Gothic Neo"/>
               </a:rPr>
-              <a:t>→ 1226회차 약 1.2개(1~3개) 포함 예상</a:t>
+              <a:t>→ 1226회차 약 0.9개(1~3개) 포함 예상</a:t>
             </a:r>
           </a:p>
         </p:txBody>
@@ -9317,7 +9317,7 @@
                 </a:solidFill>
                 <a:latin typeface="Apple SD Gothic Neo"/>
               </a:rPr>
-              <a:t>'21-25위' 그룹</a:t>
+              <a:t>'41-45위' 그룹</a:t>
             </a:r>
           </a:p>
         </p:txBody>
@@ -9352,7 +9352,7 @@
                 </a:solidFill>
                 <a:latin typeface="Apple SD Gothic Neo"/>
               </a:rPr>
-              <a:t>최근 15주 당첨 확률 5.56%</a:t>
+              <a:t>최근 50주 당첨 확률 6.67%</a:t>
             </a:r>
           </a:p>
           <a:p>
@@ -9399,7 +9399,7 @@
                 </a:solidFill>
                 <a:latin typeface="Apple SD Gothic Neo"/>
               </a:rPr>
-              <a:t>해석: 앙상블 추천 상위권만이 아니라 최하위권(41-45위) 번호도 통계적으로 무시할 수</a:t>
+              <a:t>해석: 분포 산정 창을 50주(총 300개 표본)로 확대하고 라이브 추천과 동일한 가중 점수</a:t>
             </a:r>
           </a:p>
           <a:p>
@@ -9411,7 +9411,7 @@
                 </a:solidFill>
                 <a:latin typeface="Apple SD Gothic Neo"/>
               </a:rPr>
-              <a:t>없는 적중률을 보입니다. 게임 구성 시 상위권 중심으로 하되 일부 하위권 번호를</a:t>
+              <a:t>기준으로 일관화한 결과, 상위권일수록 적중률이 높은 정상적인 단조 분포가 나타납니다.</a:t>
             </a:r>
           </a:p>
           <a:p>
@@ -9423,7 +9423,7 @@
                 </a:solidFill>
                 <a:latin typeface="Apple SD Gothic Neo"/>
               </a:rPr>
-              <a:t>분산 배치하는 전략이 유효할 수 있습니다.</a:t>
+              <a:t>게임 구성은 상위권(1-25위) 중심으로 하는 전략이 통계적으로 유효합니다.</a:t>
             </a:r>
           </a:p>
         </p:txBody>
@@ -14513,6 +14513,59 @@
             <a:avLst/>
           </a:prstGeom>
           <a:solidFill>
+            <a:srgbClr val="F6C343"/>
+          </a:solidFill>
+          <a:ln>
+            <a:noFill/>
+          </a:ln>
+          <a:effectLst/>
+        </p:spPr>
+        <p:style>
+          <a:lnRef idx="1">
+            <a:schemeClr val="accent1"/>
+          </a:lnRef>
+          <a:fillRef idx="3">
+            <a:schemeClr val="accent1"/>
+          </a:fillRef>
+          <a:effectRef idx="2">
+            <a:schemeClr val="accent1"/>
+          </a:effectRef>
+          <a:fontRef idx="minor">
+            <a:schemeClr val="lt1"/>
+          </a:fontRef>
+        </p:style>
+        <p:txBody>
+          <a:bodyPr rtlCol="0" anchor="ctr" wrap="none"/>
+          <a:lstStyle/>
+          <a:p>
+            <a:pPr algn="ctr"/>
+            <a:r>
+              <a:rPr sz="2000" b="1">
+                <a:solidFill>
+                  <a:srgbClr val="FFFFFF"/>
+                </a:solidFill>
+                <a:latin typeface="Apple SD Gothic Neo"/>
+              </a:rPr>
+              <a:t>7</a:t>
+            </a:r>
+          </a:p>
+        </p:txBody>
+      </p:sp>
+      <p:sp>
+        <p:nvSpPr>
+          <p:cNvPr id="9" name="Oval 8"/>
+          <p:cNvSpPr/>
+          <p:nvPr/>
+        </p:nvSpPr>
+        <p:spPr>
+          <a:xfrm>
+            <a:off x="3374136" y="1325880"/>
+            <a:ext cx="676656" cy="676656"/>
+          </a:xfrm>
+          <a:prstGeom prst="ellipse">
+            <a:avLst/>
+          </a:prstGeom>
+          <a:solidFill>
             <a:srgbClr val="4F9EE3"/>
           </a:solidFill>
           <a:ln>
@@ -14547,59 +14600,6 @@
                 <a:latin typeface="Apple SD Gothic Neo"/>
               </a:rPr>
               <a:t>14</a:t>
-            </a:r>
-          </a:p>
-        </p:txBody>
-      </p:sp>
-      <p:sp>
-        <p:nvSpPr>
-          <p:cNvPr id="9" name="Oval 8"/>
-          <p:cNvSpPr/>
-          <p:nvPr/>
-        </p:nvSpPr>
-        <p:spPr>
-          <a:xfrm>
-            <a:off x="3374136" y="1325880"/>
-            <a:ext cx="676656" cy="676656"/>
-          </a:xfrm>
-          <a:prstGeom prst="ellipse">
-            <a:avLst/>
-          </a:prstGeom>
-          <a:solidFill>
-            <a:srgbClr val="E86A5C"/>
-          </a:solidFill>
-          <a:ln>
-            <a:noFill/>
-          </a:ln>
-          <a:effectLst/>
-        </p:spPr>
-        <p:style>
-          <a:lnRef idx="1">
-            <a:schemeClr val="accent1"/>
-          </a:lnRef>
-          <a:fillRef idx="3">
-            <a:schemeClr val="accent1"/>
-          </a:fillRef>
-          <a:effectRef idx="2">
-            <a:schemeClr val="accent1"/>
-          </a:effectRef>
-          <a:fontRef idx="minor">
-            <a:schemeClr val="lt1"/>
-          </a:fontRef>
-        </p:style>
-        <p:txBody>
-          <a:bodyPr rtlCol="0" anchor="ctr" wrap="none"/>
-          <a:lstStyle/>
-          <a:p>
-            <a:pPr algn="ctr"/>
-            <a:r>
-              <a:rPr sz="2000" b="1">
-                <a:solidFill>
-                  <a:srgbClr val="FFFFFF"/>
-                </a:solidFill>
-                <a:latin typeface="Apple SD Gothic Neo"/>
-              </a:rPr>
-              <a:t>24</a:t>
             </a:r>
           </a:p>
         </p:txBody>
@@ -14652,7 +14652,7 @@
                 </a:solidFill>
                 <a:latin typeface="Apple SD Gothic Neo"/>
               </a:rPr>
-              <a:t>30</a:t>
+              <a:t>29</a:t>
             </a:r>
           </a:p>
         </p:txBody>
@@ -14705,7 +14705,7 @@
                 </a:solidFill>
                 <a:latin typeface="Apple SD Gothic Neo"/>
               </a:rPr>
-              <a:t>31</a:t>
+              <a:t>34</a:t>
             </a:r>
           </a:p>
         </p:txBody>
@@ -14793,7 +14793,7 @@
                 </a:solidFill>
                 <a:latin typeface="Apple SD Gothic Neo"/>
               </a:rPr>
-              <a:t>합:141 / 홀짝 3:3</a:t>
+              <a:t>합:126 / 홀짝 4:2</a:t>
             </a:r>
           </a:p>
         </p:txBody>
@@ -14925,7 +14925,7 @@
                 </a:solidFill>
                 <a:latin typeface="Apple SD Gothic Neo"/>
               </a:rPr>
-              <a:t>7</a:t>
+              <a:t>5</a:t>
             </a:r>
           </a:p>
         </p:txBody>
@@ -14945,7 +14945,7 @@
             <a:avLst/>
           </a:prstGeom>
           <a:solidFill>
-            <a:srgbClr val="F6C343"/>
+            <a:srgbClr val="E86A5C"/>
           </a:solidFill>
           <a:ln>
             <a:noFill/>
@@ -14978,7 +14978,7 @@
                 </a:solidFill>
                 <a:latin typeface="Apple SD Gothic Neo"/>
               </a:rPr>
-              <a:t>10</a:t>
+              <a:t>21</a:t>
             </a:r>
           </a:p>
         </p:txBody>
@@ -15137,7 +15137,7 @@
                 </a:solidFill>
                 <a:latin typeface="Apple SD Gothic Neo"/>
               </a:rPr>
-              <a:t>39</a:t>
+              <a:t>40</a:t>
             </a:r>
           </a:p>
         </p:txBody>
@@ -15190,7 +15190,7 @@
                 </a:solidFill>
                 <a:latin typeface="Apple SD Gothic Neo"/>
               </a:rPr>
-              <a:t>45</a:t>
+              <a:t>42</a:t>
             </a:r>
           </a:p>
         </p:txBody>
@@ -15225,7 +15225,7 @@
                 </a:solidFill>
                 <a:latin typeface="Apple SD Gothic Neo"/>
               </a:rPr>
-              <a:t>합:170 / 홀짝 4:2</a:t>
+              <a:t>합:177 / 홀짝 3:3</a:t>
             </a:r>
           </a:p>
         </p:txBody>
@@ -15357,7 +15357,7 @@
                 </a:solidFill>
                 <a:latin typeface="Apple SD Gothic Neo"/>
               </a:rPr>
-              <a:t>1</a:t>
+              <a:t>7</a:t>
             </a:r>
           </a:p>
         </p:txBody>
@@ -15377,7 +15377,7 @@
             <a:avLst/>
           </a:prstGeom>
           <a:solidFill>
-            <a:srgbClr val="F6C343"/>
+            <a:srgbClr val="E86A5C"/>
           </a:solidFill>
           <a:ln>
             <a:noFill/>
@@ -15410,7 +15410,7 @@
                 </a:solidFill>
                 <a:latin typeface="Apple SD Gothic Neo"/>
               </a:rPr>
-              <a:t>7</a:t>
+              <a:t>21</a:t>
             </a:r>
           </a:p>
         </p:txBody>
@@ -15430,7 +15430,7 @@
             <a:avLst/>
           </a:prstGeom>
           <a:solidFill>
-            <a:srgbClr val="4F9EE3"/>
+            <a:srgbClr val="E86A5C"/>
           </a:solidFill>
           <a:ln>
             <a:noFill/>
@@ -15463,7 +15463,7 @@
                 </a:solidFill>
                 <a:latin typeface="Apple SD Gothic Neo"/>
               </a:rPr>
-              <a:t>14</a:t>
+              <a:t>24</a:t>
             </a:r>
           </a:p>
         </p:txBody>
@@ -15516,7 +15516,7 @@
                 </a:solidFill>
                 <a:latin typeface="Apple SD Gothic Neo"/>
               </a:rPr>
-              <a:t>23</a:t>
+              <a:t>26</a:t>
             </a:r>
           </a:p>
         </p:txBody>
@@ -15530,6 +15530,59 @@
         <p:spPr>
           <a:xfrm>
             <a:off x="5056632" y="3191256"/>
+            <a:ext cx="676656" cy="676656"/>
+          </a:xfrm>
+          <a:prstGeom prst="ellipse">
+            <a:avLst/>
+          </a:prstGeom>
+          <a:solidFill>
+            <a:srgbClr val="E86A5C"/>
+          </a:solidFill>
+          <a:ln>
+            <a:noFill/>
+          </a:ln>
+          <a:effectLst/>
+        </p:spPr>
+        <p:style>
+          <a:lnRef idx="1">
+            <a:schemeClr val="accent1"/>
+          </a:lnRef>
+          <a:fillRef idx="3">
+            <a:schemeClr val="accent1"/>
+          </a:fillRef>
+          <a:effectRef idx="2">
+            <a:schemeClr val="accent1"/>
+          </a:effectRef>
+          <a:fontRef idx="minor">
+            <a:schemeClr val="lt1"/>
+          </a:fontRef>
+        </p:style>
+        <p:txBody>
+          <a:bodyPr rtlCol="0" anchor="ctr" wrap="none"/>
+          <a:lstStyle/>
+          <a:p>
+            <a:pPr algn="ctr"/>
+            <a:r>
+              <a:rPr sz="2000" b="1">
+                <a:solidFill>
+                  <a:srgbClr val="FFFFFF"/>
+                </a:solidFill>
+                <a:latin typeface="Apple SD Gothic Neo"/>
+              </a:rPr>
+              <a:t>29</a:t>
+            </a:r>
+          </a:p>
+        </p:txBody>
+      </p:sp>
+      <p:sp>
+        <p:nvSpPr>
+          <p:cNvPr id="30" name="Oval 29"/>
+          <p:cNvSpPr/>
+          <p:nvPr/>
+        </p:nvSpPr>
+        <p:spPr>
+          <a:xfrm>
+            <a:off x="5897880" y="3191256"/>
             <a:ext cx="676656" cy="676656"/>
           </a:xfrm>
           <a:prstGeom prst="ellipse">
@@ -15569,60 +15622,7 @@
                 </a:solidFill>
                 <a:latin typeface="Apple SD Gothic Neo"/>
               </a:rPr>
-              <a:t>37</a:t>
-            </a:r>
-          </a:p>
-        </p:txBody>
-      </p:sp>
-      <p:sp>
-        <p:nvSpPr>
-          <p:cNvPr id="30" name="Oval 29"/>
-          <p:cNvSpPr/>
-          <p:nvPr/>
-        </p:nvSpPr>
-        <p:spPr>
-          <a:xfrm>
-            <a:off x="5897880" y="3191256"/>
-            <a:ext cx="676656" cy="676656"/>
-          </a:xfrm>
-          <a:prstGeom prst="ellipse">
-            <a:avLst/>
-          </a:prstGeom>
-          <a:solidFill>
-            <a:srgbClr val="6FB86A"/>
-          </a:solidFill>
-          <a:ln>
-            <a:noFill/>
-          </a:ln>
-          <a:effectLst/>
-        </p:spPr>
-        <p:style>
-          <a:lnRef idx="1">
-            <a:schemeClr val="accent1"/>
-          </a:lnRef>
-          <a:fillRef idx="3">
-            <a:schemeClr val="accent1"/>
-          </a:fillRef>
-          <a:effectRef idx="2">
-            <a:schemeClr val="accent1"/>
-          </a:effectRef>
-          <a:fontRef idx="minor">
-            <a:schemeClr val="lt1"/>
-          </a:fontRef>
-        </p:style>
-        <p:txBody>
-          <a:bodyPr rtlCol="0" anchor="ctr" wrap="none"/>
-          <a:lstStyle/>
-          <a:p>
-            <a:pPr algn="ctr"/>
-            <a:r>
-              <a:rPr sz="2000" b="1">
-                <a:solidFill>
-                  <a:srgbClr val="FFFFFF"/>
-                </a:solidFill>
-                <a:latin typeface="Apple SD Gothic Neo"/>
-              </a:rPr>
-              <a:t>42</a:t>
+              <a:t>31</a:t>
             </a:r>
           </a:p>
         </p:txBody>
@@ -15657,7 +15657,7 @@
                 </a:solidFill>
                 <a:latin typeface="Apple SD Gothic Neo"/>
               </a:rPr>
-              <a:t>합:124 / 홀짝 4:2</a:t>
+              <a:t>합:138 / 홀짝 4:2</a:t>
             </a:r>
           </a:p>
         </p:txBody>
@@ -15789,7 +15789,7 @@
                 </a:solidFill>
                 <a:latin typeface="Apple SD Gothic Neo"/>
               </a:rPr>
-              <a:t>7</a:t>
+              <a:t>2</a:t>
             </a:r>
           </a:p>
         </p:txBody>
@@ -15809,7 +15809,7 @@
             <a:avLst/>
           </a:prstGeom>
           <a:solidFill>
-            <a:srgbClr val="F6C343"/>
+            <a:srgbClr val="E86A5C"/>
           </a:solidFill>
           <a:ln>
             <a:noFill/>
@@ -15842,7 +15842,7 @@
                 </a:solidFill>
                 <a:latin typeface="Apple SD Gothic Neo"/>
               </a:rPr>
-              <a:t>10</a:t>
+              <a:t>21</a:t>
             </a:r>
           </a:p>
         </p:txBody>
@@ -15862,7 +15862,7 @@
             <a:avLst/>
           </a:prstGeom>
           <a:solidFill>
-            <a:srgbClr val="4F9EE3"/>
+            <a:srgbClr val="E86A5C"/>
           </a:solidFill>
           <a:ln>
             <a:noFill/>
@@ -15895,7 +15895,7 @@
                 </a:solidFill>
                 <a:latin typeface="Apple SD Gothic Neo"/>
               </a:rPr>
-              <a:t>12</a:t>
+              <a:t>23</a:t>
             </a:r>
           </a:p>
         </p:txBody>
@@ -15915,7 +15915,7 @@
             <a:avLst/>
           </a:prstGeom>
           <a:solidFill>
-            <a:srgbClr val="4F9EE3"/>
+            <a:srgbClr val="E86A5C"/>
           </a:solidFill>
           <a:ln>
             <a:noFill/>
@@ -15948,7 +15948,7 @@
                 </a:solidFill>
                 <a:latin typeface="Apple SD Gothic Neo"/>
               </a:rPr>
-              <a:t>18</a:t>
+              <a:t>29</a:t>
             </a:r>
           </a:p>
         </p:txBody>
@@ -16001,7 +16001,7 @@
                 </a:solidFill>
                 <a:latin typeface="Apple SD Gothic Neo"/>
               </a:rPr>
-              <a:t>37</a:t>
+              <a:t>40</a:t>
             </a:r>
           </a:p>
         </p:txBody>
@@ -16089,7 +16089,7 @@
                 </a:solidFill>
                 <a:latin typeface="Apple SD Gothic Neo"/>
               </a:rPr>
-              <a:t>합:129 / 홀짝 3:3</a:t>
+              <a:t>합:160 / 홀짝 4:2</a:t>
             </a:r>
           </a:p>
         </p:txBody>
@@ -16274,7 +16274,7 @@
                 </a:solidFill>
                 <a:latin typeface="Apple SD Gothic Neo"/>
               </a:rPr>
-              <a:t>14</a:t>
+              <a:t>12</a:t>
             </a:r>
           </a:p>
         </p:txBody>
@@ -16288,6 +16288,59 @@
         <p:spPr>
           <a:xfrm>
             <a:off x="3374136" y="5056632"/>
+            <a:ext cx="676656" cy="676656"/>
+          </a:xfrm>
+          <a:prstGeom prst="ellipse">
+            <a:avLst/>
+          </a:prstGeom>
+          <a:solidFill>
+            <a:srgbClr val="4F9EE3"/>
+          </a:solidFill>
+          <a:ln>
+            <a:noFill/>
+          </a:ln>
+          <a:effectLst/>
+        </p:spPr>
+        <p:style>
+          <a:lnRef idx="1">
+            <a:schemeClr val="accent1"/>
+          </a:lnRef>
+          <a:fillRef idx="3">
+            <a:schemeClr val="accent1"/>
+          </a:fillRef>
+          <a:effectRef idx="2">
+            <a:schemeClr val="accent1"/>
+          </a:effectRef>
+          <a:fontRef idx="minor">
+            <a:schemeClr val="lt1"/>
+          </a:fontRef>
+        </p:style>
+        <p:txBody>
+          <a:bodyPr rtlCol="0" anchor="ctr" wrap="none"/>
+          <a:lstStyle/>
+          <a:p>
+            <a:pPr algn="ctr"/>
+            <a:r>
+              <a:rPr sz="2000" b="1">
+                <a:solidFill>
+                  <a:srgbClr val="FFFFFF"/>
+                </a:solidFill>
+                <a:latin typeface="Apple SD Gothic Neo"/>
+              </a:rPr>
+              <a:t>14</a:t>
+            </a:r>
+          </a:p>
+        </p:txBody>
+      </p:sp>
+      <p:sp>
+        <p:nvSpPr>
+          <p:cNvPr id="46" name="Oval 45"/>
+          <p:cNvSpPr/>
+          <p:nvPr/>
+        </p:nvSpPr>
+        <p:spPr>
+          <a:xfrm>
+            <a:off x="4215384" y="5056632"/>
             <a:ext cx="676656" cy="676656"/>
           </a:xfrm>
           <a:prstGeom prst="ellipse">
@@ -16328,59 +16381,6 @@
                 <a:latin typeface="Apple SD Gothic Neo"/>
               </a:rPr>
               <a:t>23</a:t>
-            </a:r>
-          </a:p>
-        </p:txBody>
-      </p:sp>
-      <p:sp>
-        <p:nvSpPr>
-          <p:cNvPr id="46" name="Oval 45"/>
-          <p:cNvSpPr/>
-          <p:nvPr/>
-        </p:nvSpPr>
-        <p:spPr>
-          <a:xfrm>
-            <a:off x="4215384" y="5056632"/>
-            <a:ext cx="676656" cy="676656"/>
-          </a:xfrm>
-          <a:prstGeom prst="ellipse">
-            <a:avLst/>
-          </a:prstGeom>
-          <a:solidFill>
-            <a:srgbClr val="8A8F9A"/>
-          </a:solidFill>
-          <a:ln>
-            <a:noFill/>
-          </a:ln>
-          <a:effectLst/>
-        </p:spPr>
-        <p:style>
-          <a:lnRef idx="1">
-            <a:schemeClr val="accent1"/>
-          </a:lnRef>
-          <a:fillRef idx="3">
-            <a:schemeClr val="accent1"/>
-          </a:fillRef>
-          <a:effectRef idx="2">
-            <a:schemeClr val="accent1"/>
-          </a:effectRef>
-          <a:fontRef idx="minor">
-            <a:schemeClr val="lt1"/>
-          </a:fontRef>
-        </p:style>
-        <p:txBody>
-          <a:bodyPr rtlCol="0" anchor="ctr" wrap="none"/>
-          <a:lstStyle/>
-          <a:p>
-            <a:pPr algn="ctr"/>
-            <a:r>
-              <a:rPr sz="2000" b="1">
-                <a:solidFill>
-                  <a:srgbClr val="FFFFFF"/>
-                </a:solidFill>
-                <a:latin typeface="Apple SD Gothic Neo"/>
-              </a:rPr>
-              <a:t>37</a:t>
             </a:r>
           </a:p>
         </p:txBody>
@@ -16453,7 +16453,7 @@
             <a:avLst/>
           </a:prstGeom>
           <a:solidFill>
-            <a:srgbClr val="6FB86A"/>
+            <a:srgbClr val="8A8F9A"/>
           </a:solidFill>
           <a:ln>
             <a:noFill/>
@@ -16486,7 +16486,7 @@
                 </a:solidFill>
                 <a:latin typeface="Apple SD Gothic Neo"/>
               </a:rPr>
-              <a:t>42</a:t>
+              <a:t>40</a:t>
             </a:r>
           </a:p>
         </p:txBody>
@@ -16521,7 +16521,7 @@
                 </a:solidFill>
                 <a:latin typeface="Apple SD Gothic Neo"/>
               </a:rPr>
-              <a:t>합:158 / 홀짝 4:2</a:t>
+              <a:t>합:131 / 홀짝 3:3</a:t>
             </a:r>
           </a:p>
         </p:txBody>

--- a/로또_1226회차_분석리포트.pptx
+++ b/로또_1226회차_분석리포트.pptx
@@ -14361,7 +14361,7 @@
                 </a:solidFill>
                 <a:latin typeface="Apple SD Gothic Neo"/>
               </a:rPr>
-              <a:t>최종 추천 5게임 (자동 필터링)</a:t>
+              <a:t>최종 추천 5게임 (순위그룹 분포 가중 추출 · 고확률 필터)</a:t>
             </a:r>
           </a:p>
         </p:txBody>
@@ -14546,7 +14546,7 @@
                 </a:solidFill>
                 <a:latin typeface="Apple SD Gothic Neo"/>
               </a:rPr>
-              <a:t>7</a:t>
+              <a:t>5</a:t>
             </a:r>
           </a:p>
         </p:txBody>
@@ -14599,7 +14599,7 @@
                 </a:solidFill>
                 <a:latin typeface="Apple SD Gothic Neo"/>
               </a:rPr>
-              <a:t>14</a:t>
+              <a:t>12</a:t>
             </a:r>
           </a:p>
         </p:txBody>
@@ -14619,7 +14619,7 @@
             <a:avLst/>
           </a:prstGeom>
           <a:solidFill>
-            <a:srgbClr val="E86A5C"/>
+            <a:srgbClr val="4F9EE3"/>
           </a:solidFill>
           <a:ln>
             <a:noFill/>
@@ -14652,7 +14652,7 @@
                 </a:solidFill>
                 <a:latin typeface="Apple SD Gothic Neo"/>
               </a:rPr>
-              <a:t>29</a:t>
+              <a:t>15</a:t>
             </a:r>
           </a:p>
         </p:txBody>
@@ -14705,7 +14705,7 @@
                 </a:solidFill>
                 <a:latin typeface="Apple SD Gothic Neo"/>
               </a:rPr>
-              <a:t>34</a:t>
+              <a:t>35</a:t>
             </a:r>
           </a:p>
         </p:txBody>
@@ -14758,7 +14758,7 @@
                 </a:solidFill>
                 <a:latin typeface="Apple SD Gothic Neo"/>
               </a:rPr>
-              <a:t>39</a:t>
+              <a:t>40</a:t>
             </a:r>
           </a:p>
         </p:txBody>
@@ -14793,7 +14793,7 @@
                 </a:solidFill>
                 <a:latin typeface="Apple SD Gothic Neo"/>
               </a:rPr>
-              <a:t>합:126 / 홀짝 4:2</a:t>
+              <a:t>합:110 / 홀짝 4:2</a:t>
             </a:r>
           </a:p>
         </p:txBody>
@@ -14925,7 +14925,7 @@
                 </a:solidFill>
                 <a:latin typeface="Apple SD Gothic Neo"/>
               </a:rPr>
-              <a:t>5</a:t>
+              <a:t>3</a:t>
             </a:r>
           </a:p>
         </p:txBody>
@@ -14939,6 +14939,112 @@
         <p:spPr>
           <a:xfrm>
             <a:off x="2532888" y="2258568"/>
+            <a:ext cx="676656" cy="676656"/>
+          </a:xfrm>
+          <a:prstGeom prst="ellipse">
+            <a:avLst/>
+          </a:prstGeom>
+          <a:solidFill>
+            <a:srgbClr val="F6C343"/>
+          </a:solidFill>
+          <a:ln>
+            <a:noFill/>
+          </a:ln>
+          <a:effectLst/>
+        </p:spPr>
+        <p:style>
+          <a:lnRef idx="1">
+            <a:schemeClr val="accent1"/>
+          </a:lnRef>
+          <a:fillRef idx="3">
+            <a:schemeClr val="accent1"/>
+          </a:fillRef>
+          <a:effectRef idx="2">
+            <a:schemeClr val="accent1"/>
+          </a:effectRef>
+          <a:fontRef idx="minor">
+            <a:schemeClr val="lt1"/>
+          </a:fontRef>
+        </p:style>
+        <p:txBody>
+          <a:bodyPr rtlCol="0" anchor="ctr" wrap="none"/>
+          <a:lstStyle/>
+          <a:p>
+            <a:pPr algn="ctr"/>
+            <a:r>
+              <a:rPr sz="2000" b="1">
+                <a:solidFill>
+                  <a:srgbClr val="FFFFFF"/>
+                </a:solidFill>
+                <a:latin typeface="Apple SD Gothic Neo"/>
+              </a:rPr>
+              <a:t>10</a:t>
+            </a:r>
+          </a:p>
+        </p:txBody>
+      </p:sp>
+      <p:sp>
+        <p:nvSpPr>
+          <p:cNvPr id="18" name="Oval 17"/>
+          <p:cNvSpPr/>
+          <p:nvPr/>
+        </p:nvSpPr>
+        <p:spPr>
+          <a:xfrm>
+            <a:off x="3374136" y="2258568"/>
+            <a:ext cx="676656" cy="676656"/>
+          </a:xfrm>
+          <a:prstGeom prst="ellipse">
+            <a:avLst/>
+          </a:prstGeom>
+          <a:solidFill>
+            <a:srgbClr val="4F9EE3"/>
+          </a:solidFill>
+          <a:ln>
+            <a:noFill/>
+          </a:ln>
+          <a:effectLst/>
+        </p:spPr>
+        <p:style>
+          <a:lnRef idx="1">
+            <a:schemeClr val="accent1"/>
+          </a:lnRef>
+          <a:fillRef idx="3">
+            <a:schemeClr val="accent1"/>
+          </a:fillRef>
+          <a:effectRef idx="2">
+            <a:schemeClr val="accent1"/>
+          </a:effectRef>
+          <a:fontRef idx="minor">
+            <a:schemeClr val="lt1"/>
+          </a:fontRef>
+        </p:style>
+        <p:txBody>
+          <a:bodyPr rtlCol="0" anchor="ctr" wrap="none"/>
+          <a:lstStyle/>
+          <a:p>
+            <a:pPr algn="ctr"/>
+            <a:r>
+              <a:rPr sz="2000" b="1">
+                <a:solidFill>
+                  <a:srgbClr val="FFFFFF"/>
+                </a:solidFill>
+                <a:latin typeface="Apple SD Gothic Neo"/>
+              </a:rPr>
+              <a:t>12</a:t>
+            </a:r>
+          </a:p>
+        </p:txBody>
+      </p:sp>
+      <p:sp>
+        <p:nvSpPr>
+          <p:cNvPr id="19" name="Oval 18"/>
+          <p:cNvSpPr/>
+          <p:nvPr/>
+        </p:nvSpPr>
+        <p:spPr>
+          <a:xfrm>
+            <a:off x="4215384" y="2258568"/>
             <a:ext cx="676656" cy="676656"/>
           </a:xfrm>
           <a:prstGeom prst="ellipse">
@@ -14978,113 +15084,7 @@
                 </a:solidFill>
                 <a:latin typeface="Apple SD Gothic Neo"/>
               </a:rPr>
-              <a:t>21</a:t>
-            </a:r>
-          </a:p>
-        </p:txBody>
-      </p:sp>
-      <p:sp>
-        <p:nvSpPr>
-          <p:cNvPr id="18" name="Oval 17"/>
-          <p:cNvSpPr/>
-          <p:nvPr/>
-        </p:nvSpPr>
-        <p:spPr>
-          <a:xfrm>
-            <a:off x="3374136" y="2258568"/>
-            <a:ext cx="676656" cy="676656"/>
-          </a:xfrm>
-          <a:prstGeom prst="ellipse">
-            <a:avLst/>
-          </a:prstGeom>
-          <a:solidFill>
-            <a:srgbClr val="8A8F9A"/>
-          </a:solidFill>
-          <a:ln>
-            <a:noFill/>
-          </a:ln>
-          <a:effectLst/>
-        </p:spPr>
-        <p:style>
-          <a:lnRef idx="1">
-            <a:schemeClr val="accent1"/>
-          </a:lnRef>
-          <a:fillRef idx="3">
-            <a:schemeClr val="accent1"/>
-          </a:fillRef>
-          <a:effectRef idx="2">
-            <a:schemeClr val="accent1"/>
-          </a:effectRef>
-          <a:fontRef idx="minor">
-            <a:schemeClr val="lt1"/>
-          </a:fontRef>
-        </p:style>
-        <p:txBody>
-          <a:bodyPr rtlCol="0" anchor="ctr" wrap="none"/>
-          <a:lstStyle/>
-          <a:p>
-            <a:pPr algn="ctr"/>
-            <a:r>
-              <a:rPr sz="2000" b="1">
-                <a:solidFill>
-                  <a:srgbClr val="FFFFFF"/>
-                </a:solidFill>
-                <a:latin typeface="Apple SD Gothic Neo"/>
-              </a:rPr>
-              <a:t>31</a:t>
-            </a:r>
-          </a:p>
-        </p:txBody>
-      </p:sp>
-      <p:sp>
-        <p:nvSpPr>
-          <p:cNvPr id="19" name="Oval 18"/>
-          <p:cNvSpPr/>
-          <p:nvPr/>
-        </p:nvSpPr>
-        <p:spPr>
-          <a:xfrm>
-            <a:off x="4215384" y="2258568"/>
-            <a:ext cx="676656" cy="676656"/>
-          </a:xfrm>
-          <a:prstGeom prst="ellipse">
-            <a:avLst/>
-          </a:prstGeom>
-          <a:solidFill>
-            <a:srgbClr val="8A8F9A"/>
-          </a:solidFill>
-          <a:ln>
-            <a:noFill/>
-          </a:ln>
-          <a:effectLst/>
-        </p:spPr>
-        <p:style>
-          <a:lnRef idx="1">
-            <a:schemeClr val="accent1"/>
-          </a:lnRef>
-          <a:fillRef idx="3">
-            <a:schemeClr val="accent1"/>
-          </a:fillRef>
-          <a:effectRef idx="2">
-            <a:schemeClr val="accent1"/>
-          </a:effectRef>
-          <a:fontRef idx="minor">
-            <a:schemeClr val="lt1"/>
-          </a:fontRef>
-        </p:style>
-        <p:txBody>
-          <a:bodyPr rtlCol="0" anchor="ctr" wrap="none"/>
-          <a:lstStyle/>
-          <a:p>
-            <a:pPr algn="ctr"/>
-            <a:r>
-              <a:rPr sz="2000" b="1">
-                <a:solidFill>
-                  <a:srgbClr val="FFFFFF"/>
-                </a:solidFill>
-                <a:latin typeface="Apple SD Gothic Neo"/>
-              </a:rPr>
-              <a:t>38</a:t>
+              <a:t>24</a:t>
             </a:r>
           </a:p>
         </p:txBody>
@@ -15137,7 +15137,7 @@
                 </a:solidFill>
                 <a:latin typeface="Apple SD Gothic Neo"/>
               </a:rPr>
-              <a:t>40</a:t>
+              <a:t>34</a:t>
             </a:r>
           </a:p>
         </p:txBody>
@@ -15157,7 +15157,7 @@
             <a:avLst/>
           </a:prstGeom>
           <a:solidFill>
-            <a:srgbClr val="6FB86A"/>
+            <a:srgbClr val="8A8F9A"/>
           </a:solidFill>
           <a:ln>
             <a:noFill/>
@@ -15190,7 +15190,7 @@
                 </a:solidFill>
                 <a:latin typeface="Apple SD Gothic Neo"/>
               </a:rPr>
-              <a:t>42</a:t>
+              <a:t>35</a:t>
             </a:r>
           </a:p>
         </p:txBody>
@@ -15225,7 +15225,7 @@
                 </a:solidFill>
                 <a:latin typeface="Apple SD Gothic Neo"/>
               </a:rPr>
-              <a:t>합:177 / 홀짝 3:3</a:t>
+              <a:t>합:118 / 홀짝 2:4</a:t>
             </a:r>
           </a:p>
         </p:txBody>
@@ -15357,7 +15357,7 @@
                 </a:solidFill>
                 <a:latin typeface="Apple SD Gothic Neo"/>
               </a:rPr>
-              <a:t>7</a:t>
+              <a:t>3</a:t>
             </a:r>
           </a:p>
         </p:txBody>
@@ -15377,7 +15377,7 @@
             <a:avLst/>
           </a:prstGeom>
           <a:solidFill>
-            <a:srgbClr val="E86A5C"/>
+            <a:srgbClr val="F6C343"/>
           </a:solidFill>
           <a:ln>
             <a:noFill/>
@@ -15410,7 +15410,7 @@
                 </a:solidFill>
                 <a:latin typeface="Apple SD Gothic Neo"/>
               </a:rPr>
-              <a:t>21</a:t>
+              <a:t>10</a:t>
             </a:r>
           </a:p>
         </p:txBody>
@@ -15430,7 +15430,7 @@
             <a:avLst/>
           </a:prstGeom>
           <a:solidFill>
-            <a:srgbClr val="E86A5C"/>
+            <a:srgbClr val="4F9EE3"/>
           </a:solidFill>
           <a:ln>
             <a:noFill/>
@@ -15463,7 +15463,7 @@
                 </a:solidFill>
                 <a:latin typeface="Apple SD Gothic Neo"/>
               </a:rPr>
-              <a:t>24</a:t>
+              <a:t>15</a:t>
             </a:r>
           </a:p>
         </p:txBody>
@@ -15477,112 +15477,6 @@
         <p:spPr>
           <a:xfrm>
             <a:off x="4215384" y="3191256"/>
-            <a:ext cx="676656" cy="676656"/>
-          </a:xfrm>
-          <a:prstGeom prst="ellipse">
-            <a:avLst/>
-          </a:prstGeom>
-          <a:solidFill>
-            <a:srgbClr val="E86A5C"/>
-          </a:solidFill>
-          <a:ln>
-            <a:noFill/>
-          </a:ln>
-          <a:effectLst/>
-        </p:spPr>
-        <p:style>
-          <a:lnRef idx="1">
-            <a:schemeClr val="accent1"/>
-          </a:lnRef>
-          <a:fillRef idx="3">
-            <a:schemeClr val="accent1"/>
-          </a:fillRef>
-          <a:effectRef idx="2">
-            <a:schemeClr val="accent1"/>
-          </a:effectRef>
-          <a:fontRef idx="minor">
-            <a:schemeClr val="lt1"/>
-          </a:fontRef>
-        </p:style>
-        <p:txBody>
-          <a:bodyPr rtlCol="0" anchor="ctr" wrap="none"/>
-          <a:lstStyle/>
-          <a:p>
-            <a:pPr algn="ctr"/>
-            <a:r>
-              <a:rPr sz="2000" b="1">
-                <a:solidFill>
-                  <a:srgbClr val="FFFFFF"/>
-                </a:solidFill>
-                <a:latin typeface="Apple SD Gothic Neo"/>
-              </a:rPr>
-              <a:t>26</a:t>
-            </a:r>
-          </a:p>
-        </p:txBody>
-      </p:sp>
-      <p:sp>
-        <p:nvSpPr>
-          <p:cNvPr id="29" name="Oval 28"/>
-          <p:cNvSpPr/>
-          <p:nvPr/>
-        </p:nvSpPr>
-        <p:spPr>
-          <a:xfrm>
-            <a:off x="5056632" y="3191256"/>
-            <a:ext cx="676656" cy="676656"/>
-          </a:xfrm>
-          <a:prstGeom prst="ellipse">
-            <a:avLst/>
-          </a:prstGeom>
-          <a:solidFill>
-            <a:srgbClr val="E86A5C"/>
-          </a:solidFill>
-          <a:ln>
-            <a:noFill/>
-          </a:ln>
-          <a:effectLst/>
-        </p:spPr>
-        <p:style>
-          <a:lnRef idx="1">
-            <a:schemeClr val="accent1"/>
-          </a:lnRef>
-          <a:fillRef idx="3">
-            <a:schemeClr val="accent1"/>
-          </a:fillRef>
-          <a:effectRef idx="2">
-            <a:schemeClr val="accent1"/>
-          </a:effectRef>
-          <a:fontRef idx="minor">
-            <a:schemeClr val="lt1"/>
-          </a:fontRef>
-        </p:style>
-        <p:txBody>
-          <a:bodyPr rtlCol="0" anchor="ctr" wrap="none"/>
-          <a:lstStyle/>
-          <a:p>
-            <a:pPr algn="ctr"/>
-            <a:r>
-              <a:rPr sz="2000" b="1">
-                <a:solidFill>
-                  <a:srgbClr val="FFFFFF"/>
-                </a:solidFill>
-                <a:latin typeface="Apple SD Gothic Neo"/>
-              </a:rPr>
-              <a:t>29</a:t>
-            </a:r>
-          </a:p>
-        </p:txBody>
-      </p:sp>
-      <p:sp>
-        <p:nvSpPr>
-          <p:cNvPr id="30" name="Oval 29"/>
-          <p:cNvSpPr/>
-          <p:nvPr/>
-        </p:nvSpPr>
-        <p:spPr>
-          <a:xfrm>
-            <a:off x="5897880" y="3191256"/>
             <a:ext cx="676656" cy="676656"/>
           </a:xfrm>
           <a:prstGeom prst="ellipse">
@@ -15629,6 +15523,112 @@
       </p:sp>
       <p:sp>
         <p:nvSpPr>
+          <p:cNvPr id="29" name="Oval 28"/>
+          <p:cNvSpPr/>
+          <p:nvPr/>
+        </p:nvSpPr>
+        <p:spPr>
+          <a:xfrm>
+            <a:off x="5056632" y="3191256"/>
+            <a:ext cx="676656" cy="676656"/>
+          </a:xfrm>
+          <a:prstGeom prst="ellipse">
+            <a:avLst/>
+          </a:prstGeom>
+          <a:solidFill>
+            <a:srgbClr val="8A8F9A"/>
+          </a:solidFill>
+          <a:ln>
+            <a:noFill/>
+          </a:ln>
+          <a:effectLst/>
+        </p:spPr>
+        <p:style>
+          <a:lnRef idx="1">
+            <a:schemeClr val="accent1"/>
+          </a:lnRef>
+          <a:fillRef idx="3">
+            <a:schemeClr val="accent1"/>
+          </a:fillRef>
+          <a:effectRef idx="2">
+            <a:schemeClr val="accent1"/>
+          </a:effectRef>
+          <a:fontRef idx="minor">
+            <a:schemeClr val="lt1"/>
+          </a:fontRef>
+        </p:style>
+        <p:txBody>
+          <a:bodyPr rtlCol="0" anchor="ctr" wrap="none"/>
+          <a:lstStyle/>
+          <a:p>
+            <a:pPr algn="ctr"/>
+            <a:r>
+              <a:rPr sz="2000" b="1">
+                <a:solidFill>
+                  <a:srgbClr val="FFFFFF"/>
+                </a:solidFill>
+                <a:latin typeface="Apple SD Gothic Neo"/>
+              </a:rPr>
+              <a:t>35</a:t>
+            </a:r>
+          </a:p>
+        </p:txBody>
+      </p:sp>
+      <p:sp>
+        <p:nvSpPr>
+          <p:cNvPr id="30" name="Oval 29"/>
+          <p:cNvSpPr/>
+          <p:nvPr/>
+        </p:nvSpPr>
+        <p:spPr>
+          <a:xfrm>
+            <a:off x="5897880" y="3191256"/>
+            <a:ext cx="676656" cy="676656"/>
+          </a:xfrm>
+          <a:prstGeom prst="ellipse">
+            <a:avLst/>
+          </a:prstGeom>
+          <a:solidFill>
+            <a:srgbClr val="6FB86A"/>
+          </a:solidFill>
+          <a:ln>
+            <a:noFill/>
+          </a:ln>
+          <a:effectLst/>
+        </p:spPr>
+        <p:style>
+          <a:lnRef idx="1">
+            <a:schemeClr val="accent1"/>
+          </a:lnRef>
+          <a:fillRef idx="3">
+            <a:schemeClr val="accent1"/>
+          </a:fillRef>
+          <a:effectRef idx="2">
+            <a:schemeClr val="accent1"/>
+          </a:effectRef>
+          <a:fontRef idx="minor">
+            <a:schemeClr val="lt1"/>
+          </a:fontRef>
+        </p:style>
+        <p:txBody>
+          <a:bodyPr rtlCol="0" anchor="ctr" wrap="none"/>
+          <a:lstStyle/>
+          <a:p>
+            <a:pPr algn="ctr"/>
+            <a:r>
+              <a:rPr sz="2000" b="1">
+                <a:solidFill>
+                  <a:srgbClr val="FFFFFF"/>
+                </a:solidFill>
+                <a:latin typeface="Apple SD Gothic Neo"/>
+              </a:rPr>
+              <a:t>45</a:t>
+            </a:r>
+          </a:p>
+        </p:txBody>
+      </p:sp>
+      <p:sp>
+        <p:nvSpPr>
           <p:cNvPr id="31" name="TextBox 30"/>
           <p:cNvSpPr txBox="1"/>
           <p:nvPr/>
@@ -15657,7 +15657,7 @@
                 </a:solidFill>
                 <a:latin typeface="Apple SD Gothic Neo"/>
               </a:rPr>
-              <a:t>합:138 / 홀짝 4:2</a:t>
+              <a:t>합:139 / 홀짝 5:1</a:t>
             </a:r>
           </a:p>
         </p:txBody>
@@ -15789,7 +15789,7 @@
                 </a:solidFill>
                 <a:latin typeface="Apple SD Gothic Neo"/>
               </a:rPr>
-              <a:t>2</a:t>
+              <a:t>3</a:t>
             </a:r>
           </a:p>
         </p:txBody>
@@ -15803,6 +15803,165 @@
         <p:spPr>
           <a:xfrm>
             <a:off x="2532888" y="4123944"/>
+            <a:ext cx="676656" cy="676656"/>
+          </a:xfrm>
+          <a:prstGeom prst="ellipse">
+            <a:avLst/>
+          </a:prstGeom>
+          <a:solidFill>
+            <a:srgbClr val="F6C343"/>
+          </a:solidFill>
+          <a:ln>
+            <a:noFill/>
+          </a:ln>
+          <a:effectLst/>
+        </p:spPr>
+        <p:style>
+          <a:lnRef idx="1">
+            <a:schemeClr val="accent1"/>
+          </a:lnRef>
+          <a:fillRef idx="3">
+            <a:schemeClr val="accent1"/>
+          </a:fillRef>
+          <a:effectRef idx="2">
+            <a:schemeClr val="accent1"/>
+          </a:effectRef>
+          <a:fontRef idx="minor">
+            <a:schemeClr val="lt1"/>
+          </a:fontRef>
+        </p:style>
+        <p:txBody>
+          <a:bodyPr rtlCol="0" anchor="ctr" wrap="none"/>
+          <a:lstStyle/>
+          <a:p>
+            <a:pPr algn="ctr"/>
+            <a:r>
+              <a:rPr sz="2000" b="1">
+                <a:solidFill>
+                  <a:srgbClr val="FFFFFF"/>
+                </a:solidFill>
+                <a:latin typeface="Apple SD Gothic Neo"/>
+              </a:rPr>
+              <a:t>10</a:t>
+            </a:r>
+          </a:p>
+        </p:txBody>
+      </p:sp>
+      <p:sp>
+        <p:nvSpPr>
+          <p:cNvPr id="36" name="Oval 35"/>
+          <p:cNvSpPr/>
+          <p:nvPr/>
+        </p:nvSpPr>
+        <p:spPr>
+          <a:xfrm>
+            <a:off x="3374136" y="4123944"/>
+            <a:ext cx="676656" cy="676656"/>
+          </a:xfrm>
+          <a:prstGeom prst="ellipse">
+            <a:avLst/>
+          </a:prstGeom>
+          <a:solidFill>
+            <a:srgbClr val="4F9EE3"/>
+          </a:solidFill>
+          <a:ln>
+            <a:noFill/>
+          </a:ln>
+          <a:effectLst/>
+        </p:spPr>
+        <p:style>
+          <a:lnRef idx="1">
+            <a:schemeClr val="accent1"/>
+          </a:lnRef>
+          <a:fillRef idx="3">
+            <a:schemeClr val="accent1"/>
+          </a:fillRef>
+          <a:effectRef idx="2">
+            <a:schemeClr val="accent1"/>
+          </a:effectRef>
+          <a:fontRef idx="minor">
+            <a:schemeClr val="lt1"/>
+          </a:fontRef>
+        </p:style>
+        <p:txBody>
+          <a:bodyPr rtlCol="0" anchor="ctr" wrap="none"/>
+          <a:lstStyle/>
+          <a:p>
+            <a:pPr algn="ctr"/>
+            <a:r>
+              <a:rPr sz="2000" b="1">
+                <a:solidFill>
+                  <a:srgbClr val="FFFFFF"/>
+                </a:solidFill>
+                <a:latin typeface="Apple SD Gothic Neo"/>
+              </a:rPr>
+              <a:t>14</a:t>
+            </a:r>
+          </a:p>
+        </p:txBody>
+      </p:sp>
+      <p:sp>
+        <p:nvSpPr>
+          <p:cNvPr id="37" name="Oval 36"/>
+          <p:cNvSpPr/>
+          <p:nvPr/>
+        </p:nvSpPr>
+        <p:spPr>
+          <a:xfrm>
+            <a:off x="4215384" y="4123944"/>
+            <a:ext cx="676656" cy="676656"/>
+          </a:xfrm>
+          <a:prstGeom prst="ellipse">
+            <a:avLst/>
+          </a:prstGeom>
+          <a:solidFill>
+            <a:srgbClr val="4F9EE3"/>
+          </a:solidFill>
+          <a:ln>
+            <a:noFill/>
+          </a:ln>
+          <a:effectLst/>
+        </p:spPr>
+        <p:style>
+          <a:lnRef idx="1">
+            <a:schemeClr val="accent1"/>
+          </a:lnRef>
+          <a:fillRef idx="3">
+            <a:schemeClr val="accent1"/>
+          </a:fillRef>
+          <a:effectRef idx="2">
+            <a:schemeClr val="accent1"/>
+          </a:effectRef>
+          <a:fontRef idx="minor">
+            <a:schemeClr val="lt1"/>
+          </a:fontRef>
+        </p:style>
+        <p:txBody>
+          <a:bodyPr rtlCol="0" anchor="ctr" wrap="none"/>
+          <a:lstStyle/>
+          <a:p>
+            <a:pPr algn="ctr"/>
+            <a:r>
+              <a:rPr sz="2000" b="1">
+                <a:solidFill>
+                  <a:srgbClr val="FFFFFF"/>
+                </a:solidFill>
+                <a:latin typeface="Apple SD Gothic Neo"/>
+              </a:rPr>
+              <a:t>15</a:t>
+            </a:r>
+          </a:p>
+        </p:txBody>
+      </p:sp>
+      <p:sp>
+        <p:nvSpPr>
+          <p:cNvPr id="38" name="Oval 37"/>
+          <p:cNvSpPr/>
+          <p:nvPr/>
+        </p:nvSpPr>
+        <p:spPr>
+          <a:xfrm>
+            <a:off x="5056632" y="4123944"/>
             <a:ext cx="676656" cy="676656"/>
           </a:xfrm>
           <a:prstGeom prst="ellipse">
@@ -15842,126 +16001,20 @@
                 </a:solidFill>
                 <a:latin typeface="Apple SD Gothic Neo"/>
               </a:rPr>
-              <a:t>21</a:t>
+              <a:t>29</a:t>
             </a:r>
           </a:p>
         </p:txBody>
       </p:sp>
       <p:sp>
         <p:nvSpPr>
-          <p:cNvPr id="36" name="Oval 35"/>
+          <p:cNvPr id="39" name="Oval 38"/>
           <p:cNvSpPr/>
           <p:nvPr/>
         </p:nvSpPr>
         <p:spPr>
           <a:xfrm>
-            <a:off x="3374136" y="4123944"/>
-            <a:ext cx="676656" cy="676656"/>
-          </a:xfrm>
-          <a:prstGeom prst="ellipse">
-            <a:avLst/>
-          </a:prstGeom>
-          <a:solidFill>
-            <a:srgbClr val="E86A5C"/>
-          </a:solidFill>
-          <a:ln>
-            <a:noFill/>
-          </a:ln>
-          <a:effectLst/>
-        </p:spPr>
-        <p:style>
-          <a:lnRef idx="1">
-            <a:schemeClr val="accent1"/>
-          </a:lnRef>
-          <a:fillRef idx="3">
-            <a:schemeClr val="accent1"/>
-          </a:fillRef>
-          <a:effectRef idx="2">
-            <a:schemeClr val="accent1"/>
-          </a:effectRef>
-          <a:fontRef idx="minor">
-            <a:schemeClr val="lt1"/>
-          </a:fontRef>
-        </p:style>
-        <p:txBody>
-          <a:bodyPr rtlCol="0" anchor="ctr" wrap="none"/>
-          <a:lstStyle/>
-          <a:p>
-            <a:pPr algn="ctr"/>
-            <a:r>
-              <a:rPr sz="2000" b="1">
-                <a:solidFill>
-                  <a:srgbClr val="FFFFFF"/>
-                </a:solidFill>
-                <a:latin typeface="Apple SD Gothic Neo"/>
-              </a:rPr>
-              <a:t>23</a:t>
-            </a:r>
-          </a:p>
-        </p:txBody>
-      </p:sp>
-      <p:sp>
-        <p:nvSpPr>
-          <p:cNvPr id="37" name="Oval 36"/>
-          <p:cNvSpPr/>
-          <p:nvPr/>
-        </p:nvSpPr>
-        <p:spPr>
-          <a:xfrm>
-            <a:off x="4215384" y="4123944"/>
-            <a:ext cx="676656" cy="676656"/>
-          </a:xfrm>
-          <a:prstGeom prst="ellipse">
-            <a:avLst/>
-          </a:prstGeom>
-          <a:solidFill>
-            <a:srgbClr val="E86A5C"/>
-          </a:solidFill>
-          <a:ln>
-            <a:noFill/>
-          </a:ln>
-          <a:effectLst/>
-        </p:spPr>
-        <p:style>
-          <a:lnRef idx="1">
-            <a:schemeClr val="accent1"/>
-          </a:lnRef>
-          <a:fillRef idx="3">
-            <a:schemeClr val="accent1"/>
-          </a:fillRef>
-          <a:effectRef idx="2">
-            <a:schemeClr val="accent1"/>
-          </a:effectRef>
-          <a:fontRef idx="minor">
-            <a:schemeClr val="lt1"/>
-          </a:fontRef>
-        </p:style>
-        <p:txBody>
-          <a:bodyPr rtlCol="0" anchor="ctr" wrap="none"/>
-          <a:lstStyle/>
-          <a:p>
-            <a:pPr algn="ctr"/>
-            <a:r>
-              <a:rPr sz="2000" b="1">
-                <a:solidFill>
-                  <a:srgbClr val="FFFFFF"/>
-                </a:solidFill>
-                <a:latin typeface="Apple SD Gothic Neo"/>
-              </a:rPr>
-              <a:t>29</a:t>
-            </a:r>
-          </a:p>
-        </p:txBody>
-      </p:sp>
-      <p:sp>
-        <p:nvSpPr>
-          <p:cNvPr id="38" name="Oval 37"/>
-          <p:cNvSpPr/>
-          <p:nvPr/>
-        </p:nvSpPr>
-        <p:spPr>
-          <a:xfrm>
-            <a:off x="5056632" y="4123944"/>
+            <a:off x="5897880" y="4123944"/>
             <a:ext cx="676656" cy="676656"/>
           </a:xfrm>
           <a:prstGeom prst="ellipse">
@@ -16001,60 +16054,7 @@
                 </a:solidFill>
                 <a:latin typeface="Apple SD Gothic Neo"/>
               </a:rPr>
-              <a:t>40</a:t>
-            </a:r>
-          </a:p>
-        </p:txBody>
-      </p:sp>
-      <p:sp>
-        <p:nvSpPr>
-          <p:cNvPr id="39" name="Oval 38"/>
-          <p:cNvSpPr/>
-          <p:nvPr/>
-        </p:nvSpPr>
-        <p:spPr>
-          <a:xfrm>
-            <a:off x="5897880" y="4123944"/>
-            <a:ext cx="676656" cy="676656"/>
-          </a:xfrm>
-          <a:prstGeom prst="ellipse">
-            <a:avLst/>
-          </a:prstGeom>
-          <a:solidFill>
-            <a:srgbClr val="6FB86A"/>
-          </a:solidFill>
-          <a:ln>
-            <a:noFill/>
-          </a:ln>
-          <a:effectLst/>
-        </p:spPr>
-        <p:style>
-          <a:lnRef idx="1">
-            <a:schemeClr val="accent1"/>
-          </a:lnRef>
-          <a:fillRef idx="3">
-            <a:schemeClr val="accent1"/>
-          </a:fillRef>
-          <a:effectRef idx="2">
-            <a:schemeClr val="accent1"/>
-          </a:effectRef>
-          <a:fontRef idx="minor">
-            <a:schemeClr val="lt1"/>
-          </a:fontRef>
-        </p:style>
-        <p:txBody>
-          <a:bodyPr rtlCol="0" anchor="ctr" wrap="none"/>
-          <a:lstStyle/>
-          <a:p>
-            <a:pPr algn="ctr"/>
-            <a:r>
-              <a:rPr sz="2000" b="1">
-                <a:solidFill>
-                  <a:srgbClr val="FFFFFF"/>
-                </a:solidFill>
-                <a:latin typeface="Apple SD Gothic Neo"/>
-              </a:rPr>
-              <a:t>45</a:t>
+              <a:t>35</a:t>
             </a:r>
           </a:p>
         </p:txBody>
@@ -16089,7 +16089,7 @@
                 </a:solidFill>
                 <a:latin typeface="Apple SD Gothic Neo"/>
               </a:rPr>
-              <a:t>합:160 / 홀짝 4:2</a:t>
+              <a:t>합:106 / 홀짝 4:2</a:t>
             </a:r>
           </a:p>
         </p:txBody>
@@ -16221,7 +16221,7 @@
                 </a:solidFill>
                 <a:latin typeface="Apple SD Gothic Neo"/>
               </a:rPr>
-              <a:t>3</a:t>
+              <a:t>1</a:t>
             </a:r>
           </a:p>
         </p:txBody>
@@ -16241,7 +16241,7 @@
             <a:avLst/>
           </a:prstGeom>
           <a:solidFill>
-            <a:srgbClr val="4F9EE3"/>
+            <a:srgbClr val="F6C343"/>
           </a:solidFill>
           <a:ln>
             <a:noFill/>
@@ -16274,7 +16274,7 @@
                 </a:solidFill>
                 <a:latin typeface="Apple SD Gothic Neo"/>
               </a:rPr>
-              <a:t>12</a:t>
+              <a:t>10</a:t>
             </a:r>
           </a:p>
         </p:txBody>
@@ -16327,7 +16327,7 @@
                 </a:solidFill>
                 <a:latin typeface="Apple SD Gothic Neo"/>
               </a:rPr>
-              <a:t>14</a:t>
+              <a:t>15</a:t>
             </a:r>
           </a:p>
         </p:txBody>
@@ -16380,7 +16380,7 @@
                 </a:solidFill>
                 <a:latin typeface="Apple SD Gothic Neo"/>
               </a:rPr>
-              <a:t>23</a:t>
+              <a:t>24</a:t>
             </a:r>
           </a:p>
         </p:txBody>
@@ -16433,7 +16433,7 @@
                 </a:solidFill>
                 <a:latin typeface="Apple SD Gothic Neo"/>
               </a:rPr>
-              <a:t>39</a:t>
+              <a:t>35</a:t>
             </a:r>
           </a:p>
         </p:txBody>
@@ -16453,7 +16453,7 @@
             <a:avLst/>
           </a:prstGeom>
           <a:solidFill>
-            <a:srgbClr val="8A8F9A"/>
+            <a:srgbClr val="6FB86A"/>
           </a:solidFill>
           <a:ln>
             <a:noFill/>
@@ -16486,7 +16486,7 @@
                 </a:solidFill>
                 <a:latin typeface="Apple SD Gothic Neo"/>
               </a:rPr>
-              <a:t>40</a:t>
+              <a:t>45</a:t>
             </a:r>
           </a:p>
         </p:txBody>
@@ -16521,7 +16521,7 @@
                 </a:solidFill>
                 <a:latin typeface="Apple SD Gothic Neo"/>
               </a:rPr>
-              <a:t>합:131 / 홀짝 3:3</a:t>
+              <a:t>합:130 / 홀짝 4:2</a:t>
             </a:r>
           </a:p>
         </p:txBody>
@@ -16534,8 +16534,8 @@
         </p:nvSpPr>
         <p:spPr>
           <a:xfrm>
-            <a:off x="548640" y="6172200"/>
-            <a:ext cx="10972800" cy="457200"/>
+            <a:off x="548640" y="5989320"/>
+            <a:ext cx="11155680" cy="365760"/>
           </a:xfrm>
           <a:prstGeom prst="rect">
             <a:avLst/>
@@ -16550,13 +16550,48 @@
           <a:p>
             <a:pPr algn="l"/>
             <a:r>
-              <a:rPr sz="1200" b="0">
+              <a:rPr sz="1100" b="0">
                 <a:solidFill>
                   <a:srgbClr val="999999"/>
                 </a:solidFill>
                 <a:latin typeface="Apple SD Gothic Neo"/>
               </a:rPr>
-              <a:t>필터 조건: 합 100~180 · 홀수 2~4개 · 저수(≤22) 2~4개 · 끝수 4종↑ · 소수·3배수 각 1↑</a:t>
+              <a:t>적용 필터(이력 기반 고확률): 합계 98~177 · 홀수 1~5개 · 저수(≤22) 1~5개 · 연속쌍 0~2 · AC 6~10 · 끝수 4종↑</a:t>
+            </a:r>
+          </a:p>
+        </p:txBody>
+      </p:sp>
+      <p:sp>
+        <p:nvSpPr>
+          <p:cNvPr id="51" name="TextBox 50"/>
+          <p:cNvSpPr txBox="1"/>
+          <p:nvPr/>
+        </p:nvSpPr>
+        <p:spPr>
+          <a:xfrm>
+            <a:off x="548640" y="6355080"/>
+            <a:ext cx="11155680" cy="365760"/>
+          </a:xfrm>
+          <a:prstGeom prst="rect">
+            <a:avLst/>
+          </a:prstGeom>
+          <a:noFill/>
+        </p:spPr>
+        <p:txBody>
+          <a:bodyPr wrap="square" anchor="t">
+            <a:spAutoFit/>
+          </a:bodyPr>
+          <a:lstStyle/>
+          <a:p>
+            <a:pPr algn="l"/>
+            <a:r>
+              <a:rPr sz="1100" b="0">
+                <a:solidFill>
+                  <a:srgbClr val="999999"/>
+                </a:solidFill>
+                <a:latin typeface="Apple SD Gothic Neo"/>
+              </a:rPr>
+              <a:t>채택: 45개 전체에서 순위그룹 당첨확률 비례로 추출 → 적합도(분포 정렬도) 상위 5게임 (무작위 채택 제거)</a:t>
             </a:r>
           </a:p>
         </p:txBody>
